--- a/BLC_Commercial_Deck_Braze.pptx
+++ b/BLC_Commercial_Deck_Braze.pptx
@@ -3238,7 +3238,7 @@
                 <a:solidFill>
                   <a:srgbClr val="FFA524"/>
                 </a:solidFill>
-                <a:latin typeface="Arial"/>
+                <a:latin typeface="Helvetica Neue"/>
               </a:rPr>
               <a:t>AI DECISIONING</a:t>
             </a:r>
@@ -3277,7 +3277,7 @@
                 <a:solidFill>
                   <a:srgbClr val="801ED7"/>
                 </a:solidFill>
-                <a:latin typeface="Arial"/>
+                <a:latin typeface="Helvetica Neue"/>
               </a:rPr>
               <a:t>Commercials for Blue Light Card</a:t>
             </a:r>
@@ -3356,7 +3356,7 @@
                 <a:solidFill>
                   <a:srgbClr val="555266"/>
                 </a:solidFill>
-                <a:latin typeface="Arial"/>
+                <a:latin typeface="Helvetica Neue"/>
               </a:rPr>
               <a:t>Year-one investment, cost structure &amp; path to ROI</a:t>
             </a:r>
@@ -3391,7 +3391,7 @@
                 <a:solidFill>
                   <a:srgbClr val="8A8699"/>
                 </a:solidFill>
-                <a:latin typeface="Arial"/>
+                <a:latin typeface="Helvetica Neue"/>
               </a:rPr>
               <a:t>Confidential</a:t>
             </a:r>
@@ -3418,14 +3418,117 @@
       <p:grpSpPr/>
       <p:sp>
         <p:nvSpPr>
-          <p:cNvPr id="2" name="TextBox 1"/>
+          <p:cNvPr id="2" name="Rectangle 1"/>
+          <p:cNvSpPr/>
+          <p:nvPr/>
+        </p:nvSpPr>
+        <p:spPr>
+          <a:xfrm>
+            <a:off x="0" y="0"/>
+            <a:ext cx="9143771" cy="5143500"/>
+          </a:xfrm>
+          <a:prstGeom prst="rect">
+            <a:avLst/>
+          </a:prstGeom>
+          <a:solidFill>
+            <a:srgbClr val="FFFFFF"/>
+          </a:solidFill>
+          <a:ln>
+            <a:noFill/>
+          </a:ln>
+          <a:effectLst/>
+        </p:spPr>
+        <p:style>
+          <a:lnRef idx="1">
+            <a:schemeClr val="accent1"/>
+          </a:lnRef>
+          <a:fillRef idx="3">
+            <a:schemeClr val="accent1"/>
+          </a:fillRef>
+          <a:effectRef idx="2">
+            <a:schemeClr val="accent1"/>
+          </a:effectRef>
+          <a:fontRef idx="minor">
+            <a:schemeClr val="lt1"/>
+          </a:fontRef>
+        </p:style>
+        <p:txBody>
+          <a:bodyPr rtlCol="0" anchor="ctr"/>
+          <a:lstStyle/>
+          <a:p>
+            <a:pPr algn="ctr"/>
+          </a:p>
+        </p:txBody>
+      </p:sp>
+      <p:pic>
+        <p:nvPicPr>
+          <p:cNvPr id="3" name="Picture 2" descr="brazeai_logo.png"/>
+          <p:cNvPicPr>
+            <a:picLocks noChangeAspect="1"/>
+          </p:cNvPicPr>
+          <p:nvPr/>
+        </p:nvPicPr>
+        <p:blipFill>
+          <a:blip r:embed="rId2"/>
+          <a:stretch>
+            <a:fillRect/>
+          </a:stretch>
+        </p:blipFill>
+        <p:spPr>
+          <a:xfrm>
+            <a:off x="8090607" y="233172"/>
+            <a:ext cx="641684" cy="274320"/>
+          </a:xfrm>
+          <a:prstGeom prst="rect">
+            <a:avLst/>
+          </a:prstGeom>
+        </p:spPr>
+      </p:pic>
+      <p:sp>
+        <p:nvSpPr>
+          <p:cNvPr id="4" name="TextBox 3"/>
           <p:cNvSpPr txBox="1"/>
           <p:nvPr/>
         </p:nvSpPr>
         <p:spPr>
           <a:xfrm>
+            <a:off x="8183651" y="4855464"/>
+            <a:ext cx="548640" cy="205739"/>
+          </a:xfrm>
+          <a:prstGeom prst="rect">
+            <a:avLst/>
+          </a:prstGeom>
+          <a:noFill/>
+        </p:spPr>
+        <p:txBody>
+          <a:bodyPr wrap="square" lIns="0" rIns="0" tIns="0" bIns="0">
+            <a:spAutoFit/>
+          </a:bodyPr>
+          <a:lstStyle/>
+          <a:p>
+            <a:pPr algn="r"/>
+            <a:r>
+              <a:rPr sz="675" b="0" i="0">
+                <a:solidFill>
+                  <a:srgbClr val="8A8699"/>
+                </a:solidFill>
+                <a:latin typeface="Helvetica Neue"/>
+              </a:rPr>
+              <a:t>10</a:t>
+            </a:r>
+          </a:p>
+        </p:txBody>
+      </p:sp>
+      <p:sp>
+        <p:nvSpPr>
+          <p:cNvPr id="5" name="TextBox 4"/>
+          <p:cNvSpPr txBox="1"/>
+          <p:nvPr/>
+        </p:nvSpPr>
+        <p:spPr>
+          <a:xfrm>
             <a:off x="411479" y="342900"/>
-            <a:ext cx="8183651" cy="480059"/>
+            <a:ext cx="8183651" cy="548640"/>
           </a:xfrm>
           <a:prstGeom prst="rect">
             <a:avLst/>
@@ -3448,7 +3551,7 @@
                 <a:solidFill>
                   <a:srgbClr val="801ED7"/>
                 </a:solidFill>
-                <a:latin typeface="Arial"/>
+                <a:latin typeface="Helvetica Neue"/>
               </a:rPr>
               <a:t>Cumulative cost vs. value — and the ask</a:t>
             </a:r>
@@ -3457,7 +3560,7 @@
       </p:sp>
       <p:sp>
         <p:nvSpPr>
-          <p:cNvPr id="3" name="TextBox 2"/>
+          <p:cNvPr id="6" name="TextBox 5"/>
           <p:cNvSpPr txBox="1"/>
           <p:nvPr/>
         </p:nvSpPr>
@@ -3487,7 +3590,7 @@
                 <a:solidFill>
                   <a:srgbClr val="FFA524"/>
                 </a:solidFill>
-                <a:latin typeface="Arial"/>
+                <a:latin typeface="Helvetica Neue"/>
               </a:rPr>
               <a:t>Value compounds while the subscription accrues evenly — break-even May 2027, 3.9× year-end at the early-sign rate</a:t>
             </a:r>
@@ -3496,7 +3599,7 @@
       </p:sp>
       <p:sp>
         <p:nvSpPr>
-          <p:cNvPr id="4" name="Rectangle 3"/>
+          <p:cNvPr id="7" name="Rectangle 6"/>
           <p:cNvSpPr/>
           <p:nvPr/>
         </p:nvSpPr>
@@ -3538,68 +3641,9 @@
           </a:p>
         </p:txBody>
       </p:sp>
-      <p:pic>
-        <p:nvPicPr>
-          <p:cNvPr id="5" name="Picture 4" descr="brazeai_logo.png"/>
-          <p:cNvPicPr>
-            <a:picLocks noChangeAspect="1"/>
-          </p:cNvPicPr>
-          <p:nvPr/>
-        </p:nvPicPr>
-        <p:blipFill>
-          <a:blip r:embed="rId2"/>
-          <a:stretch>
-            <a:fillRect/>
-          </a:stretch>
-        </p:blipFill>
-        <p:spPr>
-          <a:xfrm>
-            <a:off x="8090607" y="233172"/>
-            <a:ext cx="641684" cy="274320"/>
-          </a:xfrm>
-          <a:prstGeom prst="rect">
-            <a:avLst/>
-          </a:prstGeom>
-        </p:spPr>
-      </p:pic>
-      <p:sp>
-        <p:nvSpPr>
-          <p:cNvPr id="6" name="TextBox 5"/>
-          <p:cNvSpPr txBox="1"/>
-          <p:nvPr/>
-        </p:nvSpPr>
-        <p:spPr>
-          <a:xfrm>
-            <a:off x="8183651" y="4855464"/>
-            <a:ext cx="548640" cy="205739"/>
-          </a:xfrm>
-          <a:prstGeom prst="rect">
-            <a:avLst/>
-          </a:prstGeom>
-          <a:noFill/>
-        </p:spPr>
-        <p:txBody>
-          <a:bodyPr wrap="square" lIns="0" rIns="0" tIns="0" bIns="0">
-            <a:spAutoFit/>
-          </a:bodyPr>
-          <a:lstStyle/>
-          <a:p>
-            <a:pPr algn="r"/>
-            <a:r>
-              <a:rPr sz="675" b="0" i="0">
-                <a:solidFill>
-                  <a:srgbClr val="8A8699"/>
-                </a:solidFill>
-                <a:latin typeface="Arial"/>
-              </a:rPr>
-              <a:t>10</a:t>
-            </a:r>
-          </a:p>
-        </p:txBody>
-      </p:sp>
       <p:graphicFrame>
         <p:nvGraphicFramePr>
-          <p:cNvPr id="7" name="Table 6"/>
+          <p:cNvPr id="8" name="Table 7"/>
           <p:cNvGraphicFramePr>
             <a:graphicFrameLocks noGrp="1"/>
           </p:cNvGraphicFramePr>
@@ -3642,13 +3686,13 @@
                           <a:solidFill>
                             <a:srgbClr val="1A1A24"/>
                           </a:solidFill>
-                          <a:latin typeface="Arial"/>
+                          <a:latin typeface="Helvetica Neue"/>
                         </a:rPr>
                         <a:t/>
                       </a:r>
                     </a:p>
                   </a:txBody>
-                  <a:tcPr anchor="ctr" marL="13716" marR="13716" marT="0" marB="0">
+                  <a:tcPr anchor="ctr" marL="20574" marR="20574" marT="0" marB="0">
                     <a:solidFill>
                       <a:srgbClr val="FFFFFF"/>
                     </a:solidFill>
@@ -3665,13 +3709,13 @@
                           <a:solidFill>
                             <a:srgbClr val="FFFFFF"/>
                           </a:solidFill>
-                          <a:latin typeface="Arial"/>
+                          <a:latin typeface="Helvetica Neue"/>
                         </a:rPr>
                         <a:t>Nov M1</a:t>
                       </a:r>
                     </a:p>
                   </a:txBody>
-                  <a:tcPr anchor="ctr" marL="13716" marR="13716" marT="0" marB="0">
+                  <a:tcPr anchor="ctr" marL="20574" marR="20574" marT="0" marB="0">
                     <a:solidFill>
                       <a:srgbClr val="801ED7"/>
                     </a:solidFill>
@@ -3688,13 +3732,13 @@
                           <a:solidFill>
                             <a:srgbClr val="FFFFFF"/>
                           </a:solidFill>
-                          <a:latin typeface="Arial"/>
+                          <a:latin typeface="Helvetica Neue"/>
                         </a:rPr>
                         <a:t>Dec M2</a:t>
                       </a:r>
                     </a:p>
                   </a:txBody>
-                  <a:tcPr anchor="ctr" marL="13716" marR="13716" marT="0" marB="0">
+                  <a:tcPr anchor="ctr" marL="20574" marR="20574" marT="0" marB="0">
                     <a:solidFill>
                       <a:srgbClr val="801ED7"/>
                     </a:solidFill>
@@ -3711,13 +3755,13 @@
                           <a:solidFill>
                             <a:srgbClr val="FFFFFF"/>
                           </a:solidFill>
-                          <a:latin typeface="Arial"/>
+                          <a:latin typeface="Helvetica Neue"/>
                         </a:rPr>
                         <a:t>Jan M3</a:t>
                       </a:r>
                     </a:p>
                   </a:txBody>
-                  <a:tcPr anchor="ctr" marL="13716" marR="13716" marT="0" marB="0">
+                  <a:tcPr anchor="ctr" marL="20574" marR="20574" marT="0" marB="0">
                     <a:solidFill>
                       <a:srgbClr val="801ED7"/>
                     </a:solidFill>
@@ -3734,13 +3778,13 @@
                           <a:solidFill>
                             <a:srgbClr val="FFFFFF"/>
                           </a:solidFill>
-                          <a:latin typeface="Arial"/>
+                          <a:latin typeface="Helvetica Neue"/>
                         </a:rPr>
                         <a:t>Feb M4</a:t>
                       </a:r>
                     </a:p>
                   </a:txBody>
-                  <a:tcPr anchor="ctr" marL="13716" marR="13716" marT="0" marB="0">
+                  <a:tcPr anchor="ctr" marL="20574" marR="20574" marT="0" marB="0">
                     <a:solidFill>
                       <a:srgbClr val="801ED7"/>
                     </a:solidFill>
@@ -3757,13 +3801,13 @@
                           <a:solidFill>
                             <a:srgbClr val="FFFFFF"/>
                           </a:solidFill>
-                          <a:latin typeface="Arial"/>
+                          <a:latin typeface="Helvetica Neue"/>
                         </a:rPr>
                         <a:t>Mar M5</a:t>
                       </a:r>
                     </a:p>
                   </a:txBody>
-                  <a:tcPr anchor="ctr" marL="13716" marR="13716" marT="0" marB="0">
+                  <a:tcPr anchor="ctr" marL="20574" marR="20574" marT="0" marB="0">
                     <a:solidFill>
                       <a:srgbClr val="801ED7"/>
                     </a:solidFill>
@@ -3780,13 +3824,13 @@
                           <a:solidFill>
                             <a:srgbClr val="FFFFFF"/>
                           </a:solidFill>
-                          <a:latin typeface="Arial"/>
+                          <a:latin typeface="Helvetica Neue"/>
                         </a:rPr>
                         <a:t>Apr M6</a:t>
                       </a:r>
                     </a:p>
                   </a:txBody>
-                  <a:tcPr anchor="ctr" marL="13716" marR="13716" marT="0" marB="0">
+                  <a:tcPr anchor="ctr" marL="20574" marR="20574" marT="0" marB="0">
                     <a:solidFill>
                       <a:srgbClr val="801ED7"/>
                     </a:solidFill>
@@ -3803,13 +3847,13 @@
                           <a:solidFill>
                             <a:srgbClr val="FFFFFF"/>
                           </a:solidFill>
-                          <a:latin typeface="Arial"/>
+                          <a:latin typeface="Helvetica Neue"/>
                         </a:rPr>
                         <a:t>May M7</a:t>
                       </a:r>
                     </a:p>
                   </a:txBody>
-                  <a:tcPr anchor="ctr" marL="13716" marR="13716" marT="0" marB="0">
+                  <a:tcPr anchor="ctr" marL="20574" marR="20574" marT="0" marB="0">
                     <a:solidFill>
                       <a:srgbClr val="801ED7"/>
                     </a:solidFill>
@@ -3826,13 +3870,13 @@
                           <a:solidFill>
                             <a:srgbClr val="FFFFFF"/>
                           </a:solidFill>
-                          <a:latin typeface="Arial"/>
+                          <a:latin typeface="Helvetica Neue"/>
                         </a:rPr>
                         <a:t>Jun M8</a:t>
                       </a:r>
                     </a:p>
                   </a:txBody>
-                  <a:tcPr anchor="ctr" marL="13716" marR="13716" marT="0" marB="0">
+                  <a:tcPr anchor="ctr" marL="20574" marR="20574" marT="0" marB="0">
                     <a:solidFill>
                       <a:srgbClr val="801ED7"/>
                     </a:solidFill>
@@ -3849,13 +3893,13 @@
                           <a:solidFill>
                             <a:srgbClr val="FFFFFF"/>
                           </a:solidFill>
-                          <a:latin typeface="Arial"/>
+                          <a:latin typeface="Helvetica Neue"/>
                         </a:rPr>
                         <a:t>Jul M9</a:t>
                       </a:r>
                     </a:p>
                   </a:txBody>
-                  <a:tcPr anchor="ctr" marL="13716" marR="13716" marT="0" marB="0">
+                  <a:tcPr anchor="ctr" marL="20574" marR="20574" marT="0" marB="0">
                     <a:solidFill>
                       <a:srgbClr val="801ED7"/>
                     </a:solidFill>
@@ -3872,13 +3916,13 @@
                           <a:solidFill>
                             <a:srgbClr val="FFFFFF"/>
                           </a:solidFill>
-                          <a:latin typeface="Arial"/>
+                          <a:latin typeface="Helvetica Neue"/>
                         </a:rPr>
                         <a:t>Aug M10</a:t>
                       </a:r>
                     </a:p>
                   </a:txBody>
-                  <a:tcPr anchor="ctr" marL="13716" marR="13716" marT="0" marB="0">
+                  <a:tcPr anchor="ctr" marL="20574" marR="20574" marT="0" marB="0">
                     <a:solidFill>
                       <a:srgbClr val="801ED7"/>
                     </a:solidFill>
@@ -3895,13 +3939,13 @@
                           <a:solidFill>
                             <a:srgbClr val="FFFFFF"/>
                           </a:solidFill>
-                          <a:latin typeface="Arial"/>
+                          <a:latin typeface="Helvetica Neue"/>
                         </a:rPr>
                         <a:t>Sep M11</a:t>
                       </a:r>
                     </a:p>
                   </a:txBody>
-                  <a:tcPr anchor="ctr" marL="13716" marR="13716" marT="0" marB="0">
+                  <a:tcPr anchor="ctr" marL="20574" marR="20574" marT="0" marB="0">
                     <a:solidFill>
                       <a:srgbClr val="801ED7"/>
                     </a:solidFill>
@@ -3918,13 +3962,13 @@
                           <a:solidFill>
                             <a:srgbClr val="FFFFFF"/>
                           </a:solidFill>
-                          <a:latin typeface="Arial"/>
+                          <a:latin typeface="Helvetica Neue"/>
                         </a:rPr>
                         <a:t>Oct M12</a:t>
                       </a:r>
                     </a:p>
                   </a:txBody>
-                  <a:tcPr anchor="ctr" marL="13716" marR="13716" marT="0" marB="0">
+                  <a:tcPr anchor="ctr" marL="20574" marR="20574" marT="0" marB="0">
                     <a:solidFill>
                       <a:srgbClr val="801ED7"/>
                     </a:solidFill>
@@ -3943,13 +3987,13 @@
                           <a:solidFill>
                             <a:srgbClr val="801ED7"/>
                           </a:solidFill>
-                          <a:latin typeface="Arial"/>
+                          <a:latin typeface="Helvetica Neue"/>
                         </a:rPr>
                         <a:t>Cum. value</a:t>
                       </a:r>
                     </a:p>
                   </a:txBody>
-                  <a:tcPr anchor="ctr" marL="41148">
+                  <a:tcPr anchor="ctr" marL="20574" marR="20574" marT="0" marB="0">
                     <a:solidFill>
                       <a:srgbClr val="EFEDFF"/>
                     </a:solidFill>
@@ -3966,13 +4010,13 @@
                           <a:solidFill>
                             <a:srgbClr val="801ED7"/>
                           </a:solidFill>
-                          <a:latin typeface="Arial"/>
+                          <a:latin typeface="Helvetica Neue"/>
                         </a:rPr>
                         <a:t>$0</a:t>
                       </a:r>
                     </a:p>
                   </a:txBody>
-                  <a:tcPr anchor="ctr" marL="6858" marR="6858" marT="0" marB="0">
+                  <a:tcPr anchor="ctr" marL="20574" marR="20574" marT="0" marB="0">
                     <a:solidFill>
                       <a:srgbClr val="FFFFFF"/>
                     </a:solidFill>
@@ -3989,13 +4033,13 @@
                           <a:solidFill>
                             <a:srgbClr val="801ED7"/>
                           </a:solidFill>
-                          <a:latin typeface="Arial"/>
+                          <a:latin typeface="Helvetica Neue"/>
                         </a:rPr>
                         <a:t>$0</a:t>
                       </a:r>
                     </a:p>
                   </a:txBody>
-                  <a:tcPr anchor="ctr" marL="6858" marR="6858" marT="0" marB="0">
+                  <a:tcPr anchor="ctr" marL="20574" marR="20574" marT="0" marB="0">
                     <a:solidFill>
                       <a:srgbClr val="FFFFFF"/>
                     </a:solidFill>
@@ -4012,13 +4056,13 @@
                           <a:solidFill>
                             <a:srgbClr val="801ED7"/>
                           </a:solidFill>
-                          <a:latin typeface="Arial"/>
+                          <a:latin typeface="Helvetica Neue"/>
                         </a:rPr>
                         <a:t>$0</a:t>
                       </a:r>
                     </a:p>
                   </a:txBody>
-                  <a:tcPr anchor="ctr" marL="6858" marR="6858" marT="0" marB="0">
+                  <a:tcPr anchor="ctr" marL="20574" marR="20574" marT="0" marB="0">
                     <a:solidFill>
                       <a:srgbClr val="FFFFFF"/>
                     </a:solidFill>
@@ -4035,13 +4079,13 @@
                           <a:solidFill>
                             <a:srgbClr val="801ED7"/>
                           </a:solidFill>
-                          <a:latin typeface="Arial"/>
+                          <a:latin typeface="Helvetica Neue"/>
                         </a:rPr>
                         <a:t>$34k</a:t>
                       </a:r>
                     </a:p>
                   </a:txBody>
-                  <a:tcPr anchor="ctr" marL="6858" marR="6858" marT="0" marB="0">
+                  <a:tcPr anchor="ctr" marL="20574" marR="20574" marT="0" marB="0">
                     <a:solidFill>
                       <a:srgbClr val="FFFFFF"/>
                     </a:solidFill>
@@ -4058,13 +4102,13 @@
                           <a:solidFill>
                             <a:srgbClr val="801ED7"/>
                           </a:solidFill>
-                          <a:latin typeface="Arial"/>
+                          <a:latin typeface="Helvetica Neue"/>
                         </a:rPr>
                         <a:t>$102k</a:t>
                       </a:r>
                     </a:p>
                   </a:txBody>
-                  <a:tcPr anchor="ctr" marL="6858" marR="6858" marT="0" marB="0">
+                  <a:tcPr anchor="ctr" marL="20574" marR="20574" marT="0" marB="0">
                     <a:solidFill>
                       <a:srgbClr val="FFFFFF"/>
                     </a:solidFill>
@@ -4081,13 +4125,13 @@
                           <a:solidFill>
                             <a:srgbClr val="801ED7"/>
                           </a:solidFill>
-                          <a:latin typeface="Arial"/>
+                          <a:latin typeface="Helvetica Neue"/>
                         </a:rPr>
                         <a:t>$205k</a:t>
                       </a:r>
                     </a:p>
                   </a:txBody>
-                  <a:tcPr anchor="ctr" marL="6858" marR="6858" marT="0" marB="0">
+                  <a:tcPr anchor="ctr" marL="20574" marR="20574" marT="0" marB="0">
                     <a:solidFill>
                       <a:srgbClr val="FFFFFF"/>
                     </a:solidFill>
@@ -4104,13 +4148,13 @@
                           <a:solidFill>
                             <a:srgbClr val="801ED7"/>
                           </a:solidFill>
-                          <a:latin typeface="Arial"/>
+                          <a:latin typeface="Helvetica Neue"/>
                         </a:rPr>
                         <a:t>$341k</a:t>
                       </a:r>
                     </a:p>
                   </a:txBody>
-                  <a:tcPr anchor="ctr" marL="6858" marR="6858" marT="0" marB="0">
+                  <a:tcPr anchor="ctr" marL="20574" marR="20574" marT="0" marB="0">
                     <a:solidFill>
                       <a:srgbClr val="FFFFFF"/>
                     </a:solidFill>
@@ -4127,13 +4171,13 @@
                           <a:solidFill>
                             <a:srgbClr val="801ED7"/>
                           </a:solidFill>
-                          <a:latin typeface="Arial"/>
+                          <a:latin typeface="Helvetica Neue"/>
                         </a:rPr>
                         <a:t>$477k</a:t>
                       </a:r>
                     </a:p>
                   </a:txBody>
-                  <a:tcPr anchor="ctr" marL="6858" marR="6858" marT="0" marB="0">
+                  <a:tcPr anchor="ctr" marL="20574" marR="20574" marT="0" marB="0">
                     <a:solidFill>
                       <a:srgbClr val="FFFFFF"/>
                     </a:solidFill>
@@ -4150,13 +4194,13 @@
                           <a:solidFill>
                             <a:srgbClr val="801ED7"/>
                           </a:solidFill>
-                          <a:latin typeface="Arial"/>
+                          <a:latin typeface="Helvetica Neue"/>
                         </a:rPr>
                         <a:t>$614k</a:t>
                       </a:r>
                     </a:p>
                   </a:txBody>
-                  <a:tcPr anchor="ctr" marL="6858" marR="6858" marT="0" marB="0">
+                  <a:tcPr anchor="ctr" marL="20574" marR="20574" marT="0" marB="0">
                     <a:solidFill>
                       <a:srgbClr val="FFFFFF"/>
                     </a:solidFill>
@@ -4173,13 +4217,13 @@
                           <a:solidFill>
                             <a:srgbClr val="801ED7"/>
                           </a:solidFill>
-                          <a:latin typeface="Arial"/>
+                          <a:latin typeface="Helvetica Neue"/>
                         </a:rPr>
                         <a:t>$750k</a:t>
                       </a:r>
                     </a:p>
                   </a:txBody>
-                  <a:tcPr anchor="ctr" marL="6858" marR="6858" marT="0" marB="0">
+                  <a:tcPr anchor="ctr" marL="20574" marR="20574" marT="0" marB="0">
                     <a:solidFill>
                       <a:srgbClr val="FFFFFF"/>
                     </a:solidFill>
@@ -4196,13 +4240,13 @@
                           <a:solidFill>
                             <a:srgbClr val="801ED7"/>
                           </a:solidFill>
-                          <a:latin typeface="Arial"/>
+                          <a:latin typeface="Helvetica Neue"/>
                         </a:rPr>
                         <a:t>$887k</a:t>
                       </a:r>
                     </a:p>
                   </a:txBody>
-                  <a:tcPr anchor="ctr" marL="6858" marR="6858" marT="0" marB="0">
+                  <a:tcPr anchor="ctr" marL="20574" marR="20574" marT="0" marB="0">
                     <a:solidFill>
                       <a:srgbClr val="FFFFFF"/>
                     </a:solidFill>
@@ -4219,13 +4263,13 @@
                           <a:solidFill>
                             <a:srgbClr val="801ED7"/>
                           </a:solidFill>
-                          <a:latin typeface="Arial"/>
+                          <a:latin typeface="Helvetica Neue"/>
                         </a:rPr>
                         <a:t>$1,023k</a:t>
                       </a:r>
                     </a:p>
                   </a:txBody>
-                  <a:tcPr anchor="ctr" marL="6858" marR="6858" marT="0" marB="0">
+                  <a:tcPr anchor="ctr" marL="20574" marR="20574" marT="0" marB="0">
                     <a:solidFill>
                       <a:srgbClr val="FFFFFF"/>
                     </a:solidFill>
@@ -4244,13 +4288,13 @@
                           <a:solidFill>
                             <a:srgbClr val="801ED7"/>
                           </a:solidFill>
-                          <a:latin typeface="Arial"/>
+                          <a:latin typeface="Helvetica Neue"/>
                         </a:rPr>
                         <a:t>Cum. cost</a:t>
                       </a:r>
                     </a:p>
                   </a:txBody>
-                  <a:tcPr anchor="ctr" marL="41148">
+                  <a:tcPr anchor="ctr" marL="20574" marR="20574" marT="0" marB="0">
                     <a:solidFill>
                       <a:srgbClr val="EFEDFF"/>
                     </a:solidFill>
@@ -4267,13 +4311,13 @@
                           <a:solidFill>
                             <a:srgbClr val="555266"/>
                           </a:solidFill>
-                          <a:latin typeface="Arial"/>
+                          <a:latin typeface="Helvetica Neue"/>
                         </a:rPr>
                         <a:t>$22k</a:t>
                       </a:r>
                     </a:p>
                   </a:txBody>
-                  <a:tcPr anchor="ctr" marL="6858" marR="6858" marT="0" marB="0">
+                  <a:tcPr anchor="ctr" marL="20574" marR="20574" marT="0" marB="0">
                     <a:solidFill>
                       <a:srgbClr val="FAF9FE"/>
                     </a:solidFill>
@@ -4290,13 +4334,13 @@
                           <a:solidFill>
                             <a:srgbClr val="555266"/>
                           </a:solidFill>
-                          <a:latin typeface="Arial"/>
+                          <a:latin typeface="Helvetica Neue"/>
                         </a:rPr>
                         <a:t>$44k</a:t>
                       </a:r>
                     </a:p>
                   </a:txBody>
-                  <a:tcPr anchor="ctr" marL="6858" marR="6858" marT="0" marB="0">
+                  <a:tcPr anchor="ctr" marL="20574" marR="20574" marT="0" marB="0">
                     <a:solidFill>
                       <a:srgbClr val="FAF9FE"/>
                     </a:solidFill>
@@ -4313,13 +4357,13 @@
                           <a:solidFill>
                             <a:srgbClr val="555266"/>
                           </a:solidFill>
-                          <a:latin typeface="Arial"/>
+                          <a:latin typeface="Helvetica Neue"/>
                         </a:rPr>
                         <a:t>$66k</a:t>
                       </a:r>
                     </a:p>
                   </a:txBody>
-                  <a:tcPr anchor="ctr" marL="6858" marR="6858" marT="0" marB="0">
+                  <a:tcPr anchor="ctr" marL="20574" marR="20574" marT="0" marB="0">
                     <a:solidFill>
                       <a:srgbClr val="FAF9FE"/>
                     </a:solidFill>
@@ -4336,13 +4380,13 @@
                           <a:solidFill>
                             <a:srgbClr val="555266"/>
                           </a:solidFill>
-                          <a:latin typeface="Arial"/>
+                          <a:latin typeface="Helvetica Neue"/>
                         </a:rPr>
                         <a:t>$88k</a:t>
                       </a:r>
                     </a:p>
                   </a:txBody>
-                  <a:tcPr anchor="ctr" marL="6858" marR="6858" marT="0" marB="0">
+                  <a:tcPr anchor="ctr" marL="20574" marR="20574" marT="0" marB="0">
                     <a:solidFill>
                       <a:srgbClr val="FAF9FE"/>
                     </a:solidFill>
@@ -4359,13 +4403,13 @@
                           <a:solidFill>
                             <a:srgbClr val="555266"/>
                           </a:solidFill>
-                          <a:latin typeface="Arial"/>
+                          <a:latin typeface="Helvetica Neue"/>
                         </a:rPr>
                         <a:t>$110k</a:t>
                       </a:r>
                     </a:p>
                   </a:txBody>
-                  <a:tcPr anchor="ctr" marL="6858" marR="6858" marT="0" marB="0">
+                  <a:tcPr anchor="ctr" marL="20574" marR="20574" marT="0" marB="0">
                     <a:solidFill>
                       <a:srgbClr val="FAF9FE"/>
                     </a:solidFill>
@@ -4382,13 +4426,13 @@
                           <a:solidFill>
                             <a:srgbClr val="555266"/>
                           </a:solidFill>
-                          <a:latin typeface="Arial"/>
+                          <a:latin typeface="Helvetica Neue"/>
                         </a:rPr>
                         <a:t>$132k</a:t>
                       </a:r>
                     </a:p>
                   </a:txBody>
-                  <a:tcPr anchor="ctr" marL="6858" marR="6858" marT="0" marB="0">
+                  <a:tcPr anchor="ctr" marL="20574" marR="20574" marT="0" marB="0">
                     <a:solidFill>
                       <a:srgbClr val="FAF9FE"/>
                     </a:solidFill>
@@ -4405,13 +4449,13 @@
                           <a:solidFill>
                             <a:srgbClr val="555266"/>
                           </a:solidFill>
-                          <a:latin typeface="Arial"/>
+                          <a:latin typeface="Helvetica Neue"/>
                         </a:rPr>
                         <a:t>$154k</a:t>
                       </a:r>
                     </a:p>
                   </a:txBody>
-                  <a:tcPr anchor="ctr" marL="6858" marR="6858" marT="0" marB="0">
+                  <a:tcPr anchor="ctr" marL="20574" marR="20574" marT="0" marB="0">
                     <a:solidFill>
                       <a:srgbClr val="FAF9FE"/>
                     </a:solidFill>
@@ -4428,13 +4472,13 @@
                           <a:solidFill>
                             <a:srgbClr val="555266"/>
                           </a:solidFill>
-                          <a:latin typeface="Arial"/>
+                          <a:latin typeface="Helvetica Neue"/>
                         </a:rPr>
                         <a:t>$176k</a:t>
                       </a:r>
                     </a:p>
                   </a:txBody>
-                  <a:tcPr anchor="ctr" marL="6858" marR="6858" marT="0" marB="0">
+                  <a:tcPr anchor="ctr" marL="20574" marR="20574" marT="0" marB="0">
                     <a:solidFill>
                       <a:srgbClr val="FAF9FE"/>
                     </a:solidFill>
@@ -4451,13 +4495,13 @@
                           <a:solidFill>
                             <a:srgbClr val="555266"/>
                           </a:solidFill>
-                          <a:latin typeface="Arial"/>
+                          <a:latin typeface="Helvetica Neue"/>
                         </a:rPr>
                         <a:t>$198k</a:t>
                       </a:r>
                     </a:p>
                   </a:txBody>
-                  <a:tcPr anchor="ctr" marL="6858" marR="6858" marT="0" marB="0">
+                  <a:tcPr anchor="ctr" marL="20574" marR="20574" marT="0" marB="0">
                     <a:solidFill>
                       <a:srgbClr val="FAF9FE"/>
                     </a:solidFill>
@@ -4474,13 +4518,13 @@
                           <a:solidFill>
                             <a:srgbClr val="555266"/>
                           </a:solidFill>
-                          <a:latin typeface="Arial"/>
+                          <a:latin typeface="Helvetica Neue"/>
                         </a:rPr>
                         <a:t>$220k</a:t>
                       </a:r>
                     </a:p>
                   </a:txBody>
-                  <a:tcPr anchor="ctr" marL="6858" marR="6858" marT="0" marB="0">
+                  <a:tcPr anchor="ctr" marL="20574" marR="20574" marT="0" marB="0">
                     <a:solidFill>
                       <a:srgbClr val="FAF9FE"/>
                     </a:solidFill>
@@ -4497,13 +4541,13 @@
                           <a:solidFill>
                             <a:srgbClr val="555266"/>
                           </a:solidFill>
-                          <a:latin typeface="Arial"/>
+                          <a:latin typeface="Helvetica Neue"/>
                         </a:rPr>
                         <a:t>$242k</a:t>
                       </a:r>
                     </a:p>
                   </a:txBody>
-                  <a:tcPr anchor="ctr" marL="6858" marR="6858" marT="0" marB="0">
+                  <a:tcPr anchor="ctr" marL="20574" marR="20574" marT="0" marB="0">
                     <a:solidFill>
                       <a:srgbClr val="FAF9FE"/>
                     </a:solidFill>
@@ -4520,13 +4564,13 @@
                           <a:solidFill>
                             <a:srgbClr val="555266"/>
                           </a:solidFill>
-                          <a:latin typeface="Arial"/>
+                          <a:latin typeface="Helvetica Neue"/>
                         </a:rPr>
                         <a:t>$264k</a:t>
                       </a:r>
                     </a:p>
                   </a:txBody>
-                  <a:tcPr anchor="ctr" marL="6858" marR="6858" marT="0" marB="0">
+                  <a:tcPr anchor="ctr" marL="20574" marR="20574" marT="0" marB="0">
                     <a:solidFill>
                       <a:srgbClr val="FAF9FE"/>
                     </a:solidFill>
@@ -4545,13 +4589,13 @@
                           <a:solidFill>
                             <a:srgbClr val="801ED7"/>
                           </a:solidFill>
-                          <a:latin typeface="Arial"/>
+                          <a:latin typeface="Helvetica Neue"/>
                         </a:rPr>
                         <a:t>ROI ×</a:t>
                       </a:r>
                     </a:p>
                   </a:txBody>
-                  <a:tcPr anchor="ctr" marL="41148">
+                  <a:tcPr anchor="ctr" marL="20574" marR="20574" marT="0" marB="0">
                     <a:solidFill>
                       <a:srgbClr val="EFEDFF"/>
                     </a:solidFill>
@@ -4568,13 +4612,13 @@
                           <a:solidFill>
                             <a:srgbClr val="FFA524"/>
                           </a:solidFill>
-                          <a:latin typeface="Arial"/>
+                          <a:latin typeface="Helvetica Neue"/>
                         </a:rPr>
                         <a:t>–</a:t>
                       </a:r>
                     </a:p>
                   </a:txBody>
-                  <a:tcPr anchor="ctr" marL="6858" marR="6858" marT="0" marB="0">
+                  <a:tcPr anchor="ctr" marL="20574" marR="20574" marT="0" marB="0">
                     <a:solidFill>
                       <a:srgbClr val="FFFFFF"/>
                     </a:solidFill>
@@ -4591,13 +4635,13 @@
                           <a:solidFill>
                             <a:srgbClr val="FFA524"/>
                           </a:solidFill>
-                          <a:latin typeface="Arial"/>
+                          <a:latin typeface="Helvetica Neue"/>
                         </a:rPr>
                         <a:t>–</a:t>
                       </a:r>
                     </a:p>
                   </a:txBody>
-                  <a:tcPr anchor="ctr" marL="6858" marR="6858" marT="0" marB="0">
+                  <a:tcPr anchor="ctr" marL="20574" marR="20574" marT="0" marB="0">
                     <a:solidFill>
                       <a:srgbClr val="FFFFFF"/>
                     </a:solidFill>
@@ -4614,13 +4658,13 @@
                           <a:solidFill>
                             <a:srgbClr val="FFA524"/>
                           </a:solidFill>
-                          <a:latin typeface="Arial"/>
+                          <a:latin typeface="Helvetica Neue"/>
                         </a:rPr>
                         <a:t>–</a:t>
                       </a:r>
                     </a:p>
                   </a:txBody>
-                  <a:tcPr anchor="ctr" marL="6858" marR="6858" marT="0" marB="0">
+                  <a:tcPr anchor="ctr" marL="20574" marR="20574" marT="0" marB="0">
                     <a:solidFill>
                       <a:srgbClr val="FFFFFF"/>
                     </a:solidFill>
@@ -4637,13 +4681,13 @@
                           <a:solidFill>
                             <a:srgbClr val="FFA524"/>
                           </a:solidFill>
-                          <a:latin typeface="Arial"/>
+                          <a:latin typeface="Helvetica Neue"/>
                         </a:rPr>
                         <a:t>0.1×</a:t>
                       </a:r>
                     </a:p>
                   </a:txBody>
-                  <a:tcPr anchor="ctr" marL="6858" marR="6858" marT="0" marB="0">
+                  <a:tcPr anchor="ctr" marL="20574" marR="20574" marT="0" marB="0">
                     <a:solidFill>
                       <a:srgbClr val="FFFFFF"/>
                     </a:solidFill>
@@ -4660,13 +4704,13 @@
                           <a:solidFill>
                             <a:srgbClr val="FFA524"/>
                           </a:solidFill>
-                          <a:latin typeface="Arial"/>
+                          <a:latin typeface="Helvetica Neue"/>
                         </a:rPr>
                         <a:t>0.4×</a:t>
                       </a:r>
                     </a:p>
                   </a:txBody>
-                  <a:tcPr anchor="ctr" marL="6858" marR="6858" marT="0" marB="0">
+                  <a:tcPr anchor="ctr" marL="20574" marR="20574" marT="0" marB="0">
                     <a:solidFill>
                       <a:srgbClr val="FFFFFF"/>
                     </a:solidFill>
@@ -4683,13 +4727,13 @@
                           <a:solidFill>
                             <a:srgbClr val="FFA524"/>
                           </a:solidFill>
-                          <a:latin typeface="Arial"/>
+                          <a:latin typeface="Helvetica Neue"/>
                         </a:rPr>
                         <a:t>0.8×</a:t>
                       </a:r>
                     </a:p>
                   </a:txBody>
-                  <a:tcPr anchor="ctr" marL="6858" marR="6858" marT="0" marB="0">
+                  <a:tcPr anchor="ctr" marL="20574" marR="20574" marT="0" marB="0">
                     <a:solidFill>
                       <a:srgbClr val="FFFFFF"/>
                     </a:solidFill>
@@ -4706,13 +4750,13 @@
                           <a:solidFill>
                             <a:srgbClr val="FFA524"/>
                           </a:solidFill>
-                          <a:latin typeface="Arial"/>
+                          <a:latin typeface="Helvetica Neue"/>
                         </a:rPr>
                         <a:t>1.3×</a:t>
                       </a:r>
                     </a:p>
                   </a:txBody>
-                  <a:tcPr anchor="ctr" marL="6858" marR="6858" marT="0" marB="0">
+                  <a:tcPr anchor="ctr" marL="20574" marR="20574" marT="0" marB="0">
                     <a:solidFill>
                       <a:srgbClr val="FFFFFF"/>
                     </a:solidFill>
@@ -4729,13 +4773,13 @@
                           <a:solidFill>
                             <a:srgbClr val="FFA524"/>
                           </a:solidFill>
-                          <a:latin typeface="Arial"/>
+                          <a:latin typeface="Helvetica Neue"/>
                         </a:rPr>
                         <a:t>1.8×</a:t>
                       </a:r>
                     </a:p>
                   </a:txBody>
-                  <a:tcPr anchor="ctr" marL="6858" marR="6858" marT="0" marB="0">
+                  <a:tcPr anchor="ctr" marL="20574" marR="20574" marT="0" marB="0">
                     <a:solidFill>
                       <a:srgbClr val="FFFFFF"/>
                     </a:solidFill>
@@ -4752,13 +4796,13 @@
                           <a:solidFill>
                             <a:srgbClr val="FFA524"/>
                           </a:solidFill>
-                          <a:latin typeface="Arial"/>
+                          <a:latin typeface="Helvetica Neue"/>
                         </a:rPr>
                         <a:t>2.3×</a:t>
                       </a:r>
                     </a:p>
                   </a:txBody>
-                  <a:tcPr anchor="ctr" marL="6858" marR="6858" marT="0" marB="0">
+                  <a:tcPr anchor="ctr" marL="20574" marR="20574" marT="0" marB="0">
                     <a:solidFill>
                       <a:srgbClr val="FFFFFF"/>
                     </a:solidFill>
@@ -4775,13 +4819,13 @@
                           <a:solidFill>
                             <a:srgbClr val="FFA524"/>
                           </a:solidFill>
-                          <a:latin typeface="Arial"/>
+                          <a:latin typeface="Helvetica Neue"/>
                         </a:rPr>
                         <a:t>2.8×</a:t>
                       </a:r>
                     </a:p>
                   </a:txBody>
-                  <a:tcPr anchor="ctr" marL="6858" marR="6858" marT="0" marB="0">
+                  <a:tcPr anchor="ctr" marL="20574" marR="20574" marT="0" marB="0">
                     <a:solidFill>
                       <a:srgbClr val="FFFFFF"/>
                     </a:solidFill>
@@ -4798,13 +4842,13 @@
                           <a:solidFill>
                             <a:srgbClr val="FFA524"/>
                           </a:solidFill>
-                          <a:latin typeface="Arial"/>
+                          <a:latin typeface="Helvetica Neue"/>
                         </a:rPr>
                         <a:t>3.4×</a:t>
                       </a:r>
                     </a:p>
                   </a:txBody>
-                  <a:tcPr anchor="ctr" marL="6858" marR="6858" marT="0" marB="0">
+                  <a:tcPr anchor="ctr" marL="20574" marR="20574" marT="0" marB="0">
                     <a:solidFill>
                       <a:srgbClr val="FFFFFF"/>
                     </a:solidFill>
@@ -4821,13 +4865,13 @@
                           <a:solidFill>
                             <a:srgbClr val="FFA524"/>
                           </a:solidFill>
-                          <a:latin typeface="Arial"/>
+                          <a:latin typeface="Helvetica Neue"/>
                         </a:rPr>
                         <a:t>3.9×</a:t>
                       </a:r>
                     </a:p>
                   </a:txBody>
-                  <a:tcPr anchor="ctr" marL="6858" marR="6858" marT="0" marB="0">
+                  <a:tcPr anchor="ctr" marL="20574" marR="20574" marT="0" marB="0">
                     <a:solidFill>
                       <a:srgbClr val="FFFFFF"/>
                     </a:solidFill>
@@ -4840,7 +4884,7 @@
       </p:graphicFrame>
       <p:sp>
         <p:nvSpPr>
-          <p:cNvPr id="8" name="Rounded Rectangle 7"/>
+          <p:cNvPr id="9" name="Rounded Rectangle 8"/>
           <p:cNvSpPr/>
           <p:nvPr/>
         </p:nvSpPr>
@@ -4851,7 +4895,7 @@
           </a:xfrm>
           <a:prstGeom prst="roundRect">
             <a:avLst>
-              <a:gd name="adj" fmla="val 6000"/>
+              <a:gd name="adj" fmla="val 5000"/>
             </a:avLst>
           </a:prstGeom>
           <a:solidFill>
@@ -4888,7 +4932,7 @@
       </p:sp>
       <p:sp>
         <p:nvSpPr>
-          <p:cNvPr id="9" name="Rectangle 8"/>
+          <p:cNvPr id="10" name="Rectangle 9"/>
           <p:cNvSpPr/>
           <p:nvPr/>
         </p:nvSpPr>
@@ -4932,7 +4976,7 @@
       </p:sp>
       <p:sp>
         <p:nvSpPr>
-          <p:cNvPr id="10" name="TextBox 9"/>
+          <p:cNvPr id="11" name="TextBox 10"/>
           <p:cNvSpPr txBox="1"/>
           <p:nvPr/>
         </p:nvSpPr>
@@ -4958,7 +5002,7 @@
                 <a:solidFill>
                   <a:srgbClr val="FFA524"/>
                 </a:solidFill>
-                <a:latin typeface="Arial"/>
+                <a:latin typeface="Helvetica Neue"/>
               </a:rPr>
               <a:t>BREAK-EVEN</a:t>
             </a:r>
@@ -4974,7 +5018,7 @@
                 <a:solidFill>
                   <a:srgbClr val="801ED7"/>
                 </a:solidFill>
-                <a:latin typeface="Arial"/>
+                <a:latin typeface="Helvetica Neue"/>
               </a:rPr>
               <a:t>May 2027</a:t>
             </a:r>
@@ -4993,7 +5037,7 @@
                 <a:solidFill>
                   <a:srgbClr val="555266"/>
                 </a:solidFill>
-                <a:latin typeface="Arial"/>
+                <a:latin typeface="Helvetica Neue"/>
               </a:rPr>
               <a:t>Month 7 — cum value crosses $264k</a:t>
             </a:r>
@@ -5002,7 +5046,7 @@
       </p:sp>
       <p:sp>
         <p:nvSpPr>
-          <p:cNvPr id="11" name="Rounded Rectangle 10"/>
+          <p:cNvPr id="12" name="Rounded Rectangle 11"/>
           <p:cNvSpPr/>
           <p:nvPr/>
         </p:nvSpPr>
@@ -5013,7 +5057,7 @@
           </a:xfrm>
           <a:prstGeom prst="roundRect">
             <a:avLst>
-              <a:gd name="adj" fmla="val 6000"/>
+              <a:gd name="adj" fmla="val 5000"/>
             </a:avLst>
           </a:prstGeom>
           <a:solidFill>
@@ -5050,7 +5094,7 @@
       </p:sp>
       <p:sp>
         <p:nvSpPr>
-          <p:cNvPr id="12" name="Rectangle 11"/>
+          <p:cNvPr id="13" name="Rectangle 12"/>
           <p:cNvSpPr/>
           <p:nvPr/>
         </p:nvSpPr>
@@ -5094,7 +5138,7 @@
       </p:sp>
       <p:sp>
         <p:nvSpPr>
-          <p:cNvPr id="13" name="TextBox 12"/>
+          <p:cNvPr id="14" name="TextBox 13"/>
           <p:cNvSpPr txBox="1"/>
           <p:nvPr/>
         </p:nvSpPr>
@@ -5120,7 +5164,7 @@
                 <a:solidFill>
                   <a:srgbClr val="FFA524"/>
                 </a:solidFill>
-                <a:latin typeface="Arial"/>
+                <a:latin typeface="Helvetica Neue"/>
               </a:rPr>
               <a:t>YEAR-END</a:t>
             </a:r>
@@ -5136,7 +5180,7 @@
                 <a:solidFill>
                   <a:srgbClr val="801ED7"/>
                 </a:solidFill>
-                <a:latin typeface="Arial"/>
+                <a:latin typeface="Helvetica Neue"/>
               </a:rPr>
               <a:t>3.9× ROI</a:t>
             </a:r>
@@ -5155,7 +5199,7 @@
                 <a:solidFill>
                   <a:srgbClr val="555266"/>
                 </a:solidFill>
-                <a:latin typeface="Arial"/>
+                <a:latin typeface="Helvetica Neue"/>
               </a:rPr>
               <a:t>$1.02M cum value ÷ $264k subscription</a:t>
             </a:r>
@@ -5164,7 +5208,7 @@
       </p:sp>
       <p:sp>
         <p:nvSpPr>
-          <p:cNvPr id="14" name="Rounded Rectangle 13"/>
+          <p:cNvPr id="15" name="Rounded Rectangle 14"/>
           <p:cNvSpPr/>
           <p:nvPr/>
         </p:nvSpPr>
@@ -5175,7 +5219,7 @@
           </a:xfrm>
           <a:prstGeom prst="roundRect">
             <a:avLst>
-              <a:gd name="adj" fmla="val 6000"/>
+              <a:gd name="adj" fmla="val 5000"/>
             </a:avLst>
           </a:prstGeom>
           <a:solidFill>
@@ -5212,7 +5256,7 @@
       </p:sp>
       <p:sp>
         <p:nvSpPr>
-          <p:cNvPr id="15" name="Rectangle 14"/>
+          <p:cNvPr id="16" name="Rectangle 15"/>
           <p:cNvSpPr/>
           <p:nvPr/>
         </p:nvSpPr>
@@ -5256,7 +5300,7 @@
       </p:sp>
       <p:sp>
         <p:nvSpPr>
-          <p:cNvPr id="16" name="TextBox 15"/>
+          <p:cNvPr id="17" name="TextBox 16"/>
           <p:cNvSpPr txBox="1"/>
           <p:nvPr/>
         </p:nvSpPr>
@@ -5282,7 +5326,7 @@
                 <a:solidFill>
                   <a:srgbClr val="FFA524"/>
                 </a:solidFill>
-                <a:latin typeface="Arial"/>
+                <a:latin typeface="Helvetica Neue"/>
               </a:rPr>
               <a:t>YEAR 2 / 3</a:t>
             </a:r>
@@ -5298,7 +5342,7 @@
                 <a:solidFill>
                   <a:srgbClr val="801ED7"/>
                 </a:solidFill>
-                <a:latin typeface="Arial"/>
+                <a:latin typeface="Helvetica Neue"/>
               </a:rPr>
               <a:t>6.2× ROI</a:t>
             </a:r>
@@ -5317,7 +5361,7 @@
                 <a:solidFill>
                   <a:srgbClr val="555266"/>
                 </a:solidFill>
-                <a:latin typeface="Arial"/>
+                <a:latin typeface="Helvetica Neue"/>
               </a:rPr>
               <a:t>$1.64M run-rate ÷ $264k subscription</a:t>
             </a:r>
@@ -5326,7 +5370,7 @@
       </p:sp>
       <p:sp>
         <p:nvSpPr>
-          <p:cNvPr id="17" name="Rounded Rectangle 16"/>
+          <p:cNvPr id="18" name="Rounded Rectangle 17"/>
           <p:cNvSpPr/>
           <p:nvPr/>
         </p:nvSpPr>
@@ -5343,10 +5387,8 @@
           <a:solidFill>
             <a:srgbClr val="801ED7"/>
           </a:solidFill>
-          <a:ln w="9525">
-            <a:solidFill>
-              <a:srgbClr val="E3DFF5"/>
-            </a:solidFill>
+          <a:ln>
+            <a:noFill/>
           </a:ln>
           <a:effectLst/>
         </p:spPr>
@@ -5374,7 +5416,7 @@
       </p:sp>
       <p:sp>
         <p:nvSpPr>
-          <p:cNvPr id="18" name="TextBox 17"/>
+          <p:cNvPr id="19" name="TextBox 18"/>
           <p:cNvSpPr txBox="1"/>
           <p:nvPr/>
         </p:nvSpPr>
@@ -5400,11 +5442,11 @@
               </a:lnSpc>
             </a:pPr>
             <a:r>
-              <a:rPr sz="900" b="1" i="0" spc="100">
+              <a:rPr sz="937" b="1" i="0" spc="100">
                 <a:solidFill>
                   <a:srgbClr val="FFA524"/>
                 </a:solidFill>
-                <a:latin typeface="Arial"/>
+                <a:latin typeface="Helvetica Neue"/>
               </a:rPr>
               <a:t>THE ASK TODAY    </a:t>
             </a:r>
@@ -5413,7 +5455,7 @@
                 <a:solidFill>
                   <a:srgbClr val="FFFFFF"/>
                 </a:solidFill>
-                <a:latin typeface="Arial"/>
+                <a:latin typeface="Helvetica Neue"/>
               </a:rPr>
               <a:t>Sign order form by 17 July to lock $264,000 → November 2026 kickoff → February 2027 go-live.</a:t>
             </a:r>
@@ -5422,7 +5464,7 @@
       </p:sp>
       <p:sp>
         <p:nvSpPr>
-          <p:cNvPr id="19" name="TextBox 18"/>
+          <p:cNvPr id="20" name="TextBox 19"/>
           <p:cNvSpPr txBox="1"/>
           <p:nvPr/>
         </p:nvSpPr>
@@ -5452,7 +5494,7 @@
                 <a:solidFill>
                   <a:srgbClr val="8A8699"/>
                 </a:solidFill>
-                <a:latin typeface="Arial"/>
+                <a:latin typeface="Helvetica Neue"/>
               </a:rPr>
               <a:t>All values in USD. Cum. value is incremental over BAU at the target lift (4.2M MAU × 20% × £3.00/conv × 5.1% lift = $1.64M annual run-rate). Cost shown linearly at $22k/mo. ROI at $264k early-sign; at $317k standard rate: year-end 3.2×, Year 2+ 5.2×. FX £1 = $1.32 (Morningstar, 30 Jun 2026).</a:t>
             </a:r>
@@ -5665,7 +5707,7 @@
                 <a:solidFill>
                   <a:srgbClr val="801ED7"/>
                 </a:solidFill>
-                <a:latin typeface="Arial"/>
+                <a:latin typeface="Helvetica Neue"/>
               </a:rPr>
               <a:t>Let’s lock the November slot.</a:t>
             </a:r>
@@ -5744,7 +5786,7 @@
                 <a:solidFill>
                   <a:srgbClr val="555266"/>
                 </a:solidFill>
-                <a:latin typeface="Arial"/>
+                <a:latin typeface="Helvetica Neue"/>
               </a:rPr>
               <a:t>Sign by 17 July to lock $264,000 → Feb 2027 go-live.</a:t>
             </a:r>
@@ -5760,7 +5802,7 @@
         <p:spPr>
           <a:xfrm>
             <a:off x="548640" y="4629150"/>
-            <a:ext cx="4800600" cy="240029"/>
+            <a:ext cx="5486400" cy="240029"/>
           </a:xfrm>
           <a:prstGeom prst="rect">
             <a:avLst/>
@@ -5779,7 +5821,7 @@
                 <a:solidFill>
                   <a:srgbClr val="8A8699"/>
                 </a:solidFill>
-                <a:latin typeface="Arial"/>
+                <a:latin typeface="Helvetica Neue"/>
               </a:rPr>
               <a:t>BrazeAI Decisioning Studio™  ·  Confidential</a:t>
             </a:r>
@@ -5806,14 +5848,117 @@
       <p:grpSpPr/>
       <p:sp>
         <p:nvSpPr>
-          <p:cNvPr id="2" name="TextBox 1"/>
+          <p:cNvPr id="2" name="Rectangle 1"/>
+          <p:cNvSpPr/>
+          <p:nvPr/>
+        </p:nvSpPr>
+        <p:spPr>
+          <a:xfrm>
+            <a:off x="0" y="0"/>
+            <a:ext cx="9143771" cy="5143500"/>
+          </a:xfrm>
+          <a:prstGeom prst="rect">
+            <a:avLst/>
+          </a:prstGeom>
+          <a:solidFill>
+            <a:srgbClr val="FFFFFF"/>
+          </a:solidFill>
+          <a:ln>
+            <a:noFill/>
+          </a:ln>
+          <a:effectLst/>
+        </p:spPr>
+        <p:style>
+          <a:lnRef idx="1">
+            <a:schemeClr val="accent1"/>
+          </a:lnRef>
+          <a:fillRef idx="3">
+            <a:schemeClr val="accent1"/>
+          </a:fillRef>
+          <a:effectRef idx="2">
+            <a:schemeClr val="accent1"/>
+          </a:effectRef>
+          <a:fontRef idx="minor">
+            <a:schemeClr val="lt1"/>
+          </a:fontRef>
+        </p:style>
+        <p:txBody>
+          <a:bodyPr rtlCol="0" anchor="ctr"/>
+          <a:lstStyle/>
+          <a:p>
+            <a:pPr algn="ctr"/>
+          </a:p>
+        </p:txBody>
+      </p:sp>
+      <p:pic>
+        <p:nvPicPr>
+          <p:cNvPr id="3" name="Picture 2" descr="brazeai_logo.png"/>
+          <p:cNvPicPr>
+            <a:picLocks noChangeAspect="1"/>
+          </p:cNvPicPr>
+          <p:nvPr/>
+        </p:nvPicPr>
+        <p:blipFill>
+          <a:blip r:embed="rId2"/>
+          <a:stretch>
+            <a:fillRect/>
+          </a:stretch>
+        </p:blipFill>
+        <p:spPr>
+          <a:xfrm>
+            <a:off x="8090607" y="233172"/>
+            <a:ext cx="641684" cy="274320"/>
+          </a:xfrm>
+          <a:prstGeom prst="rect">
+            <a:avLst/>
+          </a:prstGeom>
+        </p:spPr>
+      </p:pic>
+      <p:sp>
+        <p:nvSpPr>
+          <p:cNvPr id="4" name="TextBox 3"/>
           <p:cNvSpPr txBox="1"/>
           <p:nvPr/>
         </p:nvSpPr>
         <p:spPr>
           <a:xfrm>
+            <a:off x="8183651" y="4855464"/>
+            <a:ext cx="548640" cy="205739"/>
+          </a:xfrm>
+          <a:prstGeom prst="rect">
+            <a:avLst/>
+          </a:prstGeom>
+          <a:noFill/>
+        </p:spPr>
+        <p:txBody>
+          <a:bodyPr wrap="square" lIns="0" rIns="0" tIns="0" bIns="0">
+            <a:spAutoFit/>
+          </a:bodyPr>
+          <a:lstStyle/>
+          <a:p>
+            <a:pPr algn="r"/>
+            <a:r>
+              <a:rPr sz="675" b="0" i="0">
+                <a:solidFill>
+                  <a:srgbClr val="8A8699"/>
+                </a:solidFill>
+                <a:latin typeface="Helvetica Neue"/>
+              </a:rPr>
+              <a:t>2</a:t>
+            </a:r>
+          </a:p>
+        </p:txBody>
+      </p:sp>
+      <p:sp>
+        <p:nvSpPr>
+          <p:cNvPr id="5" name="TextBox 4"/>
+          <p:cNvSpPr txBox="1"/>
+          <p:nvPr/>
+        </p:nvSpPr>
+        <p:spPr>
+          <a:xfrm>
             <a:off x="411479" y="342900"/>
-            <a:ext cx="8183651" cy="480059"/>
+            <a:ext cx="8183651" cy="548640"/>
           </a:xfrm>
           <a:prstGeom prst="rect">
             <a:avLst/>
@@ -5836,7 +5981,7 @@
                 <a:solidFill>
                   <a:srgbClr val="801ED7"/>
                 </a:solidFill>
-                <a:latin typeface="Arial"/>
+                <a:latin typeface="Helvetica Neue"/>
               </a:rPr>
               <a:t>Mutual action plan to go-live</a:t>
             </a:r>
@@ -5845,7 +5990,7 @@
       </p:sp>
       <p:sp>
         <p:nvSpPr>
-          <p:cNvPr id="3" name="TextBox 2"/>
+          <p:cNvPr id="6" name="TextBox 5"/>
           <p:cNvSpPr txBox="1"/>
           <p:nvPr/>
         </p:nvSpPr>
@@ -5875,7 +6020,7 @@
                 <a:solidFill>
                   <a:srgbClr val="FFA524"/>
                 </a:solidFill>
-                <a:latin typeface="Arial"/>
+                <a:latin typeface="Helvetica Neue"/>
               </a:rPr>
               <a:t>Foundations are complete. Next is commercial alignment and executive sign-off to lock the Nov 2026 implementation slot.</a:t>
             </a:r>
@@ -5884,7 +6029,7 @@
       </p:sp>
       <p:sp>
         <p:nvSpPr>
-          <p:cNvPr id="4" name="Rectangle 3"/>
+          <p:cNvPr id="7" name="Rectangle 6"/>
           <p:cNvSpPr/>
           <p:nvPr/>
         </p:nvSpPr>
@@ -5926,75 +6071,16 @@
           </a:p>
         </p:txBody>
       </p:sp>
-      <p:pic>
-        <p:nvPicPr>
-          <p:cNvPr id="5" name="Picture 4" descr="brazeai_logo.png"/>
-          <p:cNvPicPr>
-            <a:picLocks noChangeAspect="1"/>
-          </p:cNvPicPr>
-          <p:nvPr/>
-        </p:nvPicPr>
-        <p:blipFill>
-          <a:blip r:embed="rId2"/>
-          <a:stretch>
-            <a:fillRect/>
-          </a:stretch>
-        </p:blipFill>
-        <p:spPr>
-          <a:xfrm>
-            <a:off x="8090607" y="233172"/>
-            <a:ext cx="641684" cy="274320"/>
-          </a:xfrm>
-          <a:prstGeom prst="rect">
-            <a:avLst/>
-          </a:prstGeom>
-        </p:spPr>
-      </p:pic>
-      <p:sp>
-        <p:nvSpPr>
-          <p:cNvPr id="6" name="TextBox 5"/>
-          <p:cNvSpPr txBox="1"/>
-          <p:nvPr/>
-        </p:nvSpPr>
-        <p:spPr>
-          <a:xfrm>
-            <a:off x="8183651" y="4855464"/>
-            <a:ext cx="548640" cy="205739"/>
-          </a:xfrm>
-          <a:prstGeom prst="rect">
-            <a:avLst/>
-          </a:prstGeom>
-          <a:noFill/>
-        </p:spPr>
-        <p:txBody>
-          <a:bodyPr wrap="square" lIns="0" rIns="0" tIns="0" bIns="0">
-            <a:spAutoFit/>
-          </a:bodyPr>
-          <a:lstStyle/>
-          <a:p>
-            <a:pPr algn="r"/>
-            <a:r>
-              <a:rPr sz="675" b="0" i="0">
-                <a:solidFill>
-                  <a:srgbClr val="8A8699"/>
-                </a:solidFill>
-                <a:latin typeface="Arial"/>
-              </a:rPr>
-              <a:t>2</a:t>
-            </a:r>
-          </a:p>
-        </p:txBody>
-      </p:sp>
       <p:graphicFrame>
         <p:nvGraphicFramePr>
-          <p:cNvPr id="7" name="Table 6"/>
+          <p:cNvPr id="8" name="Table 7"/>
           <p:cNvGraphicFramePr>
             <a:graphicFrameLocks noGrp="1"/>
           </p:cNvGraphicFramePr>
           <p:nvPr/>
         </p:nvGraphicFramePr>
         <p:xfrm>
-          <a:off x="411479" y="1261872"/>
+          <a:off x="411479" y="1282446"/>
           <a:ext cx="8318754" cy="2948940"/>
         </p:xfrm>
         <a:graphic>
@@ -6022,7 +6108,7 @@
                           <a:solidFill>
                             <a:srgbClr val="FFFFFF"/>
                           </a:solidFill>
-                          <a:latin typeface="Arial"/>
+                          <a:latin typeface="Helvetica Neue"/>
                         </a:rPr>
                         <a:t>#</a:t>
                       </a:r>
@@ -6045,7 +6131,7 @@
                           <a:solidFill>
                             <a:srgbClr val="FFFFFF"/>
                           </a:solidFill>
-                          <a:latin typeface="Arial"/>
+                          <a:latin typeface="Helvetica Neue"/>
                         </a:rPr>
                         <a:t>Milestone</a:t>
                       </a:r>
@@ -6068,7 +6154,7 @@
                           <a:solidFill>
                             <a:srgbClr val="FFFFFF"/>
                           </a:solidFill>
-                          <a:latin typeface="Arial"/>
+                          <a:latin typeface="Helvetica Neue"/>
                         </a:rPr>
                         <a:t>Owner</a:t>
                       </a:r>
@@ -6091,7 +6177,7 @@
                           <a:solidFill>
                             <a:srgbClr val="FFFFFF"/>
                           </a:solidFill>
-                          <a:latin typeface="Arial"/>
+                          <a:latin typeface="Helvetica Neue"/>
                         </a:rPr>
                         <a:t>Target</a:t>
                       </a:r>
@@ -6114,7 +6200,7 @@
                           <a:solidFill>
                             <a:srgbClr val="FFFFFF"/>
                           </a:solidFill>
-                          <a:latin typeface="Arial"/>
+                          <a:latin typeface="Helvetica Neue"/>
                         </a:rPr>
                         <a:t>Status</a:t>
                       </a:r>
@@ -6133,15 +6219,38 @@
                     <a:bodyPr/>
                     <a:lstStyle/>
                     <a:p>
+                      <a:pPr algn="l"/>
+                      <a:r>
+                        <a:rPr sz="630" b="1" i="0">
+                          <a:solidFill>
+                            <a:srgbClr val="1A1A24"/>
+                          </a:solidFill>
+                          <a:latin typeface="Helvetica Neue"/>
+                        </a:rPr>
+                        <a:t>1</a:t>
+                      </a:r>
+                    </a:p>
+                  </a:txBody>
+                  <a:tcPr anchor="ctr" marL="48006" marR="34290" marT="6858" marB="6858">
+                    <a:solidFill>
+                      <a:srgbClr val="FFFFFF"/>
+                    </a:solidFill>
+                  </a:tcPr>
+                </a:tc>
+                <a:tc>
+                  <a:txBody>
+                    <a:bodyPr/>
+                    <a:lstStyle/>
+                    <a:p>
                       <a:pPr algn="ctr"/>
                       <a:r>
-                        <a:rPr sz="615" b="0" i="0">
-                          <a:solidFill>
-                            <a:srgbClr val="1A1A24"/>
-                          </a:solidFill>
-                          <a:latin typeface="Arial"/>
-                        </a:rPr>
-                        <a:t>1</a:t>
+                        <a:rPr sz="630" b="0" i="0">
+                          <a:solidFill>
+                            <a:srgbClr val="555266"/>
+                          </a:solidFill>
+                          <a:latin typeface="Helvetica Neue"/>
+                        </a:rPr>
+                        <a:t>Priority use case identified — Engagement (absorbs re-engagement + cross-cat)</a:t>
                       </a:r>
                     </a:p>
                   </a:txBody>
@@ -6156,15 +6265,15 @@
                     <a:bodyPr/>
                     <a:lstStyle/>
                     <a:p>
-                      <a:pPr algn="l"/>
-                      <a:r>
-                        <a:rPr sz="615" b="0" i="0">
-                          <a:solidFill>
-                            <a:srgbClr val="1A1A24"/>
-                          </a:solidFill>
-                          <a:latin typeface="Arial"/>
-                        </a:rPr>
-                        <a:t>Priority use case identified — Engagement (absorbs re-engagement + cross-cat)</a:t>
+                      <a:pPr algn="ctr"/>
+                      <a:r>
+                        <a:rPr sz="630" b="0" i="0">
+                          <a:solidFill>
+                            <a:srgbClr val="555266"/>
+                          </a:solidFill>
+                          <a:latin typeface="Helvetica Neue"/>
+                        </a:rPr>
+                        <a:t>BLC + Braze</a:t>
                       </a:r>
                     </a:p>
                   </a:txBody>
@@ -6179,15 +6288,15 @@
                     <a:bodyPr/>
                     <a:lstStyle/>
                     <a:p>
-                      <a:pPr algn="l"/>
-                      <a:r>
-                        <a:rPr sz="615" b="0" i="0">
+                      <a:pPr algn="ctr"/>
+                      <a:r>
+                        <a:rPr sz="630" b="0" i="0">
                           <a:solidFill>
                             <a:srgbClr val="555266"/>
                           </a:solidFill>
-                          <a:latin typeface="Arial"/>
-                        </a:rPr>
-                        <a:t>BLC + Braze</a:t>
+                          <a:latin typeface="Helvetica Neue"/>
+                        </a:rPr>
+                        <a:t>27 May</a:t>
                       </a:r>
                     </a:p>
                   </a:txBody>
@@ -6202,36 +6311,13 @@
                     <a:bodyPr/>
                     <a:lstStyle/>
                     <a:p>
-                      <a:pPr algn="l"/>
-                      <a:r>
-                        <a:rPr sz="615" b="0" i="0">
-                          <a:solidFill>
-                            <a:srgbClr val="555266"/>
-                          </a:solidFill>
-                          <a:latin typeface="Arial"/>
-                        </a:rPr>
-                        <a:t>27 May</a:t>
-                      </a:r>
-                    </a:p>
-                  </a:txBody>
-                  <a:tcPr anchor="ctr" marL="48006" marR="34290" marT="6858" marB="6858">
-                    <a:solidFill>
-                      <a:srgbClr val="FFFFFF"/>
-                    </a:solidFill>
-                  </a:tcPr>
-                </a:tc>
-                <a:tc>
-                  <a:txBody>
-                    <a:bodyPr/>
-                    <a:lstStyle/>
-                    <a:p>
-                      <a:pPr algn="l"/>
-                      <a:r>
-                        <a:rPr sz="615" b="1" i="0">
+                      <a:pPr algn="ctr"/>
+                      <a:r>
+                        <a:rPr sz="630" b="1" i="0">
                           <a:solidFill>
                             <a:srgbClr val="801ED7"/>
                           </a:solidFill>
-                          <a:latin typeface="Arial"/>
+                          <a:latin typeface="Helvetica Neue"/>
                         </a:rPr>
                         <a:t>✓ Completed</a:t>
                       </a:r>
@@ -6250,15 +6336,38 @@
                     <a:bodyPr/>
                     <a:lstStyle/>
                     <a:p>
+                      <a:pPr algn="l"/>
+                      <a:r>
+                        <a:rPr sz="630" b="1" i="0">
+                          <a:solidFill>
+                            <a:srgbClr val="1A1A24"/>
+                          </a:solidFill>
+                          <a:latin typeface="Helvetica Neue"/>
+                        </a:rPr>
+                        <a:t>2</a:t>
+                      </a:r>
+                    </a:p>
+                  </a:txBody>
+                  <a:tcPr anchor="ctr" marL="48006" marR="34290" marT="6858" marB="6858">
+                    <a:solidFill>
+                      <a:srgbClr val="EFEDFF"/>
+                    </a:solidFill>
+                  </a:tcPr>
+                </a:tc>
+                <a:tc>
+                  <a:txBody>
+                    <a:bodyPr/>
+                    <a:lstStyle/>
+                    <a:p>
                       <a:pPr algn="ctr"/>
                       <a:r>
-                        <a:rPr sz="615" b="0" i="0">
-                          <a:solidFill>
-                            <a:srgbClr val="1A1A24"/>
-                          </a:solidFill>
-                          <a:latin typeface="Arial"/>
-                        </a:rPr>
-                        <a:t>2</a:t>
+                        <a:rPr sz="630" b="0" i="0">
+                          <a:solidFill>
+                            <a:srgbClr val="555266"/>
+                          </a:solidFill>
+                          <a:latin typeface="Helvetica Neue"/>
+                        </a:rPr>
+                        <a:t>Business case &amp; impact model built (£4.37M target run-rate)</a:t>
                       </a:r>
                     </a:p>
                   </a:txBody>
@@ -6273,15 +6382,15 @@
                     <a:bodyPr/>
                     <a:lstStyle/>
                     <a:p>
-                      <a:pPr algn="l"/>
-                      <a:r>
-                        <a:rPr sz="615" b="0" i="0">
-                          <a:solidFill>
-                            <a:srgbClr val="1A1A24"/>
-                          </a:solidFill>
-                          <a:latin typeface="Arial"/>
-                        </a:rPr>
-                        <a:t>Business case &amp; impact model built (£4.37M target run-rate)</a:t>
+                      <a:pPr algn="ctr"/>
+                      <a:r>
+                        <a:rPr sz="630" b="0" i="0">
+                          <a:solidFill>
+                            <a:srgbClr val="555266"/>
+                          </a:solidFill>
+                          <a:latin typeface="Helvetica Neue"/>
+                        </a:rPr>
+                        <a:t>Braze</a:t>
                       </a:r>
                     </a:p>
                   </a:txBody>
@@ -6296,15 +6405,15 @@
                     <a:bodyPr/>
                     <a:lstStyle/>
                     <a:p>
-                      <a:pPr algn="l"/>
-                      <a:r>
-                        <a:rPr sz="615" b="0" i="0">
+                      <a:pPr algn="ctr"/>
+                      <a:r>
+                        <a:rPr sz="630" b="0" i="0">
                           <a:solidFill>
                             <a:srgbClr val="555266"/>
                           </a:solidFill>
-                          <a:latin typeface="Arial"/>
-                        </a:rPr>
-                        <a:t>Braze</a:t>
+                          <a:latin typeface="Helvetica Neue"/>
+                        </a:rPr>
+                        <a:t>27 May</a:t>
                       </a:r>
                     </a:p>
                   </a:txBody>
@@ -6319,36 +6428,13 @@
                     <a:bodyPr/>
                     <a:lstStyle/>
                     <a:p>
-                      <a:pPr algn="l"/>
-                      <a:r>
-                        <a:rPr sz="615" b="0" i="0">
-                          <a:solidFill>
-                            <a:srgbClr val="555266"/>
-                          </a:solidFill>
-                          <a:latin typeface="Arial"/>
-                        </a:rPr>
-                        <a:t>27 May</a:t>
-                      </a:r>
-                    </a:p>
-                  </a:txBody>
-                  <a:tcPr anchor="ctr" marL="48006" marR="34290" marT="6858" marB="6858">
-                    <a:solidFill>
-                      <a:srgbClr val="EFEDFF"/>
-                    </a:solidFill>
-                  </a:tcPr>
-                </a:tc>
-                <a:tc>
-                  <a:txBody>
-                    <a:bodyPr/>
-                    <a:lstStyle/>
-                    <a:p>
-                      <a:pPr algn="l"/>
-                      <a:r>
-                        <a:rPr sz="615" b="1" i="0">
+                      <a:pPr algn="ctr"/>
+                      <a:r>
+                        <a:rPr sz="630" b="1" i="0">
                           <a:solidFill>
                             <a:srgbClr val="801ED7"/>
                           </a:solidFill>
-                          <a:latin typeface="Arial"/>
+                          <a:latin typeface="Helvetica Neue"/>
                         </a:rPr>
                         <a:t>✓ Completed</a:t>
                       </a:r>
@@ -6367,15 +6453,38 @@
                     <a:bodyPr/>
                     <a:lstStyle/>
                     <a:p>
+                      <a:pPr algn="l"/>
+                      <a:r>
+                        <a:rPr sz="630" b="1" i="0">
+                          <a:solidFill>
+                            <a:srgbClr val="1A1A24"/>
+                          </a:solidFill>
+                          <a:latin typeface="Helvetica Neue"/>
+                        </a:rPr>
+                        <a:t>3</a:t>
+                      </a:r>
+                    </a:p>
+                  </a:txBody>
+                  <a:tcPr anchor="ctr" marL="48006" marR="34290" marT="6858" marB="6858">
+                    <a:solidFill>
+                      <a:srgbClr val="FFFFFF"/>
+                    </a:solidFill>
+                  </a:tcPr>
+                </a:tc>
+                <a:tc>
+                  <a:txBody>
+                    <a:bodyPr/>
+                    <a:lstStyle/>
+                    <a:p>
                       <a:pPr algn="ctr"/>
                       <a:r>
-                        <a:rPr sz="615" b="0" i="0">
-                          <a:solidFill>
-                            <a:srgbClr val="1A1A24"/>
-                          </a:solidFill>
-                          <a:latin typeface="Arial"/>
-                        </a:rPr>
-                        <a:t>3</a:t>
+                        <a:rPr sz="630" b="0" i="0">
+                          <a:solidFill>
+                            <a:srgbClr val="555266"/>
+                          </a:solidFill>
+                          <a:latin typeface="Helvetica Neue"/>
+                        </a:rPr>
+                        <a:t>Data validation &amp; audience sizing (4.2M MAU)</a:t>
                       </a:r>
                     </a:p>
                   </a:txBody>
@@ -6390,15 +6499,15 @@
                     <a:bodyPr/>
                     <a:lstStyle/>
                     <a:p>
-                      <a:pPr algn="l"/>
-                      <a:r>
-                        <a:rPr sz="615" b="0" i="0">
-                          <a:solidFill>
-                            <a:srgbClr val="1A1A24"/>
-                          </a:solidFill>
-                          <a:latin typeface="Arial"/>
-                        </a:rPr>
-                        <a:t>Data validation &amp; audience sizing (4.2M MAU)</a:t>
+                      <a:pPr algn="ctr"/>
+                      <a:r>
+                        <a:rPr sz="630" b="0" i="0">
+                          <a:solidFill>
+                            <a:srgbClr val="555266"/>
+                          </a:solidFill>
+                          <a:latin typeface="Helvetica Neue"/>
+                        </a:rPr>
+                        <a:t>BLC + Braze</a:t>
                       </a:r>
                     </a:p>
                   </a:txBody>
@@ -6413,15 +6522,15 @@
                     <a:bodyPr/>
                     <a:lstStyle/>
                     <a:p>
-                      <a:pPr algn="l"/>
-                      <a:r>
-                        <a:rPr sz="615" b="0" i="0">
+                      <a:pPr algn="ctr"/>
+                      <a:r>
+                        <a:rPr sz="630" b="0" i="0">
                           <a:solidFill>
                             <a:srgbClr val="555266"/>
                           </a:solidFill>
-                          <a:latin typeface="Arial"/>
-                        </a:rPr>
-                        <a:t>BLC + Braze</a:t>
+                          <a:latin typeface="Helvetica Neue"/>
+                        </a:rPr>
+                        <a:t>27 May</a:t>
                       </a:r>
                     </a:p>
                   </a:txBody>
@@ -6436,36 +6545,13 @@
                     <a:bodyPr/>
                     <a:lstStyle/>
                     <a:p>
-                      <a:pPr algn="l"/>
-                      <a:r>
-                        <a:rPr sz="615" b="0" i="0">
-                          <a:solidFill>
-                            <a:srgbClr val="555266"/>
-                          </a:solidFill>
-                          <a:latin typeface="Arial"/>
-                        </a:rPr>
-                        <a:t>27 May</a:t>
-                      </a:r>
-                    </a:p>
-                  </a:txBody>
-                  <a:tcPr anchor="ctr" marL="48006" marR="34290" marT="6858" marB="6858">
-                    <a:solidFill>
-                      <a:srgbClr val="FFFFFF"/>
-                    </a:solidFill>
-                  </a:tcPr>
-                </a:tc>
-                <a:tc>
-                  <a:txBody>
-                    <a:bodyPr/>
-                    <a:lstStyle/>
-                    <a:p>
-                      <a:pPr algn="l"/>
-                      <a:r>
-                        <a:rPr sz="615" b="1" i="0">
+                      <a:pPr algn="ctr"/>
+                      <a:r>
+                        <a:rPr sz="630" b="1" i="0">
                           <a:solidFill>
                             <a:srgbClr val="801ED7"/>
                           </a:solidFill>
-                          <a:latin typeface="Arial"/>
+                          <a:latin typeface="Helvetica Neue"/>
                         </a:rPr>
                         <a:t>✓ Completed</a:t>
                       </a:r>
@@ -6484,15 +6570,38 @@
                     <a:bodyPr/>
                     <a:lstStyle/>
                     <a:p>
+                      <a:pPr algn="l"/>
+                      <a:r>
+                        <a:rPr sz="630" b="1" i="0">
+                          <a:solidFill>
+                            <a:srgbClr val="1A1A24"/>
+                          </a:solidFill>
+                          <a:latin typeface="Helvetica Neue"/>
+                        </a:rPr>
+                        <a:t>4</a:t>
+                      </a:r>
+                    </a:p>
+                  </a:txBody>
+                  <a:tcPr anchor="ctr" marL="48006" marR="34290" marT="6858" marB="6858">
+                    <a:solidFill>
+                      <a:srgbClr val="EFEDFF"/>
+                    </a:solidFill>
+                  </a:tcPr>
+                </a:tc>
+                <a:tc>
+                  <a:txBody>
+                    <a:bodyPr/>
+                    <a:lstStyle/>
+                    <a:p>
                       <a:pPr algn="ctr"/>
                       <a:r>
-                        <a:rPr sz="615" b="0" i="0">
-                          <a:solidFill>
-                            <a:srgbClr val="1A1A24"/>
-                          </a:solidFill>
-                          <a:latin typeface="Arial"/>
-                        </a:rPr>
-                        <a:t>4</a:t>
+                        <a:rPr sz="630" b="0" i="0">
+                          <a:solidFill>
+                            <a:srgbClr val="555266"/>
+                          </a:solidFill>
+                          <a:latin typeface="Helvetica Neue"/>
+                        </a:rPr>
+                        <a:t>Customer Readiness Assessment (CRA) — in-flight</a:t>
                       </a:r>
                     </a:p>
                   </a:txBody>
@@ -6507,15 +6616,15 @@
                     <a:bodyPr/>
                     <a:lstStyle/>
                     <a:p>
-                      <a:pPr algn="l"/>
-                      <a:r>
-                        <a:rPr sz="615" b="0" i="0">
-                          <a:solidFill>
-                            <a:srgbClr val="1A1A24"/>
-                          </a:solidFill>
-                          <a:latin typeface="Arial"/>
-                        </a:rPr>
-                        <a:t>Customer Readiness Assessment (CRA) — in-flight</a:t>
+                      <a:pPr algn="ctr"/>
+                      <a:r>
+                        <a:rPr sz="630" b="0" i="0">
+                          <a:solidFill>
+                            <a:srgbClr val="555266"/>
+                          </a:solidFill>
+                          <a:latin typeface="Helvetica Neue"/>
+                        </a:rPr>
+                        <a:t>Braze</a:t>
                       </a:r>
                     </a:p>
                   </a:txBody>
@@ -6530,15 +6639,15 @@
                     <a:bodyPr/>
                     <a:lstStyle/>
                     <a:p>
-                      <a:pPr algn="l"/>
-                      <a:r>
-                        <a:rPr sz="615" b="0" i="0">
+                      <a:pPr algn="ctr"/>
+                      <a:r>
+                        <a:rPr sz="630" b="0" i="0">
                           <a:solidFill>
                             <a:srgbClr val="555266"/>
                           </a:solidFill>
-                          <a:latin typeface="Arial"/>
-                        </a:rPr>
-                        <a:t>Braze</a:t>
+                          <a:latin typeface="Helvetica Neue"/>
+                        </a:rPr>
+                        <a:t>16 Jun</a:t>
                       </a:r>
                     </a:p>
                   </a:txBody>
@@ -6553,36 +6662,13 @@
                     <a:bodyPr/>
                     <a:lstStyle/>
                     <a:p>
-                      <a:pPr algn="l"/>
-                      <a:r>
-                        <a:rPr sz="615" b="0" i="0">
-                          <a:solidFill>
-                            <a:srgbClr val="555266"/>
-                          </a:solidFill>
-                          <a:latin typeface="Arial"/>
-                        </a:rPr>
-                        <a:t>16 Jun</a:t>
-                      </a:r>
-                    </a:p>
-                  </a:txBody>
-                  <a:tcPr anchor="ctr" marL="48006" marR="34290" marT="6858" marB="6858">
-                    <a:solidFill>
-                      <a:srgbClr val="EFEDFF"/>
-                    </a:solidFill>
-                  </a:tcPr>
-                </a:tc>
-                <a:tc>
-                  <a:txBody>
-                    <a:bodyPr/>
-                    <a:lstStyle/>
-                    <a:p>
-                      <a:pPr algn="l"/>
-                      <a:r>
-                        <a:rPr sz="615" b="1" i="0">
+                      <a:pPr algn="ctr"/>
+                      <a:r>
+                        <a:rPr sz="630" b="1" i="0">
                           <a:solidFill>
                             <a:srgbClr val="FFA524"/>
                           </a:solidFill>
-                          <a:latin typeface="Arial"/>
+                          <a:latin typeface="Helvetica Neue"/>
                         </a:rPr>
                         <a:t>● In flight</a:t>
                       </a:r>
@@ -6601,15 +6687,38 @@
                     <a:bodyPr/>
                     <a:lstStyle/>
                     <a:p>
+                      <a:pPr algn="l"/>
+                      <a:r>
+                        <a:rPr sz="630" b="1" i="0">
+                          <a:solidFill>
+                            <a:srgbClr val="1A1A24"/>
+                          </a:solidFill>
+                          <a:latin typeface="Helvetica Neue"/>
+                        </a:rPr>
+                        <a:t>5</a:t>
+                      </a:r>
+                    </a:p>
+                  </a:txBody>
+                  <a:tcPr anchor="ctr" marL="48006" marR="34290" marT="6858" marB="6858">
+                    <a:solidFill>
+                      <a:srgbClr val="FFFFFF"/>
+                    </a:solidFill>
+                  </a:tcPr>
+                </a:tc>
+                <a:tc>
+                  <a:txBody>
+                    <a:bodyPr/>
+                    <a:lstStyle/>
+                    <a:p>
                       <a:pPr algn="ctr"/>
                       <a:r>
-                        <a:rPr sz="615" b="0" i="0">
-                          <a:solidFill>
-                            <a:srgbClr val="1A1A24"/>
-                          </a:solidFill>
-                          <a:latin typeface="Arial"/>
-                        </a:rPr>
-                        <a:t>5</a:t>
+                        <a:rPr sz="630" b="0" i="0">
+                          <a:solidFill>
+                            <a:srgbClr val="555266"/>
+                          </a:solidFill>
+                          <a:latin typeface="Helvetica Neue"/>
+                        </a:rPr>
+                        <a:t>Commercial proposal &amp; cost structure shared</a:t>
                       </a:r>
                     </a:p>
                   </a:txBody>
@@ -6624,15 +6733,15 @@
                     <a:bodyPr/>
                     <a:lstStyle/>
                     <a:p>
-                      <a:pPr algn="l"/>
-                      <a:r>
-                        <a:rPr sz="615" b="0" i="0">
-                          <a:solidFill>
-                            <a:srgbClr val="1A1A24"/>
-                          </a:solidFill>
-                          <a:latin typeface="Arial"/>
-                        </a:rPr>
-                        <a:t>Commercial proposal &amp; cost structure shared</a:t>
+                      <a:pPr algn="ctr"/>
+                      <a:r>
+                        <a:rPr sz="630" b="0" i="0">
+                          <a:solidFill>
+                            <a:srgbClr val="555266"/>
+                          </a:solidFill>
+                          <a:latin typeface="Helvetica Neue"/>
+                        </a:rPr>
+                        <a:t>Braze</a:t>
                       </a:r>
                     </a:p>
                   </a:txBody>
@@ -6647,15 +6756,15 @@
                     <a:bodyPr/>
                     <a:lstStyle/>
                     <a:p>
-                      <a:pPr algn="l"/>
-                      <a:r>
-                        <a:rPr sz="615" b="0" i="0">
+                      <a:pPr algn="ctr"/>
+                      <a:r>
+                        <a:rPr sz="630" b="0" i="0">
                           <a:solidFill>
                             <a:srgbClr val="555266"/>
                           </a:solidFill>
-                          <a:latin typeface="Arial"/>
-                        </a:rPr>
-                        <a:t>Braze</a:t>
+                          <a:latin typeface="Helvetica Neue"/>
+                        </a:rPr>
+                        <a:t>17 Jun</a:t>
                       </a:r>
                     </a:p>
                   </a:txBody>
@@ -6670,36 +6779,13 @@
                     <a:bodyPr/>
                     <a:lstStyle/>
                     <a:p>
-                      <a:pPr algn="l"/>
-                      <a:r>
-                        <a:rPr sz="615" b="0" i="0">
-                          <a:solidFill>
-                            <a:srgbClr val="555266"/>
-                          </a:solidFill>
-                          <a:latin typeface="Arial"/>
-                        </a:rPr>
-                        <a:t>17 Jun</a:t>
-                      </a:r>
-                    </a:p>
-                  </a:txBody>
-                  <a:tcPr anchor="ctr" marL="48006" marR="34290" marT="6858" marB="6858">
-                    <a:solidFill>
-                      <a:srgbClr val="FFFFFF"/>
-                    </a:solidFill>
-                  </a:tcPr>
-                </a:tc>
-                <a:tc>
-                  <a:txBody>
-                    <a:bodyPr/>
-                    <a:lstStyle/>
-                    <a:p>
-                      <a:pPr algn="l"/>
-                      <a:r>
-                        <a:rPr sz="615" b="1" i="0">
+                      <a:pPr algn="ctr"/>
+                      <a:r>
+                        <a:rPr sz="630" b="1" i="0">
                           <a:solidFill>
                             <a:srgbClr val="300266"/>
                           </a:solidFill>
-                          <a:latin typeface="Arial"/>
+                          <a:latin typeface="Helvetica Neue"/>
                         </a:rPr>
                         <a:t>● Today</a:t>
                       </a:r>
@@ -6718,15 +6804,38 @@
                     <a:bodyPr/>
                     <a:lstStyle/>
                     <a:p>
+                      <a:pPr algn="l"/>
+                      <a:r>
+                        <a:rPr sz="630" b="1" i="0">
+                          <a:solidFill>
+                            <a:srgbClr val="1A1A24"/>
+                          </a:solidFill>
+                          <a:latin typeface="Helvetica Neue"/>
+                        </a:rPr>
+                        <a:t>6</a:t>
+                      </a:r>
+                    </a:p>
+                  </a:txBody>
+                  <a:tcPr anchor="ctr" marL="48006" marR="34290" marT="6858" marB="6858">
+                    <a:solidFill>
+                      <a:srgbClr val="EFEDFF"/>
+                    </a:solidFill>
+                  </a:tcPr>
+                </a:tc>
+                <a:tc>
+                  <a:txBody>
+                    <a:bodyPr/>
+                    <a:lstStyle/>
+                    <a:p>
                       <a:pPr algn="ctr"/>
                       <a:r>
-                        <a:rPr sz="615" b="0" i="0">
-                          <a:solidFill>
-                            <a:srgbClr val="1A1A24"/>
-                          </a:solidFill>
-                          <a:latin typeface="Arial"/>
-                        </a:rPr>
-                        <a:t>6</a:t>
+                        <a:rPr sz="630" b="0" i="0">
+                          <a:solidFill>
+                            <a:srgbClr val="555266"/>
+                          </a:solidFill>
+                          <a:latin typeface="Helvetica Neue"/>
+                        </a:rPr>
+                        <a:t>Lifecycle team review model &amp; price → internal alignment</a:t>
                       </a:r>
                     </a:p>
                   </a:txBody>
@@ -6741,15 +6850,15 @@
                     <a:bodyPr/>
                     <a:lstStyle/>
                     <a:p>
-                      <a:pPr algn="l"/>
-                      <a:r>
-                        <a:rPr sz="615" b="0" i="0">
-                          <a:solidFill>
-                            <a:srgbClr val="1A1A24"/>
-                          </a:solidFill>
-                          <a:latin typeface="Arial"/>
-                        </a:rPr>
-                        <a:t>Lifecycle team review model &amp; price → internal alignment</a:t>
+                      <a:pPr algn="ctr"/>
+                      <a:r>
+                        <a:rPr sz="630" b="0" i="0">
+                          <a:solidFill>
+                            <a:srgbClr val="555266"/>
+                          </a:solidFill>
+                          <a:latin typeface="Helvetica Neue"/>
+                        </a:rPr>
+                        <a:t>BLC (Marie)</a:t>
                       </a:r>
                     </a:p>
                   </a:txBody>
@@ -6764,15 +6873,15 @@
                     <a:bodyPr/>
                     <a:lstStyle/>
                     <a:p>
-                      <a:pPr algn="l"/>
-                      <a:r>
-                        <a:rPr sz="615" b="0" i="0">
+                      <a:pPr algn="ctr"/>
+                      <a:r>
+                        <a:rPr sz="630" b="0" i="0">
                           <a:solidFill>
                             <a:srgbClr val="555266"/>
                           </a:solidFill>
-                          <a:latin typeface="Arial"/>
-                        </a:rPr>
-                        <a:t>BLC (Marie)</a:t>
+                          <a:latin typeface="Helvetica Neue"/>
+                        </a:rPr>
+                        <a:t>w/c 23 Jun</a:t>
                       </a:r>
                     </a:p>
                   </a:txBody>
@@ -6787,36 +6896,13 @@
                     <a:bodyPr/>
                     <a:lstStyle/>
                     <a:p>
-                      <a:pPr algn="l"/>
-                      <a:r>
-                        <a:rPr sz="615" b="0" i="0">
-                          <a:solidFill>
-                            <a:srgbClr val="555266"/>
-                          </a:solidFill>
-                          <a:latin typeface="Arial"/>
-                        </a:rPr>
-                        <a:t>w/c 23 Jun</a:t>
-                      </a:r>
-                    </a:p>
-                  </a:txBody>
-                  <a:tcPr anchor="ctr" marL="48006" marR="34290" marT="6858" marB="6858">
-                    <a:solidFill>
-                      <a:srgbClr val="EFEDFF"/>
-                    </a:solidFill>
-                  </a:tcPr>
-                </a:tc>
-                <a:tc>
-                  <a:txBody>
-                    <a:bodyPr/>
-                    <a:lstStyle/>
-                    <a:p>
-                      <a:pPr algn="l"/>
-                      <a:r>
-                        <a:rPr sz="615" b="1" i="0">
+                      <a:pPr algn="ctr"/>
+                      <a:r>
+                        <a:rPr sz="630" b="1" i="0">
                           <a:solidFill>
                             <a:srgbClr val="8A8699"/>
                           </a:solidFill>
-                          <a:latin typeface="Arial"/>
+                          <a:latin typeface="Helvetica Neue"/>
                         </a:rPr>
                         <a:t>Upcoming</a:t>
                       </a:r>
@@ -6835,15 +6921,38 @@
                     <a:bodyPr/>
                     <a:lstStyle/>
                     <a:p>
+                      <a:pPr algn="l"/>
+                      <a:r>
+                        <a:rPr sz="630" b="1" i="0">
+                          <a:solidFill>
+                            <a:srgbClr val="1A1A24"/>
+                          </a:solidFill>
+                          <a:latin typeface="Helvetica Neue"/>
+                        </a:rPr>
+                        <a:t>7</a:t>
+                      </a:r>
+                    </a:p>
+                  </a:txBody>
+                  <a:tcPr anchor="ctr" marL="48006" marR="34290" marT="6858" marB="6858">
+                    <a:solidFill>
+                      <a:srgbClr val="FFFFFF"/>
+                    </a:solidFill>
+                  </a:tcPr>
+                </a:tc>
+                <a:tc>
+                  <a:txBody>
+                    <a:bodyPr/>
+                    <a:lstStyle/>
+                    <a:p>
                       <a:pPr algn="ctr"/>
                       <a:r>
-                        <a:rPr sz="615" b="0" i="0">
-                          <a:solidFill>
-                            <a:srgbClr val="1A1A24"/>
-                          </a:solidFill>
-                          <a:latin typeface="Arial"/>
-                        </a:rPr>
-                        <a:t>7</a:t>
+                        <a:rPr sz="630" b="0" i="0">
+                          <a:solidFill>
+                            <a:srgbClr val="555266"/>
+                          </a:solidFill>
+                          <a:latin typeface="Helvetica Neue"/>
+                        </a:rPr>
+                        <a:t>Executive review — Director of Data, CPO, Head of Engineering</a:t>
                       </a:r>
                     </a:p>
                   </a:txBody>
@@ -6858,15 +6967,15 @@
                     <a:bodyPr/>
                     <a:lstStyle/>
                     <a:p>
-                      <a:pPr algn="l"/>
-                      <a:r>
-                        <a:rPr sz="615" b="0" i="0">
-                          <a:solidFill>
-                            <a:srgbClr val="1A1A24"/>
-                          </a:solidFill>
-                          <a:latin typeface="Arial"/>
-                        </a:rPr>
-                        <a:t>Executive review — Director of Data, CPO, Head of Engineering</a:t>
+                      <a:pPr algn="ctr"/>
+                      <a:r>
+                        <a:rPr sz="630" b="0" i="0">
+                          <a:solidFill>
+                            <a:srgbClr val="555266"/>
+                          </a:solidFill>
+                          <a:latin typeface="Helvetica Neue"/>
+                        </a:rPr>
+                        <a:t>BLC + Braze</a:t>
                       </a:r>
                     </a:p>
                   </a:txBody>
@@ -6881,15 +6990,15 @@
                     <a:bodyPr/>
                     <a:lstStyle/>
                     <a:p>
-                      <a:pPr algn="l"/>
-                      <a:r>
-                        <a:rPr sz="615" b="0" i="0">
+                      <a:pPr algn="ctr"/>
+                      <a:r>
+                        <a:rPr sz="630" b="0" i="0">
                           <a:solidFill>
                             <a:srgbClr val="555266"/>
                           </a:solidFill>
-                          <a:latin typeface="Arial"/>
-                        </a:rPr>
-                        <a:t>BLC + Braze</a:t>
+                          <a:latin typeface="Helvetica Neue"/>
+                        </a:rPr>
+                        <a:t>w/c 23 Jun</a:t>
                       </a:r>
                     </a:p>
                   </a:txBody>
@@ -6904,36 +7013,13 @@
                     <a:bodyPr/>
                     <a:lstStyle/>
                     <a:p>
-                      <a:pPr algn="l"/>
-                      <a:r>
-                        <a:rPr sz="615" b="0" i="0">
-                          <a:solidFill>
-                            <a:srgbClr val="555266"/>
-                          </a:solidFill>
-                          <a:latin typeface="Arial"/>
-                        </a:rPr>
-                        <a:t>w/c 23 Jun</a:t>
-                      </a:r>
-                    </a:p>
-                  </a:txBody>
-                  <a:tcPr anchor="ctr" marL="48006" marR="34290" marT="6858" marB="6858">
-                    <a:solidFill>
-                      <a:srgbClr val="FFFFFF"/>
-                    </a:solidFill>
-                  </a:tcPr>
-                </a:tc>
-                <a:tc>
-                  <a:txBody>
-                    <a:bodyPr/>
-                    <a:lstStyle/>
-                    <a:p>
-                      <a:pPr algn="l"/>
-                      <a:r>
-                        <a:rPr sz="615" b="1" i="0">
+                      <a:pPr algn="ctr"/>
+                      <a:r>
+                        <a:rPr sz="630" b="1" i="0">
                           <a:solidFill>
                             <a:srgbClr val="8A8699"/>
                           </a:solidFill>
-                          <a:latin typeface="Arial"/>
+                          <a:latin typeface="Helvetica Neue"/>
                         </a:rPr>
                         <a:t>Upcoming</a:t>
                       </a:r>
@@ -6952,15 +7038,38 @@
                     <a:bodyPr/>
                     <a:lstStyle/>
                     <a:p>
+                      <a:pPr algn="l"/>
+                      <a:r>
+                        <a:rPr sz="630" b="1" i="0">
+                          <a:solidFill>
+                            <a:srgbClr val="1A1A24"/>
+                          </a:solidFill>
+                          <a:latin typeface="Helvetica Neue"/>
+                        </a:rPr>
+                        <a:t>8</a:t>
+                      </a:r>
+                    </a:p>
+                  </a:txBody>
+                  <a:tcPr anchor="ctr" marL="48006" marR="34290" marT="6858" marB="6858">
+                    <a:solidFill>
+                      <a:srgbClr val="EFEDFF"/>
+                    </a:solidFill>
+                  </a:tcPr>
+                </a:tc>
+                <a:tc>
+                  <a:txBody>
+                    <a:bodyPr/>
+                    <a:lstStyle/>
+                    <a:p>
                       <a:pPr algn="ctr"/>
                       <a:r>
-                        <a:rPr sz="615" b="0" i="0">
-                          <a:solidFill>
-                            <a:srgbClr val="1A1A24"/>
-                          </a:solidFill>
-                          <a:latin typeface="Arial"/>
-                        </a:rPr>
-                        <a:t>8</a:t>
+                        <a:rPr sz="630" b="0" i="0">
+                          <a:solidFill>
+                            <a:srgbClr val="555266"/>
+                          </a:solidFill>
+                          <a:latin typeface="Helvetica Neue"/>
+                        </a:rPr>
+                        <a:t>Finance approval (if incremental budget required)</a:t>
                       </a:r>
                     </a:p>
                   </a:txBody>
@@ -6975,15 +7084,15 @@
                     <a:bodyPr/>
                     <a:lstStyle/>
                     <a:p>
-                      <a:pPr algn="l"/>
-                      <a:r>
-                        <a:rPr sz="615" b="0" i="0">
-                          <a:solidFill>
-                            <a:srgbClr val="1A1A24"/>
-                          </a:solidFill>
-                          <a:latin typeface="Arial"/>
-                        </a:rPr>
-                        <a:t>Finance approval (if incremental budget required)</a:t>
+                      <a:pPr algn="ctr"/>
+                      <a:r>
+                        <a:rPr sz="630" b="0" i="0">
+                          <a:solidFill>
+                            <a:srgbClr val="555266"/>
+                          </a:solidFill>
+                          <a:latin typeface="Helvetica Neue"/>
+                        </a:rPr>
+                        <a:t>BLC</a:t>
                       </a:r>
                     </a:p>
                   </a:txBody>
@@ -6998,15 +7107,15 @@
                     <a:bodyPr/>
                     <a:lstStyle/>
                     <a:p>
-                      <a:pPr algn="l"/>
-                      <a:r>
-                        <a:rPr sz="615" b="0" i="0">
+                      <a:pPr algn="ctr"/>
+                      <a:r>
+                        <a:rPr sz="630" b="0" i="0">
                           <a:solidFill>
                             <a:srgbClr val="555266"/>
                           </a:solidFill>
-                          <a:latin typeface="Arial"/>
-                        </a:rPr>
-                        <a:t>BLC</a:t>
+                          <a:latin typeface="Helvetica Neue"/>
+                        </a:rPr>
+                        <a:t>early Jul</a:t>
                       </a:r>
                     </a:p>
                   </a:txBody>
@@ -7021,36 +7130,13 @@
                     <a:bodyPr/>
                     <a:lstStyle/>
                     <a:p>
-                      <a:pPr algn="l"/>
-                      <a:r>
-                        <a:rPr sz="615" b="0" i="0">
-                          <a:solidFill>
-                            <a:srgbClr val="555266"/>
-                          </a:solidFill>
-                          <a:latin typeface="Arial"/>
-                        </a:rPr>
-                        <a:t>early Jul</a:t>
-                      </a:r>
-                    </a:p>
-                  </a:txBody>
-                  <a:tcPr anchor="ctr" marL="48006" marR="34290" marT="6858" marB="6858">
-                    <a:solidFill>
-                      <a:srgbClr val="EFEDFF"/>
-                    </a:solidFill>
-                  </a:tcPr>
-                </a:tc>
-                <a:tc>
-                  <a:txBody>
-                    <a:bodyPr/>
-                    <a:lstStyle/>
-                    <a:p>
-                      <a:pPr algn="l"/>
-                      <a:r>
-                        <a:rPr sz="615" b="1" i="0">
+                      <a:pPr algn="ctr"/>
+                      <a:r>
+                        <a:rPr sz="630" b="1" i="0">
                           <a:solidFill>
                             <a:srgbClr val="8A8699"/>
                           </a:solidFill>
-                          <a:latin typeface="Arial"/>
+                          <a:latin typeface="Helvetica Neue"/>
                         </a:rPr>
                         <a:t>Upcoming</a:t>
                       </a:r>
@@ -7069,15 +7155,38 @@
                     <a:bodyPr/>
                     <a:lstStyle/>
                     <a:p>
+                      <a:pPr algn="l"/>
+                      <a:r>
+                        <a:rPr sz="630" b="1" i="0">
+                          <a:solidFill>
+                            <a:srgbClr val="1A1A24"/>
+                          </a:solidFill>
+                          <a:latin typeface="Helvetica Neue"/>
+                        </a:rPr>
+                        <a:t>9</a:t>
+                      </a:r>
+                    </a:p>
+                  </a:txBody>
+                  <a:tcPr anchor="ctr" marL="48006" marR="34290" marT="6858" marB="6858">
+                    <a:solidFill>
+                      <a:srgbClr val="FFFFFF"/>
+                    </a:solidFill>
+                  </a:tcPr>
+                </a:tc>
+                <a:tc>
+                  <a:txBody>
+                    <a:bodyPr/>
+                    <a:lstStyle/>
+                    <a:p>
                       <a:pPr algn="ctr"/>
                       <a:r>
-                        <a:rPr sz="615" b="0" i="0">
-                          <a:solidFill>
-                            <a:srgbClr val="1A1A24"/>
-                          </a:solidFill>
-                          <a:latin typeface="Arial"/>
-                        </a:rPr>
-                        <a:t>9</a:t>
+                        <a:rPr sz="630" b="0" i="0">
+                          <a:solidFill>
+                            <a:srgbClr val="555266"/>
+                          </a:solidFill>
+                          <a:latin typeface="Helvetica Neue"/>
+                        </a:rPr>
+                        <a:t>Go / No-Go decision</a:t>
                       </a:r>
                     </a:p>
                   </a:txBody>
@@ -7092,15 +7201,15 @@
                     <a:bodyPr/>
                     <a:lstStyle/>
                     <a:p>
-                      <a:pPr algn="l"/>
-                      <a:r>
-                        <a:rPr sz="615" b="0" i="0">
-                          <a:solidFill>
-                            <a:srgbClr val="1A1A24"/>
-                          </a:solidFill>
-                          <a:latin typeface="Arial"/>
-                        </a:rPr>
-                        <a:t>Go / No-Go decision</a:t>
+                      <a:pPr algn="ctr"/>
+                      <a:r>
+                        <a:rPr sz="630" b="0" i="0">
+                          <a:solidFill>
+                            <a:srgbClr val="555266"/>
+                          </a:solidFill>
+                          <a:latin typeface="Helvetica Neue"/>
+                        </a:rPr>
+                        <a:t>BLC</a:t>
                       </a:r>
                     </a:p>
                   </a:txBody>
@@ -7115,15 +7224,15 @@
                     <a:bodyPr/>
                     <a:lstStyle/>
                     <a:p>
-                      <a:pPr algn="l"/>
-                      <a:r>
-                        <a:rPr sz="615" b="0" i="0">
+                      <a:pPr algn="ctr"/>
+                      <a:r>
+                        <a:rPr sz="630" b="0" i="0">
                           <a:solidFill>
                             <a:srgbClr val="555266"/>
                           </a:solidFill>
-                          <a:latin typeface="Arial"/>
-                        </a:rPr>
-                        <a:t>BLC</a:t>
+                          <a:latin typeface="Helvetica Neue"/>
+                        </a:rPr>
+                        <a:t>by mid-Jul</a:t>
                       </a:r>
                     </a:p>
                   </a:txBody>
@@ -7138,36 +7247,13 @@
                     <a:bodyPr/>
                     <a:lstStyle/>
                     <a:p>
-                      <a:pPr algn="l"/>
-                      <a:r>
-                        <a:rPr sz="615" b="0" i="0">
-                          <a:solidFill>
-                            <a:srgbClr val="555266"/>
-                          </a:solidFill>
-                          <a:latin typeface="Arial"/>
-                        </a:rPr>
-                        <a:t>by mid-Jul</a:t>
-                      </a:r>
-                    </a:p>
-                  </a:txBody>
-                  <a:tcPr anchor="ctr" marL="48006" marR="34290" marT="6858" marB="6858">
-                    <a:solidFill>
-                      <a:srgbClr val="FFFFFF"/>
-                    </a:solidFill>
-                  </a:tcPr>
-                </a:tc>
-                <a:tc>
-                  <a:txBody>
-                    <a:bodyPr/>
-                    <a:lstStyle/>
-                    <a:p>
-                      <a:pPr algn="l"/>
-                      <a:r>
-                        <a:rPr sz="615" b="1" i="0">
+                      <a:pPr algn="ctr"/>
+                      <a:r>
+                        <a:rPr sz="630" b="1" i="0">
                           <a:solidFill>
                             <a:srgbClr val="8A8699"/>
                           </a:solidFill>
-                          <a:latin typeface="Arial"/>
+                          <a:latin typeface="Helvetica Neue"/>
                         </a:rPr>
                         <a:t>Upcoming</a:t>
                       </a:r>
@@ -7186,15 +7272,38 @@
                     <a:bodyPr/>
                     <a:lstStyle/>
                     <a:p>
+                      <a:pPr algn="l"/>
+                      <a:r>
+                        <a:rPr sz="630" b="1" i="0">
+                          <a:solidFill>
+                            <a:srgbClr val="1A1A24"/>
+                          </a:solidFill>
+                          <a:latin typeface="Helvetica Neue"/>
+                        </a:rPr>
+                        <a:t>10</a:t>
+                      </a:r>
+                    </a:p>
+                  </a:txBody>
+                  <a:tcPr anchor="ctr" marL="48006" marR="34290" marT="6858" marB="6858">
+                    <a:solidFill>
+                      <a:srgbClr val="EFEDFF"/>
+                    </a:solidFill>
+                  </a:tcPr>
+                </a:tc>
+                <a:tc>
+                  <a:txBody>
+                    <a:bodyPr/>
+                    <a:lstStyle/>
+                    <a:p>
                       <a:pPr algn="ctr"/>
                       <a:r>
-                        <a:rPr sz="615" b="0" i="0">
-                          <a:solidFill>
-                            <a:srgbClr val="1A1A24"/>
-                          </a:solidFill>
-                          <a:latin typeface="Arial"/>
-                        </a:rPr>
-                        <a:t>10</a:t>
+                        <a:rPr sz="630" b="0" i="0">
+                          <a:solidFill>
+                            <a:srgbClr val="555266"/>
+                          </a:solidFill>
+                          <a:latin typeface="Helvetica Neue"/>
+                        </a:rPr>
+                        <a:t>Order form finalised &amp; signature</a:t>
                       </a:r>
                     </a:p>
                   </a:txBody>
@@ -7209,15 +7318,15 @@
                     <a:bodyPr/>
                     <a:lstStyle/>
                     <a:p>
-                      <a:pPr algn="l"/>
-                      <a:r>
-                        <a:rPr sz="615" b="0" i="0">
-                          <a:solidFill>
-                            <a:srgbClr val="1A1A24"/>
-                          </a:solidFill>
-                          <a:latin typeface="Arial"/>
-                        </a:rPr>
-                        <a:t>Order form finalised &amp; signature</a:t>
+                      <a:pPr algn="ctr"/>
+                      <a:r>
+                        <a:rPr sz="630" b="0" i="0">
+                          <a:solidFill>
+                            <a:srgbClr val="555266"/>
+                          </a:solidFill>
+                          <a:latin typeface="Helvetica Neue"/>
+                        </a:rPr>
+                        <a:t>BLC + Braze</a:t>
                       </a:r>
                     </a:p>
                   </a:txBody>
@@ -7232,15 +7341,15 @@
                     <a:bodyPr/>
                     <a:lstStyle/>
                     <a:p>
-                      <a:pPr algn="l"/>
-                      <a:r>
-                        <a:rPr sz="615" b="0" i="0">
+                      <a:pPr algn="ctr"/>
+                      <a:r>
+                        <a:rPr sz="630" b="0" i="0">
                           <a:solidFill>
                             <a:srgbClr val="555266"/>
                           </a:solidFill>
-                          <a:latin typeface="Arial"/>
-                        </a:rPr>
-                        <a:t>BLC + Braze</a:t>
+                          <a:latin typeface="Helvetica Neue"/>
+                        </a:rPr>
+                        <a:t>late Jul</a:t>
                       </a:r>
                     </a:p>
                   </a:txBody>
@@ -7255,36 +7364,13 @@
                     <a:bodyPr/>
                     <a:lstStyle/>
                     <a:p>
-                      <a:pPr algn="l"/>
-                      <a:r>
-                        <a:rPr sz="615" b="0" i="0">
-                          <a:solidFill>
-                            <a:srgbClr val="555266"/>
-                          </a:solidFill>
-                          <a:latin typeface="Arial"/>
-                        </a:rPr>
-                        <a:t>late Jul</a:t>
-                      </a:r>
-                    </a:p>
-                  </a:txBody>
-                  <a:tcPr anchor="ctr" marL="48006" marR="34290" marT="6858" marB="6858">
-                    <a:solidFill>
-                      <a:srgbClr val="EFEDFF"/>
-                    </a:solidFill>
-                  </a:tcPr>
-                </a:tc>
-                <a:tc>
-                  <a:txBody>
-                    <a:bodyPr/>
-                    <a:lstStyle/>
-                    <a:p>
-                      <a:pPr algn="l"/>
-                      <a:r>
-                        <a:rPr sz="615" b="1" i="0">
+                      <a:pPr algn="ctr"/>
+                      <a:r>
+                        <a:rPr sz="630" b="1" i="0">
                           <a:solidFill>
                             <a:srgbClr val="8A8699"/>
                           </a:solidFill>
-                          <a:latin typeface="Arial"/>
+                          <a:latin typeface="Helvetica Neue"/>
                         </a:rPr>
                         <a:t>Upcoming</a:t>
                       </a:r>
@@ -7303,15 +7389,38 @@
                     <a:bodyPr/>
                     <a:lstStyle/>
                     <a:p>
+                      <a:pPr algn="l"/>
+                      <a:r>
+                        <a:rPr sz="630" b="1" i="0">
+                          <a:solidFill>
+                            <a:srgbClr val="1A1A24"/>
+                          </a:solidFill>
+                          <a:latin typeface="Helvetica Neue"/>
+                        </a:rPr>
+                        <a:t>11</a:t>
+                      </a:r>
+                    </a:p>
+                  </a:txBody>
+                  <a:tcPr anchor="ctr" marL="48006" marR="34290" marT="6858" marB="6858">
+                    <a:solidFill>
+                      <a:srgbClr val="FFFFFF"/>
+                    </a:solidFill>
+                  </a:tcPr>
+                </a:tc>
+                <a:tc>
+                  <a:txBody>
+                    <a:bodyPr/>
+                    <a:lstStyle/>
+                    <a:p>
                       <a:pPr algn="ctr"/>
                       <a:r>
-                        <a:rPr sz="615" b="0" i="0">
-                          <a:solidFill>
-                            <a:srgbClr val="1A1A24"/>
-                          </a:solidFill>
-                          <a:latin typeface="Arial"/>
-                        </a:rPr>
-                        <a:t>11</a:t>
+                        <a:rPr sz="630" b="0" i="0">
+                          <a:solidFill>
+                            <a:srgbClr val="555266"/>
+                          </a:solidFill>
+                          <a:latin typeface="Helvetica Neue"/>
+                        </a:rPr>
+                        <a:t>Implementation kickoff</a:t>
                       </a:r>
                     </a:p>
                   </a:txBody>
@@ -7326,15 +7435,15 @@
                     <a:bodyPr/>
                     <a:lstStyle/>
                     <a:p>
-                      <a:pPr algn="l"/>
-                      <a:r>
-                        <a:rPr sz="615" b="0" i="0">
-                          <a:solidFill>
-                            <a:srgbClr val="1A1A24"/>
-                          </a:solidFill>
-                          <a:latin typeface="Arial"/>
-                        </a:rPr>
-                        <a:t>Implementation kickoff</a:t>
+                      <a:pPr algn="ctr"/>
+                      <a:r>
+                        <a:rPr sz="630" b="0" i="0">
+                          <a:solidFill>
+                            <a:srgbClr val="555266"/>
+                          </a:solidFill>
+                          <a:latin typeface="Helvetica Neue"/>
+                        </a:rPr>
+                        <a:t>Braze + BLC</a:t>
                       </a:r>
                     </a:p>
                   </a:txBody>
@@ -7349,15 +7458,15 @@
                     <a:bodyPr/>
                     <a:lstStyle/>
                     <a:p>
-                      <a:pPr algn="l"/>
-                      <a:r>
-                        <a:rPr sz="615" b="0" i="0">
+                      <a:pPr algn="ctr"/>
+                      <a:r>
+                        <a:rPr sz="630" b="0" i="0">
                           <a:solidFill>
                             <a:srgbClr val="555266"/>
                           </a:solidFill>
-                          <a:latin typeface="Arial"/>
-                        </a:rPr>
-                        <a:t>Braze + BLC</a:t>
+                          <a:latin typeface="Helvetica Neue"/>
+                        </a:rPr>
+                        <a:t>November 2026</a:t>
                       </a:r>
                     </a:p>
                   </a:txBody>
@@ -7372,36 +7481,13 @@
                     <a:bodyPr/>
                     <a:lstStyle/>
                     <a:p>
-                      <a:pPr algn="l"/>
-                      <a:r>
-                        <a:rPr sz="615" b="0" i="0">
-                          <a:solidFill>
-                            <a:srgbClr val="555266"/>
-                          </a:solidFill>
-                          <a:latin typeface="Arial"/>
-                        </a:rPr>
-                        <a:t>November 2026</a:t>
-                      </a:r>
-                    </a:p>
-                  </a:txBody>
-                  <a:tcPr anchor="ctr" marL="48006" marR="34290" marT="6858" marB="6858">
-                    <a:solidFill>
-                      <a:srgbClr val="FFFFFF"/>
-                    </a:solidFill>
-                  </a:tcPr>
-                </a:tc>
-                <a:tc>
-                  <a:txBody>
-                    <a:bodyPr/>
-                    <a:lstStyle/>
-                    <a:p>
-                      <a:pPr algn="l"/>
-                      <a:r>
-                        <a:rPr sz="615" b="1" i="0">
+                      <a:pPr algn="ctr"/>
+                      <a:r>
+                        <a:rPr sz="630" b="1" i="0">
                           <a:solidFill>
                             <a:srgbClr val="8A8699"/>
                           </a:solidFill>
-                          <a:latin typeface="Arial"/>
+                          <a:latin typeface="Helvetica Neue"/>
                         </a:rPr>
                         <a:t>Upcoming</a:t>
                       </a:r>
@@ -7420,15 +7506,38 @@
                     <a:bodyPr/>
                     <a:lstStyle/>
                     <a:p>
+                      <a:pPr algn="l"/>
+                      <a:r>
+                        <a:rPr sz="630" b="1" i="0">
+                          <a:solidFill>
+                            <a:srgbClr val="1A1A24"/>
+                          </a:solidFill>
+                          <a:latin typeface="Helvetica Neue"/>
+                        </a:rPr>
+                        <a:t>12</a:t>
+                      </a:r>
+                    </a:p>
+                  </a:txBody>
+                  <a:tcPr anchor="ctr" marL="48006" marR="34290" marT="6858" marB="6858">
+                    <a:solidFill>
+                      <a:srgbClr val="EFEDFF"/>
+                    </a:solidFill>
+                  </a:tcPr>
+                </a:tc>
+                <a:tc>
+                  <a:txBody>
+                    <a:bodyPr/>
+                    <a:lstStyle/>
+                    <a:p>
                       <a:pPr algn="ctr"/>
                       <a:r>
-                        <a:rPr sz="615" b="0" i="0">
-                          <a:solidFill>
-                            <a:srgbClr val="1A1A24"/>
-                          </a:solidFill>
-                          <a:latin typeface="Arial"/>
-                        </a:rPr>
-                        <a:t>12</a:t>
+                        <a:rPr sz="630" b="0" i="0">
+                          <a:solidFill>
+                            <a:srgbClr val="555266"/>
+                          </a:solidFill>
+                          <a:latin typeface="Helvetica Neue"/>
+                        </a:rPr>
+                        <a:t>Go live — Engagement engine in production</a:t>
                       </a:r>
                     </a:p>
                   </a:txBody>
@@ -7443,15 +7552,15 @@
                     <a:bodyPr/>
                     <a:lstStyle/>
                     <a:p>
-                      <a:pPr algn="l"/>
-                      <a:r>
-                        <a:rPr sz="615" b="0" i="0">
-                          <a:solidFill>
-                            <a:srgbClr val="1A1A24"/>
-                          </a:solidFill>
-                          <a:latin typeface="Arial"/>
-                        </a:rPr>
-                        <a:t>Go live — Engagement engine in production</a:t>
+                      <a:pPr algn="ctr"/>
+                      <a:r>
+                        <a:rPr sz="630" b="0" i="0">
+                          <a:solidFill>
+                            <a:srgbClr val="555266"/>
+                          </a:solidFill>
+                          <a:latin typeface="Helvetica Neue"/>
+                        </a:rPr>
+                        <a:t>Braze + BLC</a:t>
                       </a:r>
                     </a:p>
                   </a:txBody>
@@ -7466,15 +7575,15 @@
                     <a:bodyPr/>
                     <a:lstStyle/>
                     <a:p>
-                      <a:pPr algn="l"/>
-                      <a:r>
-                        <a:rPr sz="615" b="0" i="0">
+                      <a:pPr algn="ctr"/>
+                      <a:r>
+                        <a:rPr sz="630" b="0" i="0">
                           <a:solidFill>
                             <a:srgbClr val="555266"/>
                           </a:solidFill>
-                          <a:latin typeface="Arial"/>
-                        </a:rPr>
-                        <a:t>Braze + BLC</a:t>
+                          <a:latin typeface="Helvetica Neue"/>
+                        </a:rPr>
+                        <a:t>February 2027</a:t>
                       </a:r>
                     </a:p>
                   </a:txBody>
@@ -7489,36 +7598,13 @@
                     <a:bodyPr/>
                     <a:lstStyle/>
                     <a:p>
-                      <a:pPr algn="l"/>
-                      <a:r>
-                        <a:rPr sz="615" b="0" i="0">
-                          <a:solidFill>
-                            <a:srgbClr val="555266"/>
-                          </a:solidFill>
-                          <a:latin typeface="Arial"/>
-                        </a:rPr>
-                        <a:t>February 2027</a:t>
-                      </a:r>
-                    </a:p>
-                  </a:txBody>
-                  <a:tcPr anchor="ctr" marL="48006" marR="34290" marT="6858" marB="6858">
-                    <a:solidFill>
-                      <a:srgbClr val="EFEDFF"/>
-                    </a:solidFill>
-                  </a:tcPr>
-                </a:tc>
-                <a:tc>
-                  <a:txBody>
-                    <a:bodyPr/>
-                    <a:lstStyle/>
-                    <a:p>
-                      <a:pPr algn="l"/>
-                      <a:r>
-                        <a:rPr sz="615" b="1" i="0">
+                      <a:pPr algn="ctr"/>
+                      <a:r>
+                        <a:rPr sz="630" b="1" i="0">
                           <a:solidFill>
                             <a:srgbClr val="8A8699"/>
                           </a:solidFill>
-                          <a:latin typeface="Arial"/>
+                          <a:latin typeface="Helvetica Neue"/>
                         </a:rPr>
                         <a:t>Upcoming</a:t>
                       </a:r>
@@ -7537,13 +7623,13 @@
       </p:graphicFrame>
       <p:sp>
         <p:nvSpPr>
-          <p:cNvPr id="8" name="TextBox 7"/>
+          <p:cNvPr id="9" name="TextBox 8"/>
           <p:cNvSpPr txBox="1"/>
           <p:nvPr/>
         </p:nvSpPr>
         <p:spPr>
           <a:xfrm>
-            <a:off x="411479" y="4251959"/>
+            <a:off x="411479" y="4286250"/>
             <a:ext cx="8320811" cy="288036"/>
           </a:xfrm>
           <a:prstGeom prst="rect">
@@ -7567,7 +7653,7 @@
                 <a:solidFill>
                   <a:srgbClr val="8A8699"/>
                 </a:solidFill>
-                <a:latin typeface="Arial"/>
+                <a:latin typeface="Helvetica Neue"/>
               </a:rPr>
               <a:t>Note: BLC's current Braze contract was renewed Jan 2026 ($1M+). Decisioning Studio is net-new on top of that contract.</a:t>
             </a:r>
@@ -7594,14 +7680,82 @@
       <p:grpSpPr/>
       <p:sp>
         <p:nvSpPr>
-          <p:cNvPr id="2" name="TextBox 1"/>
+          <p:cNvPr id="2" name="Rectangle 1"/>
+          <p:cNvSpPr/>
+          <p:nvPr/>
+        </p:nvSpPr>
+        <p:spPr>
+          <a:xfrm>
+            <a:off x="0" y="0"/>
+            <a:ext cx="9143771" cy="5143500"/>
+          </a:xfrm>
+          <a:prstGeom prst="rect">
+            <a:avLst/>
+          </a:prstGeom>
+          <a:solidFill>
+            <a:srgbClr val="FFFFFF"/>
+          </a:solidFill>
+          <a:ln>
+            <a:noFill/>
+          </a:ln>
+          <a:effectLst/>
+        </p:spPr>
+        <p:style>
+          <a:lnRef idx="1">
+            <a:schemeClr val="accent1"/>
+          </a:lnRef>
+          <a:fillRef idx="3">
+            <a:schemeClr val="accent1"/>
+          </a:fillRef>
+          <a:effectRef idx="2">
+            <a:schemeClr val="accent1"/>
+          </a:effectRef>
+          <a:fontRef idx="minor">
+            <a:schemeClr val="lt1"/>
+          </a:fontRef>
+        </p:style>
+        <p:txBody>
+          <a:bodyPr rtlCol="0" anchor="ctr"/>
+          <a:lstStyle/>
+          <a:p>
+            <a:pPr algn="ctr"/>
+          </a:p>
+        </p:txBody>
+      </p:sp>
+      <p:pic>
+        <p:nvPicPr>
+          <p:cNvPr id="3" name="Picture 2" descr="brazeai_logo.png"/>
+          <p:cNvPicPr>
+            <a:picLocks noChangeAspect="1"/>
+          </p:cNvPicPr>
+          <p:nvPr/>
+        </p:nvPicPr>
+        <p:blipFill>
+          <a:blip r:embed="rId2"/>
+          <a:stretch>
+            <a:fillRect/>
+          </a:stretch>
+        </p:blipFill>
+        <p:spPr>
+          <a:xfrm>
+            <a:off x="8090607" y="233172"/>
+            <a:ext cx="641684" cy="274320"/>
+          </a:xfrm>
+          <a:prstGeom prst="rect">
+            <a:avLst/>
+          </a:prstGeom>
+        </p:spPr>
+      </p:pic>
+      <p:sp>
+        <p:nvSpPr>
+          <p:cNvPr id="4" name="TextBox 3"/>
           <p:cNvSpPr txBox="1"/>
           <p:nvPr/>
         </p:nvSpPr>
         <p:spPr>
           <a:xfrm>
-            <a:off x="411479" y="342900"/>
-            <a:ext cx="6674891" cy="205739"/>
+            <a:off x="8183651" y="4855464"/>
+            <a:ext cx="548640" cy="205739"/>
           </a:xfrm>
           <a:prstGeom prst="rect">
             <a:avLst/>
@@ -7614,13 +7768,48 @@
           </a:bodyPr>
           <a:lstStyle/>
           <a:p>
+            <a:pPr algn="r"/>
+            <a:r>
+              <a:rPr sz="675" b="0" i="0">
+                <a:solidFill>
+                  <a:srgbClr val="8A8699"/>
+                </a:solidFill>
+                <a:latin typeface="Helvetica Neue"/>
+              </a:rPr>
+              <a:t>3</a:t>
+            </a:r>
+          </a:p>
+        </p:txBody>
+      </p:sp>
+      <p:sp>
+        <p:nvSpPr>
+          <p:cNvPr id="5" name="TextBox 4"/>
+          <p:cNvSpPr txBox="1"/>
+          <p:nvPr/>
+        </p:nvSpPr>
+        <p:spPr>
+          <a:xfrm>
+            <a:off x="411479" y="342900"/>
+            <a:ext cx="6674891" cy="205739"/>
+          </a:xfrm>
+          <a:prstGeom prst="rect">
+            <a:avLst/>
+          </a:prstGeom>
+          <a:noFill/>
+        </p:spPr>
+        <p:txBody>
+          <a:bodyPr wrap="square" lIns="0" rIns="0" tIns="0" bIns="0">
+            <a:spAutoFit/>
+          </a:bodyPr>
+          <a:lstStyle/>
+          <a:p>
             <a:pPr algn="l"/>
             <a:r>
               <a:rPr sz="825" b="1" i="0" spc="200">
                 <a:solidFill>
                   <a:srgbClr val="FFA524"/>
                 </a:solidFill>
-                <a:latin typeface="Arial"/>
+                <a:latin typeface="Helvetica Neue"/>
               </a:rPr>
               <a:t>COMMERCIALS</a:t>
             </a:r>
@@ -7629,14 +7818,14 @@
       </p:sp>
       <p:sp>
         <p:nvSpPr>
-          <p:cNvPr id="3" name="TextBox 2"/>
+          <p:cNvPr id="6" name="TextBox 5"/>
           <p:cNvSpPr txBox="1"/>
           <p:nvPr/>
         </p:nvSpPr>
         <p:spPr>
           <a:xfrm>
             <a:off x="411479" y="576072"/>
-            <a:ext cx="8183651" cy="480059"/>
+            <a:ext cx="8183651" cy="548640"/>
           </a:xfrm>
           <a:prstGeom prst="rect">
             <a:avLst/>
@@ -7659,7 +7848,7 @@
                 <a:solidFill>
                   <a:srgbClr val="801ED7"/>
                 </a:solidFill>
-                <a:latin typeface="Arial"/>
+                <a:latin typeface="Helvetica Neue"/>
               </a:rPr>
               <a:t>Year-one investment — Engagement proof of value</a:t>
             </a:r>
@@ -7668,7 +7857,7 @@
       </p:sp>
       <p:sp>
         <p:nvSpPr>
-          <p:cNvPr id="4" name="TextBox 3"/>
+          <p:cNvPr id="7" name="TextBox 6"/>
           <p:cNvSpPr txBox="1"/>
           <p:nvPr/>
         </p:nvSpPr>
@@ -7698,7 +7887,7 @@
                 <a:solidFill>
                   <a:srgbClr val="FFA524"/>
                 </a:solidFill>
-                <a:latin typeface="Arial"/>
+                <a:latin typeface="Helvetica Neue"/>
               </a:rPr>
               <a:t>Priced at the 4M-MAU tier — sign by 17 July to lock the early-sign rate</a:t>
             </a:r>
@@ -7707,7 +7896,7 @@
       </p:sp>
       <p:sp>
         <p:nvSpPr>
-          <p:cNvPr id="5" name="Rectangle 4"/>
+          <p:cNvPr id="8" name="Rectangle 7"/>
           <p:cNvSpPr/>
           <p:nvPr/>
         </p:nvSpPr>
@@ -7749,68 +7938,9 @@
           </a:p>
         </p:txBody>
       </p:sp>
-      <p:pic>
-        <p:nvPicPr>
-          <p:cNvPr id="6" name="Picture 5" descr="brazeai_logo.png"/>
-          <p:cNvPicPr>
-            <a:picLocks noChangeAspect="1"/>
-          </p:cNvPicPr>
-          <p:nvPr/>
-        </p:nvPicPr>
-        <p:blipFill>
-          <a:blip r:embed="rId2"/>
-          <a:stretch>
-            <a:fillRect/>
-          </a:stretch>
-        </p:blipFill>
-        <p:spPr>
-          <a:xfrm>
-            <a:off x="8090607" y="233172"/>
-            <a:ext cx="641684" cy="274320"/>
-          </a:xfrm>
-          <a:prstGeom prst="rect">
-            <a:avLst/>
-          </a:prstGeom>
-        </p:spPr>
-      </p:pic>
-      <p:sp>
-        <p:nvSpPr>
-          <p:cNvPr id="7" name="TextBox 6"/>
-          <p:cNvSpPr txBox="1"/>
-          <p:nvPr/>
-        </p:nvSpPr>
-        <p:spPr>
-          <a:xfrm>
-            <a:off x="8183651" y="4855464"/>
-            <a:ext cx="548640" cy="205739"/>
-          </a:xfrm>
-          <a:prstGeom prst="rect">
-            <a:avLst/>
-          </a:prstGeom>
-          <a:noFill/>
-        </p:spPr>
-        <p:txBody>
-          <a:bodyPr wrap="square" lIns="0" rIns="0" tIns="0" bIns="0">
-            <a:spAutoFit/>
-          </a:bodyPr>
-          <a:lstStyle/>
-          <a:p>
-            <a:pPr algn="r"/>
-            <a:r>
-              <a:rPr sz="675" b="0" i="0">
-                <a:solidFill>
-                  <a:srgbClr val="8A8699"/>
-                </a:solidFill>
-                <a:latin typeface="Arial"/>
-              </a:rPr>
-              <a:t>3</a:t>
-            </a:r>
-          </a:p>
-        </p:txBody>
-      </p:sp>
-      <p:sp>
-        <p:nvSpPr>
-          <p:cNvPr id="8" name="Rounded Rectangle 7"/>
+      <p:sp>
+        <p:nvSpPr>
+          <p:cNvPr id="9" name="Rounded Rectangle 8"/>
           <p:cNvSpPr/>
           <p:nvPr/>
         </p:nvSpPr>
@@ -7856,7 +7986,7 @@
       </p:sp>
       <p:sp>
         <p:nvSpPr>
-          <p:cNvPr id="9" name="TextBox 8"/>
+          <p:cNvPr id="10" name="TextBox 9"/>
           <p:cNvSpPr txBox="1"/>
           <p:nvPr/>
         </p:nvSpPr>
@@ -7882,7 +8012,7 @@
                 <a:solidFill>
                   <a:srgbClr val="FFA524"/>
                 </a:solidFill>
-                <a:latin typeface="Arial"/>
+                <a:latin typeface="Helvetica Neue"/>
               </a:rPr>
               <a:t>35% PARTNERSHIP DISCOUNT</a:t>
             </a:r>
@@ -7891,7 +8021,7 @@
       </p:sp>
       <p:sp>
         <p:nvSpPr>
-          <p:cNvPr id="10" name="TextBox 9"/>
+          <p:cNvPr id="11" name="TextBox 10"/>
           <p:cNvSpPr txBox="1"/>
           <p:nvPr/>
         </p:nvSpPr>
@@ -7917,7 +8047,7 @@
                 <a:solidFill>
                   <a:srgbClr val="D9D3FB"/>
                 </a:solidFill>
-                <a:latin typeface="Arial"/>
+                <a:latin typeface="Helvetica Neue"/>
               </a:rPr>
               <a:t>List price  </a:t>
             </a:r>
@@ -7926,7 +8056,7 @@
                 <a:solidFill>
                   <a:srgbClr val="D9D3FB"/>
                 </a:solidFill>
-                <a:latin typeface="Arial"/>
+                <a:latin typeface="Helvetica Neue"/>
               </a:rPr>
               <a:t>$409,000</a:t>
             </a:r>
@@ -7935,7 +8065,7 @@
       </p:sp>
       <p:sp>
         <p:nvSpPr>
-          <p:cNvPr id="11" name="TextBox 10"/>
+          <p:cNvPr id="12" name="TextBox 11"/>
           <p:cNvSpPr txBox="1"/>
           <p:nvPr/>
         </p:nvSpPr>
@@ -7961,7 +8091,7 @@
                 <a:solidFill>
                   <a:srgbClr val="FFFFFF"/>
                 </a:solidFill>
-                <a:latin typeface="Arial"/>
+                <a:latin typeface="Helvetica Neue"/>
               </a:rPr>
               <a:t>$264,000</a:t>
             </a:r>
@@ -7970,7 +8100,7 @@
       </p:sp>
       <p:sp>
         <p:nvSpPr>
-          <p:cNvPr id="12" name="TextBox 11"/>
+          <p:cNvPr id="13" name="TextBox 12"/>
           <p:cNvSpPr txBox="1"/>
           <p:nvPr/>
         </p:nvSpPr>
@@ -7996,7 +8126,7 @@
                 <a:solidFill>
                   <a:srgbClr val="FFA524"/>
                 </a:solidFill>
-                <a:latin typeface="Arial"/>
+                <a:latin typeface="Helvetica Neue"/>
               </a:rPr>
               <a:t>USD   ≈ £200,000 / year</a:t>
             </a:r>
@@ -8005,7 +8135,7 @@
       </p:sp>
       <p:sp>
         <p:nvSpPr>
-          <p:cNvPr id="13" name="TextBox 12"/>
+          <p:cNvPr id="14" name="TextBox 13"/>
           <p:cNvSpPr txBox="1"/>
           <p:nvPr/>
         </p:nvSpPr>
@@ -8035,7 +8165,7 @@
                 <a:solidFill>
                   <a:srgbClr val="D9D3FB"/>
                 </a:solidFill>
-                <a:latin typeface="Arial"/>
+                <a:latin typeface="Helvetica Neue"/>
               </a:rPr>
               <a:t>All-in annual fee — technology subscription plus a dedicated forward-deployed AI expert team for year 1. Sign by 17 July to lock this rate.</a:t>
             </a:r>
@@ -8044,7 +8174,7 @@
       </p:sp>
       <p:sp>
         <p:nvSpPr>
-          <p:cNvPr id="14" name="TextBox 13"/>
+          <p:cNvPr id="15" name="TextBox 14"/>
           <p:cNvSpPr txBox="1"/>
           <p:nvPr/>
         </p:nvSpPr>
@@ -8070,7 +8200,7 @@
                 <a:solidFill>
                   <a:srgbClr val="801ED7"/>
                 </a:solidFill>
-                <a:latin typeface="Arial"/>
+                <a:latin typeface="Helvetica Neue"/>
               </a:rPr>
               <a:t>Price breakdown</a:t>
             </a:r>
@@ -8079,7 +8209,7 @@
       </p:sp>
       <p:sp>
         <p:nvSpPr>
-          <p:cNvPr id="15" name="TextBox 14"/>
+          <p:cNvPr id="16" name="TextBox 15"/>
           <p:cNvSpPr txBox="1"/>
           <p:nvPr/>
         </p:nvSpPr>
@@ -8109,7 +8239,7 @@
                 <a:solidFill>
                   <a:srgbClr val="1A1A24"/>
                 </a:solidFill>
-                <a:latin typeface="Arial"/>
+                <a:latin typeface="Helvetica Neue"/>
               </a:rPr>
               <a:t>AI Expert Services</a:t>
             </a:r>
@@ -8125,7 +8255,7 @@
                 <a:solidFill>
                   <a:srgbClr val="8A8699"/>
                 </a:solidFill>
-                <a:latin typeface="Arial"/>
+                <a:latin typeface="Helvetica Neue"/>
               </a:rPr>
               <a:t>forward-deployed eng.</a:t>
             </a:r>
@@ -8134,7 +8264,7 @@
       </p:sp>
       <p:sp>
         <p:nvSpPr>
-          <p:cNvPr id="16" name="TextBox 15"/>
+          <p:cNvPr id="17" name="TextBox 16"/>
           <p:cNvSpPr txBox="1"/>
           <p:nvPr/>
         </p:nvSpPr>
@@ -8160,7 +8290,7 @@
                 <a:solidFill>
                   <a:srgbClr val="1A1A24"/>
                 </a:solidFill>
-                <a:latin typeface="Arial"/>
+                <a:latin typeface="Helvetica Neue"/>
               </a:rPr>
               <a:t>$100,000</a:t>
             </a:r>
@@ -8169,7 +8299,7 @@
       </p:sp>
       <p:sp>
         <p:nvSpPr>
-          <p:cNvPr id="17" name="Rectangle 16"/>
+          <p:cNvPr id="18" name="Rectangle 17"/>
           <p:cNvSpPr/>
           <p:nvPr/>
         </p:nvSpPr>
@@ -8213,7 +8343,7 @@
       </p:sp>
       <p:sp>
         <p:nvSpPr>
-          <p:cNvPr id="18" name="TextBox 17"/>
+          <p:cNvPr id="19" name="TextBox 18"/>
           <p:cNvSpPr txBox="1"/>
           <p:nvPr/>
         </p:nvSpPr>
@@ -8243,7 +8373,7 @@
                 <a:solidFill>
                   <a:srgbClr val="1A1A24"/>
                 </a:solidFill>
-                <a:latin typeface="Arial"/>
+                <a:latin typeface="Helvetica Neue"/>
               </a:rPr>
               <a:t>Use Case</a:t>
             </a:r>
@@ -8259,7 +8389,7 @@
                 <a:solidFill>
                   <a:srgbClr val="8A8699"/>
                 </a:solidFill>
-                <a:latin typeface="Arial"/>
+                <a:latin typeface="Helvetica Neue"/>
               </a:rPr>
               <a:t>Engagement</a:t>
             </a:r>
@@ -8268,7 +8398,7 @@
       </p:sp>
       <p:sp>
         <p:nvSpPr>
-          <p:cNvPr id="19" name="TextBox 18"/>
+          <p:cNvPr id="20" name="TextBox 19"/>
           <p:cNvSpPr txBox="1"/>
           <p:nvPr/>
         </p:nvSpPr>
@@ -8294,7 +8424,7 @@
                 <a:solidFill>
                   <a:srgbClr val="1A1A24"/>
                 </a:solidFill>
-                <a:latin typeface="Arial"/>
+                <a:latin typeface="Helvetica Neue"/>
               </a:rPr>
               <a:t>$175,000</a:t>
             </a:r>
@@ -8303,7 +8433,7 @@
       </p:sp>
       <p:sp>
         <p:nvSpPr>
-          <p:cNvPr id="20" name="Rectangle 19"/>
+          <p:cNvPr id="21" name="Rectangle 20"/>
           <p:cNvSpPr/>
           <p:nvPr/>
         </p:nvSpPr>
@@ -8347,7 +8477,7 @@
       </p:sp>
       <p:sp>
         <p:nvSpPr>
-          <p:cNvPr id="21" name="TextBox 20"/>
+          <p:cNvPr id="22" name="TextBox 21"/>
           <p:cNvSpPr txBox="1"/>
           <p:nvPr/>
         </p:nvSpPr>
@@ -8377,7 +8507,7 @@
                 <a:solidFill>
                   <a:srgbClr val="1A1A24"/>
                 </a:solidFill>
-                <a:latin typeface="Arial"/>
+                <a:latin typeface="Helvetica Neue"/>
               </a:rPr>
               <a:t>Audience entitlement</a:t>
             </a:r>
@@ -8393,7 +8523,7 @@
                 <a:solidFill>
                   <a:srgbClr val="8A8699"/>
                 </a:solidFill>
-                <a:latin typeface="Arial"/>
+                <a:latin typeface="Helvetica Neue"/>
               </a:rPr>
               <a:t>4M-MAU tier</a:t>
             </a:r>
@@ -8402,7 +8532,7 @@
       </p:sp>
       <p:sp>
         <p:nvSpPr>
-          <p:cNvPr id="22" name="TextBox 21"/>
+          <p:cNvPr id="23" name="TextBox 22"/>
           <p:cNvSpPr txBox="1"/>
           <p:nvPr/>
         </p:nvSpPr>
@@ -8428,7 +8558,7 @@
                 <a:solidFill>
                   <a:srgbClr val="1A1A24"/>
                 </a:solidFill>
-                <a:latin typeface="Arial"/>
+                <a:latin typeface="Helvetica Neue"/>
               </a:rPr>
               <a:t>$134,000</a:t>
             </a:r>
@@ -8437,7 +8567,7 @@
       </p:sp>
       <p:sp>
         <p:nvSpPr>
-          <p:cNvPr id="23" name="Rectangle 22"/>
+          <p:cNvPr id="24" name="Rectangle 23"/>
           <p:cNvSpPr/>
           <p:nvPr/>
         </p:nvSpPr>
@@ -8481,7 +8611,7 @@
       </p:sp>
       <p:sp>
         <p:nvSpPr>
-          <p:cNvPr id="24" name="TextBox 23"/>
+          <p:cNvPr id="25" name="TextBox 24"/>
           <p:cNvSpPr txBox="1"/>
           <p:nvPr/>
         </p:nvSpPr>
@@ -8511,7 +8641,7 @@
                 <a:solidFill>
                   <a:srgbClr val="555266"/>
                 </a:solidFill>
-                <a:latin typeface="Arial"/>
+                <a:latin typeface="Helvetica Neue"/>
               </a:rPr>
               <a:t>List price</a:t>
             </a:r>
@@ -8520,7 +8650,7 @@
       </p:sp>
       <p:sp>
         <p:nvSpPr>
-          <p:cNvPr id="25" name="TextBox 24"/>
+          <p:cNvPr id="26" name="TextBox 25"/>
           <p:cNvSpPr txBox="1"/>
           <p:nvPr/>
         </p:nvSpPr>
@@ -8546,7 +8676,7 @@
                 <a:solidFill>
                   <a:srgbClr val="555266"/>
                 </a:solidFill>
-                <a:latin typeface="Arial"/>
+                <a:latin typeface="Helvetica Neue"/>
               </a:rPr>
               <a:t>$409,000</a:t>
             </a:r>
@@ -8555,7 +8685,7 @@
       </p:sp>
       <p:sp>
         <p:nvSpPr>
-          <p:cNvPr id="26" name="Rectangle 25"/>
+          <p:cNvPr id="27" name="Rectangle 26"/>
           <p:cNvSpPr/>
           <p:nvPr/>
         </p:nvSpPr>
@@ -8599,7 +8729,7 @@
       </p:sp>
       <p:sp>
         <p:nvSpPr>
-          <p:cNvPr id="27" name="TextBox 26"/>
+          <p:cNvPr id="28" name="TextBox 27"/>
           <p:cNvSpPr txBox="1"/>
           <p:nvPr/>
         </p:nvSpPr>
@@ -8629,7 +8759,7 @@
                 <a:solidFill>
                   <a:srgbClr val="FFA524"/>
                 </a:solidFill>
-                <a:latin typeface="Arial"/>
+                <a:latin typeface="Helvetica Neue"/>
               </a:rPr>
               <a:t>Partnership discount (35%)</a:t>
             </a:r>
@@ -8638,7 +8768,7 @@
       </p:sp>
       <p:sp>
         <p:nvSpPr>
-          <p:cNvPr id="28" name="TextBox 27"/>
+          <p:cNvPr id="29" name="TextBox 28"/>
           <p:cNvSpPr txBox="1"/>
           <p:nvPr/>
         </p:nvSpPr>
@@ -8664,7 +8794,7 @@
                 <a:solidFill>
                   <a:srgbClr val="FFA524"/>
                 </a:solidFill>
-                <a:latin typeface="Arial"/>
+                <a:latin typeface="Helvetica Neue"/>
               </a:rPr>
               <a:t>–$145,000</a:t>
             </a:r>
@@ -8673,7 +8803,7 @@
       </p:sp>
       <p:sp>
         <p:nvSpPr>
-          <p:cNvPr id="29" name="Rectangle 28"/>
+          <p:cNvPr id="30" name="Rectangle 29"/>
           <p:cNvSpPr/>
           <p:nvPr/>
         </p:nvSpPr>
@@ -8717,7 +8847,7 @@
       </p:sp>
       <p:sp>
         <p:nvSpPr>
-          <p:cNvPr id="30" name="Rounded Rectangle 29"/>
+          <p:cNvPr id="31" name="Rounded Rectangle 30"/>
           <p:cNvSpPr/>
           <p:nvPr/>
         </p:nvSpPr>
@@ -8765,7 +8895,7 @@
       </p:sp>
       <p:sp>
         <p:nvSpPr>
-          <p:cNvPr id="31" name="TextBox 30"/>
+          <p:cNvPr id="32" name="TextBox 31"/>
           <p:cNvSpPr txBox="1"/>
           <p:nvPr/>
         </p:nvSpPr>
@@ -8795,7 +8925,7 @@
                 <a:solidFill>
                   <a:srgbClr val="801ED7"/>
                 </a:solidFill>
-                <a:latin typeface="Arial"/>
+                <a:latin typeface="Helvetica Neue"/>
               </a:rPr>
               <a:t>Year-one investment</a:t>
             </a:r>
@@ -8804,7 +8934,7 @@
       </p:sp>
       <p:sp>
         <p:nvSpPr>
-          <p:cNvPr id="32" name="TextBox 31"/>
+          <p:cNvPr id="33" name="TextBox 32"/>
           <p:cNvSpPr txBox="1"/>
           <p:nvPr/>
         </p:nvSpPr>
@@ -8830,7 +8960,7 @@
                 <a:solidFill>
                   <a:srgbClr val="801ED7"/>
                 </a:solidFill>
-                <a:latin typeface="Arial"/>
+                <a:latin typeface="Helvetica Neue"/>
               </a:rPr>
               <a:t>$264,000</a:t>
             </a:r>
@@ -8857,14 +8987,82 @@
       <p:grpSpPr/>
       <p:sp>
         <p:nvSpPr>
-          <p:cNvPr id="2" name="TextBox 1"/>
+          <p:cNvPr id="2" name="Rectangle 1"/>
+          <p:cNvSpPr/>
+          <p:nvPr/>
+        </p:nvSpPr>
+        <p:spPr>
+          <a:xfrm>
+            <a:off x="0" y="0"/>
+            <a:ext cx="9143771" cy="5143500"/>
+          </a:xfrm>
+          <a:prstGeom prst="rect">
+            <a:avLst/>
+          </a:prstGeom>
+          <a:solidFill>
+            <a:srgbClr val="FFFFFF"/>
+          </a:solidFill>
+          <a:ln>
+            <a:noFill/>
+          </a:ln>
+          <a:effectLst/>
+        </p:spPr>
+        <p:style>
+          <a:lnRef idx="1">
+            <a:schemeClr val="accent1"/>
+          </a:lnRef>
+          <a:fillRef idx="3">
+            <a:schemeClr val="accent1"/>
+          </a:fillRef>
+          <a:effectRef idx="2">
+            <a:schemeClr val="accent1"/>
+          </a:effectRef>
+          <a:fontRef idx="minor">
+            <a:schemeClr val="lt1"/>
+          </a:fontRef>
+        </p:style>
+        <p:txBody>
+          <a:bodyPr rtlCol="0" anchor="ctr"/>
+          <a:lstStyle/>
+          <a:p>
+            <a:pPr algn="ctr"/>
+          </a:p>
+        </p:txBody>
+      </p:sp>
+      <p:pic>
+        <p:nvPicPr>
+          <p:cNvPr id="3" name="Picture 2" descr="brazeai_logo.png"/>
+          <p:cNvPicPr>
+            <a:picLocks noChangeAspect="1"/>
+          </p:cNvPicPr>
+          <p:nvPr/>
+        </p:nvPicPr>
+        <p:blipFill>
+          <a:blip r:embed="rId2"/>
+          <a:stretch>
+            <a:fillRect/>
+          </a:stretch>
+        </p:blipFill>
+        <p:spPr>
+          <a:xfrm>
+            <a:off x="8090607" y="233172"/>
+            <a:ext cx="641684" cy="274320"/>
+          </a:xfrm>
+          <a:prstGeom prst="rect">
+            <a:avLst/>
+          </a:prstGeom>
+        </p:spPr>
+      </p:pic>
+      <p:sp>
+        <p:nvSpPr>
+          <p:cNvPr id="4" name="TextBox 3"/>
           <p:cNvSpPr txBox="1"/>
           <p:nvPr/>
         </p:nvSpPr>
         <p:spPr>
           <a:xfrm>
-            <a:off x="411479" y="342900"/>
-            <a:ext cx="6674891" cy="205739"/>
+            <a:off x="8183651" y="4855464"/>
+            <a:ext cx="548640" cy="205739"/>
           </a:xfrm>
           <a:prstGeom prst="rect">
             <a:avLst/>
@@ -8877,13 +9075,48 @@
           </a:bodyPr>
           <a:lstStyle/>
           <a:p>
+            <a:pPr algn="r"/>
+            <a:r>
+              <a:rPr sz="675" b="0" i="0">
+                <a:solidFill>
+                  <a:srgbClr val="8A8699"/>
+                </a:solidFill>
+                <a:latin typeface="Helvetica Neue"/>
+              </a:rPr>
+              <a:t>4</a:t>
+            </a:r>
+          </a:p>
+        </p:txBody>
+      </p:sp>
+      <p:sp>
+        <p:nvSpPr>
+          <p:cNvPr id="5" name="TextBox 4"/>
+          <p:cNvSpPr txBox="1"/>
+          <p:nvPr/>
+        </p:nvSpPr>
+        <p:spPr>
+          <a:xfrm>
+            <a:off x="411479" y="342900"/>
+            <a:ext cx="6674891" cy="205739"/>
+          </a:xfrm>
+          <a:prstGeom prst="rect">
+            <a:avLst/>
+          </a:prstGeom>
+          <a:noFill/>
+        </p:spPr>
+        <p:txBody>
+          <a:bodyPr wrap="square" lIns="0" rIns="0" tIns="0" bIns="0">
+            <a:spAutoFit/>
+          </a:bodyPr>
+          <a:lstStyle/>
+          <a:p>
             <a:pPr algn="l"/>
             <a:r>
               <a:rPr sz="825" b="1" i="0" spc="200">
                 <a:solidFill>
                   <a:srgbClr val="FFA524"/>
                 </a:solidFill>
-                <a:latin typeface="Arial"/>
+                <a:latin typeface="Helvetica Neue"/>
               </a:rPr>
               <a:t>08 · COMMERCIAL</a:t>
             </a:r>
@@ -8892,14 +9125,14 @@
       </p:sp>
       <p:sp>
         <p:nvSpPr>
-          <p:cNvPr id="3" name="TextBox 2"/>
+          <p:cNvPr id="6" name="TextBox 5"/>
           <p:cNvSpPr txBox="1"/>
           <p:nvPr/>
         </p:nvSpPr>
         <p:spPr>
           <a:xfrm>
             <a:off x="411479" y="576072"/>
-            <a:ext cx="8183651" cy="480059"/>
+            <a:ext cx="8183651" cy="548640"/>
           </a:xfrm>
           <a:prstGeom prst="rect">
             <a:avLst/>
@@ -8922,7 +9155,7 @@
                 <a:solidFill>
                   <a:srgbClr val="801ED7"/>
                 </a:solidFill>
-                <a:latin typeface="Arial"/>
+                <a:latin typeface="Helvetica Neue"/>
               </a:rPr>
               <a:t>Your cost structure, broken down</a:t>
             </a:r>
@@ -8931,7 +9164,7 @@
       </p:sp>
       <p:sp>
         <p:nvSpPr>
-          <p:cNvPr id="4" name="TextBox 3"/>
+          <p:cNvPr id="7" name="TextBox 6"/>
           <p:cNvSpPr txBox="1"/>
           <p:nvPr/>
         </p:nvSpPr>
@@ -8961,7 +9194,7 @@
                 <a:solidFill>
                   <a:srgbClr val="FFA524"/>
                 </a:solidFill>
-                <a:latin typeface="Arial"/>
+                <a:latin typeface="Helvetica Neue"/>
               </a:rPr>
               <a:t>One indivisible all-in fee — three components</a:t>
             </a:r>
@@ -8970,7 +9203,7 @@
       </p:sp>
       <p:sp>
         <p:nvSpPr>
-          <p:cNvPr id="5" name="Rectangle 4"/>
+          <p:cNvPr id="8" name="Rectangle 7"/>
           <p:cNvSpPr/>
           <p:nvPr/>
         </p:nvSpPr>
@@ -9012,68 +9245,9 @@
           </a:p>
         </p:txBody>
       </p:sp>
-      <p:pic>
-        <p:nvPicPr>
-          <p:cNvPr id="6" name="Picture 5" descr="brazeai_logo.png"/>
-          <p:cNvPicPr>
-            <a:picLocks noChangeAspect="1"/>
-          </p:cNvPicPr>
-          <p:nvPr/>
-        </p:nvPicPr>
-        <p:blipFill>
-          <a:blip r:embed="rId2"/>
-          <a:stretch>
-            <a:fillRect/>
-          </a:stretch>
-        </p:blipFill>
-        <p:spPr>
-          <a:xfrm>
-            <a:off x="8090607" y="233172"/>
-            <a:ext cx="641684" cy="274320"/>
-          </a:xfrm>
-          <a:prstGeom prst="rect">
-            <a:avLst/>
-          </a:prstGeom>
-        </p:spPr>
-      </p:pic>
-      <p:sp>
-        <p:nvSpPr>
-          <p:cNvPr id="7" name="TextBox 6"/>
-          <p:cNvSpPr txBox="1"/>
-          <p:nvPr/>
-        </p:nvSpPr>
-        <p:spPr>
-          <a:xfrm>
-            <a:off x="8183651" y="4855464"/>
-            <a:ext cx="548640" cy="205739"/>
-          </a:xfrm>
-          <a:prstGeom prst="rect">
-            <a:avLst/>
-          </a:prstGeom>
-          <a:noFill/>
-        </p:spPr>
-        <p:txBody>
-          <a:bodyPr wrap="square" lIns="0" rIns="0" tIns="0" bIns="0">
-            <a:spAutoFit/>
-          </a:bodyPr>
-          <a:lstStyle/>
-          <a:p>
-            <a:pPr algn="r"/>
-            <a:r>
-              <a:rPr sz="675" b="0" i="0">
-                <a:solidFill>
-                  <a:srgbClr val="8A8699"/>
-                </a:solidFill>
-                <a:latin typeface="Arial"/>
-              </a:rPr>
-              <a:t>4</a:t>
-            </a:r>
-          </a:p>
-        </p:txBody>
-      </p:sp>
-      <p:sp>
-        <p:nvSpPr>
-          <p:cNvPr id="8" name="Rounded Rectangle 7"/>
+      <p:sp>
+        <p:nvSpPr>
+          <p:cNvPr id="9" name="Rounded Rectangle 8"/>
           <p:cNvSpPr/>
           <p:nvPr/>
         </p:nvSpPr>
@@ -9084,7 +9258,7 @@
           </a:xfrm>
           <a:prstGeom prst="roundRect">
             <a:avLst>
-              <a:gd name="adj" fmla="val 4500"/>
+              <a:gd name="adj" fmla="val 5000"/>
             </a:avLst>
           </a:prstGeom>
           <a:solidFill>
@@ -9121,7 +9295,7 @@
       </p:sp>
       <p:sp>
         <p:nvSpPr>
-          <p:cNvPr id="9" name="Rectangle 8"/>
+          <p:cNvPr id="10" name="Rectangle 9"/>
           <p:cNvSpPr/>
           <p:nvPr/>
         </p:nvSpPr>
@@ -9165,7 +9339,7 @@
       </p:sp>
       <p:sp>
         <p:nvSpPr>
-          <p:cNvPr id="10" name="Oval 9"/>
+          <p:cNvPr id="11" name="Oval 10"/>
           <p:cNvSpPr/>
           <p:nvPr/>
         </p:nvSpPr>
@@ -9211,7 +9385,7 @@
       </p:sp>
       <p:sp>
         <p:nvSpPr>
-          <p:cNvPr id="11" name="TextBox 10"/>
+          <p:cNvPr id="12" name="TextBox 11"/>
           <p:cNvSpPr txBox="1"/>
           <p:nvPr/>
         </p:nvSpPr>
@@ -9237,7 +9411,7 @@
                 <a:solidFill>
                   <a:srgbClr val="801ED7"/>
                 </a:solidFill>
-                <a:latin typeface="Arial"/>
+                <a:latin typeface="Helvetica Neue"/>
               </a:rPr>
               <a:t>1</a:t>
             </a:r>
@@ -9246,7 +9420,7 @@
       </p:sp>
       <p:sp>
         <p:nvSpPr>
-          <p:cNvPr id="12" name="TextBox 11"/>
+          <p:cNvPr id="13" name="TextBox 12"/>
           <p:cNvSpPr txBox="1"/>
           <p:nvPr/>
         </p:nvSpPr>
@@ -9272,11 +9446,11 @@
               </a:lnSpc>
             </a:pPr>
             <a:r>
-              <a:rPr sz="1162" b="1" i="0">
+              <a:rPr sz="1125" b="1" i="0">
                 <a:solidFill>
                   <a:srgbClr val="801ED7"/>
                 </a:solidFill>
-                <a:latin typeface="Arial"/>
+                <a:latin typeface="Helvetica Neue"/>
               </a:rPr>
               <a:t>AI Expert Services</a:t>
             </a:r>
@@ -9285,7 +9459,7 @@
       </p:sp>
       <p:sp>
         <p:nvSpPr>
-          <p:cNvPr id="13" name="TextBox 12"/>
+          <p:cNvPr id="14" name="TextBox 13"/>
           <p:cNvSpPr txBox="1"/>
           <p:nvPr/>
         </p:nvSpPr>
@@ -9315,7 +9489,7 @@
                 <a:solidFill>
                   <a:srgbClr val="555266"/>
                 </a:solidFill>
-                <a:latin typeface="Arial"/>
+                <a:latin typeface="Helvetica Neue"/>
               </a:rPr>
               <a:t>Embedded ML experts who design, configure, tune and monitor your use case — at launch and ongoing.</a:t>
             </a:r>
@@ -9324,7 +9498,7 @@
       </p:sp>
       <p:sp>
         <p:nvSpPr>
-          <p:cNvPr id="14" name="Rounded Rectangle 13"/>
+          <p:cNvPr id="15" name="Rounded Rectangle 14"/>
           <p:cNvSpPr/>
           <p:nvPr/>
         </p:nvSpPr>
@@ -9335,7 +9509,7 @@
           </a:xfrm>
           <a:prstGeom prst="roundRect">
             <a:avLst>
-              <a:gd name="adj" fmla="val 4500"/>
+              <a:gd name="adj" fmla="val 5000"/>
             </a:avLst>
           </a:prstGeom>
           <a:solidFill>
@@ -9372,7 +9546,7 @@
       </p:sp>
       <p:sp>
         <p:nvSpPr>
-          <p:cNvPr id="15" name="Rectangle 14"/>
+          <p:cNvPr id="16" name="Rectangle 15"/>
           <p:cNvSpPr/>
           <p:nvPr/>
         </p:nvSpPr>
@@ -9416,7 +9590,7 @@
       </p:sp>
       <p:sp>
         <p:nvSpPr>
-          <p:cNvPr id="16" name="Oval 15"/>
+          <p:cNvPr id="17" name="Oval 16"/>
           <p:cNvSpPr/>
           <p:nvPr/>
         </p:nvSpPr>
@@ -9462,7 +9636,7 @@
       </p:sp>
       <p:sp>
         <p:nvSpPr>
-          <p:cNvPr id="17" name="TextBox 16"/>
+          <p:cNvPr id="18" name="TextBox 17"/>
           <p:cNvSpPr txBox="1"/>
           <p:nvPr/>
         </p:nvSpPr>
@@ -9488,7 +9662,7 @@
                 <a:solidFill>
                   <a:srgbClr val="801ED7"/>
                 </a:solidFill>
-                <a:latin typeface="Arial"/>
+                <a:latin typeface="Helvetica Neue"/>
               </a:rPr>
               <a:t>2</a:t>
             </a:r>
@@ -9497,7 +9671,7 @@
       </p:sp>
       <p:sp>
         <p:nvSpPr>
-          <p:cNvPr id="18" name="TextBox 17"/>
+          <p:cNvPr id="19" name="TextBox 18"/>
           <p:cNvSpPr txBox="1"/>
           <p:nvPr/>
         </p:nvSpPr>
@@ -9523,11 +9697,11 @@
               </a:lnSpc>
             </a:pPr>
             <a:r>
-              <a:rPr sz="1162" b="1" i="0">
+              <a:rPr sz="1125" b="1" i="0">
                 <a:solidFill>
                   <a:srgbClr val="801ED7"/>
                 </a:solidFill>
-                <a:latin typeface="Arial"/>
+                <a:latin typeface="Helvetica Neue"/>
               </a:rPr>
               <a:t>Use Case</a:t>
             </a:r>
@@ -9536,7 +9710,7 @@
       </p:sp>
       <p:sp>
         <p:nvSpPr>
-          <p:cNvPr id="19" name="TextBox 18"/>
+          <p:cNvPr id="20" name="TextBox 19"/>
           <p:cNvSpPr txBox="1"/>
           <p:nvPr/>
         </p:nvSpPr>
@@ -9566,7 +9740,7 @@
                 <a:solidFill>
                   <a:srgbClr val="555266"/>
                 </a:solidFill>
-                <a:latin typeface="Arial"/>
+                <a:latin typeface="Helvetica Neue"/>
               </a:rPr>
               <a:t>One fully-configured, live RL use case optimised 1:1 across your audience. Additional cases are land-and-expand (~$300K each).</a:t>
             </a:r>
@@ -9575,7 +9749,7 @@
       </p:sp>
       <p:sp>
         <p:nvSpPr>
-          <p:cNvPr id="20" name="Rounded Rectangle 19"/>
+          <p:cNvPr id="21" name="Rounded Rectangle 20"/>
           <p:cNvSpPr/>
           <p:nvPr/>
         </p:nvSpPr>
@@ -9586,7 +9760,7 @@
           </a:xfrm>
           <a:prstGeom prst="roundRect">
             <a:avLst>
-              <a:gd name="adj" fmla="val 4500"/>
+              <a:gd name="adj" fmla="val 5000"/>
             </a:avLst>
           </a:prstGeom>
           <a:solidFill>
@@ -9623,7 +9797,7 @@
       </p:sp>
       <p:sp>
         <p:nvSpPr>
-          <p:cNvPr id="21" name="Rectangle 20"/>
+          <p:cNvPr id="22" name="Rectangle 21"/>
           <p:cNvSpPr/>
           <p:nvPr/>
         </p:nvSpPr>
@@ -9667,7 +9841,7 @@
       </p:sp>
       <p:sp>
         <p:nvSpPr>
-          <p:cNvPr id="22" name="Oval 21"/>
+          <p:cNvPr id="23" name="Oval 22"/>
           <p:cNvSpPr/>
           <p:nvPr/>
         </p:nvSpPr>
@@ -9713,7 +9887,7 @@
       </p:sp>
       <p:sp>
         <p:nvSpPr>
-          <p:cNvPr id="23" name="TextBox 22"/>
+          <p:cNvPr id="24" name="TextBox 23"/>
           <p:cNvSpPr txBox="1"/>
           <p:nvPr/>
         </p:nvSpPr>
@@ -9739,7 +9913,7 @@
                 <a:solidFill>
                   <a:srgbClr val="801ED7"/>
                 </a:solidFill>
-                <a:latin typeface="Arial"/>
+                <a:latin typeface="Helvetica Neue"/>
               </a:rPr>
               <a:t>3</a:t>
             </a:r>
@@ -9748,7 +9922,7 @@
       </p:sp>
       <p:sp>
         <p:nvSpPr>
-          <p:cNvPr id="24" name="TextBox 23"/>
+          <p:cNvPr id="25" name="TextBox 24"/>
           <p:cNvSpPr txBox="1"/>
           <p:nvPr/>
         </p:nvSpPr>
@@ -9774,11 +9948,11 @@
               </a:lnSpc>
             </a:pPr>
             <a:r>
-              <a:rPr sz="1162" b="1" i="0">
+              <a:rPr sz="1125" b="1" i="0">
                 <a:solidFill>
                   <a:srgbClr val="801ED7"/>
                 </a:solidFill>
-                <a:latin typeface="Arial"/>
+                <a:latin typeface="Helvetica Neue"/>
               </a:rPr>
               <a:t>Audience Entitlement</a:t>
             </a:r>
@@ -9787,7 +9961,7 @@
       </p:sp>
       <p:sp>
         <p:nvSpPr>
-          <p:cNvPr id="25" name="TextBox 24"/>
+          <p:cNvPr id="26" name="TextBox 25"/>
           <p:cNvSpPr txBox="1"/>
           <p:nvPr/>
         </p:nvSpPr>
@@ -9817,7 +9991,7 @@
                 <a:solidFill>
                   <a:srgbClr val="555266"/>
                 </a:solidFill>
-                <a:latin typeface="Arial"/>
+                <a:latin typeface="Helvetica Neue"/>
               </a:rPr>
               <a:t>Annual entitlement on a monthly-average audience; flexes month to month and is revisited at renewal — not metered with immediate overages.</a:t>
             </a:r>
@@ -9826,7 +10000,7 @@
       </p:sp>
       <p:sp>
         <p:nvSpPr>
-          <p:cNvPr id="26" name="Rounded Rectangle 25"/>
+          <p:cNvPr id="27" name="Rounded Rectangle 26"/>
           <p:cNvSpPr/>
           <p:nvPr/>
         </p:nvSpPr>
@@ -9843,7 +10017,7 @@
           <a:solidFill>
             <a:srgbClr val="EFEDFF"/>
           </a:solidFill>
-          <a:ln w="9525">
+          <a:ln w="11906">
             <a:solidFill>
               <a:srgbClr val="E3DFF5"/>
             </a:solidFill>
@@ -9874,7 +10048,7 @@
       </p:sp>
       <p:sp>
         <p:nvSpPr>
-          <p:cNvPr id="27" name="Rectangle 26"/>
+          <p:cNvPr id="28" name="Rectangle 27"/>
           <p:cNvSpPr/>
           <p:nvPr/>
         </p:nvSpPr>
@@ -9918,7 +10092,7 @@
       </p:sp>
       <p:sp>
         <p:nvSpPr>
-          <p:cNvPr id="28" name="TextBox 27"/>
+          <p:cNvPr id="29" name="TextBox 28"/>
           <p:cNvSpPr txBox="1"/>
           <p:nvPr/>
         </p:nvSpPr>
@@ -9948,7 +10122,7 @@
                 <a:solidFill>
                   <a:srgbClr val="801ED7"/>
                 </a:solidFill>
-                <a:latin typeface="Arial"/>
+                <a:latin typeface="Helvetica Neue"/>
               </a:rPr>
               <a:t>Commercial anchor:  </a:t>
             </a:r>
@@ -9957,7 +10131,7 @@
                 <a:solidFill>
                   <a:srgbClr val="1A1A24"/>
                 </a:solidFill>
-                <a:latin typeface="Arial"/>
+                <a:latin typeface="Helvetica Neue"/>
               </a:rPr>
               <a:t>a single, indivisible all-in fee per use case. BLC's 4.2M MAU sits at the 4M-MAU tier ($134K). Additional use cases are land-and-expand ~$300K each; audience entitlement is shared.</a:t>
             </a:r>
@@ -9984,14 +10158,117 @@
       <p:grpSpPr/>
       <p:sp>
         <p:nvSpPr>
-          <p:cNvPr id="2" name="TextBox 1"/>
+          <p:cNvPr id="2" name="Rectangle 1"/>
+          <p:cNvSpPr/>
+          <p:nvPr/>
+        </p:nvSpPr>
+        <p:spPr>
+          <a:xfrm>
+            <a:off x="0" y="0"/>
+            <a:ext cx="9143771" cy="5143500"/>
+          </a:xfrm>
+          <a:prstGeom prst="rect">
+            <a:avLst/>
+          </a:prstGeom>
+          <a:solidFill>
+            <a:srgbClr val="FFFFFF"/>
+          </a:solidFill>
+          <a:ln>
+            <a:noFill/>
+          </a:ln>
+          <a:effectLst/>
+        </p:spPr>
+        <p:style>
+          <a:lnRef idx="1">
+            <a:schemeClr val="accent1"/>
+          </a:lnRef>
+          <a:fillRef idx="3">
+            <a:schemeClr val="accent1"/>
+          </a:fillRef>
+          <a:effectRef idx="2">
+            <a:schemeClr val="accent1"/>
+          </a:effectRef>
+          <a:fontRef idx="minor">
+            <a:schemeClr val="lt1"/>
+          </a:fontRef>
+        </p:style>
+        <p:txBody>
+          <a:bodyPr rtlCol="0" anchor="ctr"/>
+          <a:lstStyle/>
+          <a:p>
+            <a:pPr algn="ctr"/>
+          </a:p>
+        </p:txBody>
+      </p:sp>
+      <p:pic>
+        <p:nvPicPr>
+          <p:cNvPr id="3" name="Picture 2" descr="brazeai_logo.png"/>
+          <p:cNvPicPr>
+            <a:picLocks noChangeAspect="1"/>
+          </p:cNvPicPr>
+          <p:nvPr/>
+        </p:nvPicPr>
+        <p:blipFill>
+          <a:blip r:embed="rId2"/>
+          <a:stretch>
+            <a:fillRect/>
+          </a:stretch>
+        </p:blipFill>
+        <p:spPr>
+          <a:xfrm>
+            <a:off x="8090607" y="233172"/>
+            <a:ext cx="641684" cy="274320"/>
+          </a:xfrm>
+          <a:prstGeom prst="rect">
+            <a:avLst/>
+          </a:prstGeom>
+        </p:spPr>
+      </p:pic>
+      <p:sp>
+        <p:nvSpPr>
+          <p:cNvPr id="4" name="TextBox 3"/>
           <p:cNvSpPr txBox="1"/>
           <p:nvPr/>
         </p:nvSpPr>
         <p:spPr>
           <a:xfrm>
+            <a:off x="8183651" y="4855464"/>
+            <a:ext cx="548640" cy="205739"/>
+          </a:xfrm>
+          <a:prstGeom prst="rect">
+            <a:avLst/>
+          </a:prstGeom>
+          <a:noFill/>
+        </p:spPr>
+        <p:txBody>
+          <a:bodyPr wrap="square" lIns="0" rIns="0" tIns="0" bIns="0">
+            <a:spAutoFit/>
+          </a:bodyPr>
+          <a:lstStyle/>
+          <a:p>
+            <a:pPr algn="r"/>
+            <a:r>
+              <a:rPr sz="675" b="0" i="0">
+                <a:solidFill>
+                  <a:srgbClr val="8A8699"/>
+                </a:solidFill>
+                <a:latin typeface="Helvetica Neue"/>
+              </a:rPr>
+              <a:t>5</a:t>
+            </a:r>
+          </a:p>
+        </p:txBody>
+      </p:sp>
+      <p:sp>
+        <p:nvSpPr>
+          <p:cNvPr id="5" name="TextBox 4"/>
+          <p:cNvSpPr txBox="1"/>
+          <p:nvPr/>
+        </p:nvSpPr>
+        <p:spPr>
+          <a:xfrm>
             <a:off x="411479" y="342900"/>
-            <a:ext cx="8183651" cy="480059"/>
+            <a:ext cx="8183651" cy="548640"/>
           </a:xfrm>
           <a:prstGeom prst="rect">
             <a:avLst/>
@@ -10014,7 +10291,7 @@
                 <a:solidFill>
                   <a:srgbClr val="801ED7"/>
                 </a:solidFill>
-                <a:latin typeface="Arial"/>
+                <a:latin typeface="Helvetica Neue"/>
               </a:rPr>
               <a:t>What your AI Expert Services team does</a:t>
             </a:r>
@@ -10023,7 +10300,7 @@
       </p:sp>
       <p:sp>
         <p:nvSpPr>
-          <p:cNvPr id="3" name="TextBox 2"/>
+          <p:cNvPr id="6" name="TextBox 5"/>
           <p:cNvSpPr txBox="1"/>
           <p:nvPr/>
         </p:nvSpPr>
@@ -10053,7 +10330,7 @@
                 <a:solidFill>
                   <a:srgbClr val="FFA524"/>
                 </a:solidFill>
-                <a:latin typeface="Arial"/>
+                <a:latin typeface="Helvetica Neue"/>
               </a:rPr>
               <a:t>Forward-deployed ML experts embedded alongside your team — required at launch AND for the entire life of the use case.</a:t>
             </a:r>
@@ -10062,7 +10339,7 @@
       </p:sp>
       <p:sp>
         <p:nvSpPr>
-          <p:cNvPr id="4" name="Rectangle 3"/>
+          <p:cNvPr id="7" name="Rectangle 6"/>
           <p:cNvSpPr/>
           <p:nvPr/>
         </p:nvSpPr>
@@ -10104,79 +10381,20 @@
           </a:p>
         </p:txBody>
       </p:sp>
-      <p:pic>
-        <p:nvPicPr>
-          <p:cNvPr id="5" name="Picture 4" descr="brazeai_logo.png"/>
-          <p:cNvPicPr>
-            <a:picLocks noChangeAspect="1"/>
-          </p:cNvPicPr>
-          <p:nvPr/>
-        </p:nvPicPr>
-        <p:blipFill>
-          <a:blip r:embed="rId2"/>
-          <a:stretch>
-            <a:fillRect/>
-          </a:stretch>
-        </p:blipFill>
-        <p:spPr>
-          <a:xfrm>
-            <a:off x="8090607" y="233172"/>
-            <a:ext cx="641684" cy="274320"/>
-          </a:xfrm>
-          <a:prstGeom prst="rect">
-            <a:avLst/>
-          </a:prstGeom>
-        </p:spPr>
-      </p:pic>
-      <p:sp>
-        <p:nvSpPr>
-          <p:cNvPr id="6" name="TextBox 5"/>
-          <p:cNvSpPr txBox="1"/>
-          <p:nvPr/>
-        </p:nvSpPr>
-        <p:spPr>
-          <a:xfrm>
-            <a:off x="8183651" y="4855464"/>
-            <a:ext cx="548640" cy="205739"/>
-          </a:xfrm>
-          <a:prstGeom prst="rect">
-            <a:avLst/>
-          </a:prstGeom>
-          <a:noFill/>
-        </p:spPr>
-        <p:txBody>
-          <a:bodyPr wrap="square" lIns="0" rIns="0" tIns="0" bIns="0">
-            <a:spAutoFit/>
-          </a:bodyPr>
-          <a:lstStyle/>
-          <a:p>
-            <a:pPr algn="r"/>
-            <a:r>
-              <a:rPr sz="675" b="0" i="0">
-                <a:solidFill>
-                  <a:srgbClr val="8A8699"/>
-                </a:solidFill>
-                <a:latin typeface="Arial"/>
-              </a:rPr>
-              <a:t>5</a:t>
-            </a:r>
-          </a:p>
-        </p:txBody>
-      </p:sp>
-      <p:sp>
-        <p:nvSpPr>
-          <p:cNvPr id="7" name="Rounded Rectangle 6"/>
+      <p:sp>
+        <p:nvSpPr>
+          <p:cNvPr id="8" name="Rounded Rectangle 7"/>
           <p:cNvSpPr/>
           <p:nvPr/>
         </p:nvSpPr>
         <p:spPr>
           <a:xfrm>
             <a:off x="411479" y="1316736"/>
-            <a:ext cx="4023245" cy="2297430"/>
+            <a:ext cx="4023245" cy="2160270"/>
           </a:xfrm>
           <a:prstGeom prst="roundRect">
             <a:avLst>
-              <a:gd name="adj" fmla="val 4000"/>
+              <a:gd name="adj" fmla="val 5000"/>
             </a:avLst>
           </a:prstGeom>
           <a:solidFill>
@@ -10213,14 +10431,14 @@
       </p:sp>
       <p:sp>
         <p:nvSpPr>
-          <p:cNvPr id="8" name="Rectangle 7"/>
+          <p:cNvPr id="9" name="Rectangle 8"/>
           <p:cNvSpPr/>
           <p:nvPr/>
         </p:nvSpPr>
         <p:spPr>
           <a:xfrm>
             <a:off x="411479" y="1316736"/>
-            <a:ext cx="68580" cy="2297430"/>
+            <a:ext cx="68580" cy="2160270"/>
           </a:xfrm>
           <a:prstGeom prst="rect">
             <a:avLst/>
@@ -10257,7 +10475,7 @@
       </p:sp>
       <p:sp>
         <p:nvSpPr>
-          <p:cNvPr id="9" name="TextBox 8"/>
+          <p:cNvPr id="10" name="TextBox 9"/>
           <p:cNvSpPr txBox="1"/>
           <p:nvPr/>
         </p:nvSpPr>
@@ -10283,7 +10501,7 @@
                 <a:solidFill>
                   <a:srgbClr val="801ED7"/>
                 </a:solidFill>
-                <a:latin typeface="Arial"/>
+                <a:latin typeface="Helvetica Neue"/>
               </a:rPr>
               <a:t>At launch</a:t>
             </a:r>
@@ -10292,14 +10510,14 @@
       </p:sp>
       <p:sp>
         <p:nvSpPr>
-          <p:cNvPr id="10" name="TextBox 9"/>
+          <p:cNvPr id="11" name="TextBox 10"/>
           <p:cNvSpPr txBox="1"/>
           <p:nvPr/>
         </p:nvSpPr>
         <p:spPr>
           <a:xfrm>
             <a:off x="630936" y="1851660"/>
-            <a:ext cx="3598049" cy="1611630"/>
+            <a:ext cx="3598049" cy="1474469"/>
           </a:xfrm>
           <a:prstGeom prst="rect">
             <a:avLst/>
@@ -10325,7 +10543,7 @@
                 <a:solidFill>
                   <a:srgbClr val="FFA524"/>
                 </a:solidFill>
-                <a:latin typeface="Arial"/>
+                <a:latin typeface="Helvetica Neue"/>
               </a:rPr>
               <a:t>•  </a:t>
             </a:r>
@@ -10334,7 +10552,7 @@
                 <a:solidFill>
                   <a:srgbClr val="555266"/>
                 </a:solidFill>
-                <a:latin typeface="Arial"/>
+                <a:latin typeface="Helvetica Neue"/>
               </a:rPr>
               <a:t>Design the use case: action bank, reward signal, exploration parameters</a:t>
             </a:r>
@@ -10353,7 +10571,7 @@
                 <a:solidFill>
                   <a:srgbClr val="FFA524"/>
                 </a:solidFill>
-                <a:latin typeface="Arial"/>
+                <a:latin typeface="Helvetica Neue"/>
               </a:rPr>
               <a:t>•  </a:t>
             </a:r>
@@ -10362,7 +10580,7 @@
                 <a:solidFill>
                   <a:srgbClr val="555266"/>
                 </a:solidFill>
-                <a:latin typeface="Arial"/>
+                <a:latin typeface="Helvetica Neue"/>
               </a:rPr>
               <a:t>Set up the holdout and integrate your data feeds</a:t>
             </a:r>
@@ -10381,7 +10599,7 @@
                 <a:solidFill>
                   <a:srgbClr val="FFA524"/>
                 </a:solidFill>
-                <a:latin typeface="Arial"/>
+                <a:latin typeface="Helvetica Neue"/>
               </a:rPr>
               <a:t>•  </a:t>
             </a:r>
@@ -10390,7 +10608,7 @@
                 <a:solidFill>
                   <a:srgbClr val="555266"/>
                 </a:solidFill>
-                <a:latin typeface="Arial"/>
+                <a:latin typeface="Helvetica Neue"/>
               </a:rPr>
               <a:t>Configure, train and tune the model; run pre-go-live testing</a:t>
             </a:r>
@@ -10409,7 +10627,7 @@
                 <a:solidFill>
                   <a:srgbClr val="FFA524"/>
                 </a:solidFill>
-                <a:latin typeface="Arial"/>
+                <a:latin typeface="Helvetica Neue"/>
               </a:rPr>
               <a:t>•  </a:t>
             </a:r>
@@ -10418,7 +10636,7 @@
                 <a:solidFill>
                   <a:srgbClr val="555266"/>
                 </a:solidFill>
-                <a:latin typeface="Arial"/>
+                <a:latin typeface="Helvetica Neue"/>
               </a:rPr>
               <a:t>Stand up live reporting and agree the success metric</a:t>
             </a:r>
@@ -10427,18 +10645,18 @@
       </p:sp>
       <p:sp>
         <p:nvSpPr>
-          <p:cNvPr id="11" name="Rounded Rectangle 10"/>
+          <p:cNvPr id="12" name="Rounded Rectangle 11"/>
           <p:cNvSpPr/>
           <p:nvPr/>
         </p:nvSpPr>
         <p:spPr>
           <a:xfrm>
             <a:off x="4709045" y="1316736"/>
-            <a:ext cx="4023245" cy="2297430"/>
+            <a:ext cx="4023245" cy="2160270"/>
           </a:xfrm>
           <a:prstGeom prst="roundRect">
             <a:avLst>
-              <a:gd name="adj" fmla="val 4000"/>
+              <a:gd name="adj" fmla="val 5000"/>
             </a:avLst>
           </a:prstGeom>
           <a:solidFill>
@@ -10475,14 +10693,14 @@
       </p:sp>
       <p:sp>
         <p:nvSpPr>
-          <p:cNvPr id="12" name="Rectangle 11"/>
+          <p:cNvPr id="13" name="Rectangle 12"/>
           <p:cNvSpPr/>
           <p:nvPr/>
         </p:nvSpPr>
         <p:spPr>
           <a:xfrm>
             <a:off x="4709045" y="1316736"/>
-            <a:ext cx="68580" cy="2297430"/>
+            <a:ext cx="68580" cy="2160270"/>
           </a:xfrm>
           <a:prstGeom prst="rect">
             <a:avLst/>
@@ -10519,7 +10737,7 @@
       </p:sp>
       <p:sp>
         <p:nvSpPr>
-          <p:cNvPr id="13" name="TextBox 12"/>
+          <p:cNvPr id="14" name="TextBox 13"/>
           <p:cNvSpPr txBox="1"/>
           <p:nvPr/>
         </p:nvSpPr>
@@ -10545,7 +10763,7 @@
                 <a:solidFill>
                   <a:srgbClr val="801ED7"/>
                 </a:solidFill>
-                <a:latin typeface="Arial"/>
+                <a:latin typeface="Helvetica Neue"/>
               </a:rPr>
               <a:t>Ongoing</a:t>
             </a:r>
@@ -10554,14 +10772,14 @@
       </p:sp>
       <p:sp>
         <p:nvSpPr>
-          <p:cNvPr id="14" name="TextBox 13"/>
+          <p:cNvPr id="15" name="TextBox 14"/>
           <p:cNvSpPr txBox="1"/>
           <p:nvPr/>
         </p:nvSpPr>
         <p:spPr>
           <a:xfrm>
             <a:off x="4928501" y="1851660"/>
-            <a:ext cx="3598049" cy="1611630"/>
+            <a:ext cx="3598049" cy="1474469"/>
           </a:xfrm>
           <a:prstGeom prst="rect">
             <a:avLst/>
@@ -10587,7 +10805,7 @@
                 <a:solidFill>
                   <a:srgbClr val="FFA524"/>
                 </a:solidFill>
-                <a:latin typeface="Arial"/>
+                <a:latin typeface="Helvetica Neue"/>
               </a:rPr>
               <a:t>•  </a:t>
             </a:r>
@@ -10596,7 +10814,7 @@
                 <a:solidFill>
                   <a:srgbClr val="555266"/>
                 </a:solidFill>
-                <a:latin typeface="Arial"/>
+                <a:latin typeface="Helvetica Neue"/>
               </a:rPr>
               <a:t>Continuously tune the model as behaviour and seasonality shift</a:t>
             </a:r>
@@ -10615,7 +10833,7 @@
                 <a:solidFill>
                   <a:srgbClr val="FFA524"/>
                 </a:solidFill>
-                <a:latin typeface="Arial"/>
+                <a:latin typeface="Helvetica Neue"/>
               </a:rPr>
               <a:t>•  </a:t>
             </a:r>
@@ -10624,7 +10842,7 @@
                 <a:solidFill>
                   <a:srgbClr val="555266"/>
                 </a:solidFill>
-                <a:latin typeface="Arial"/>
+                <a:latin typeface="Helvetica Neue"/>
               </a:rPr>
               <a:t>Monitor controls and dimensions; troubleshoot and course-correct</a:t>
             </a:r>
@@ -10643,7 +10861,7 @@
                 <a:solidFill>
                   <a:srgbClr val="FFA524"/>
                 </a:solidFill>
-                <a:latin typeface="Arial"/>
+                <a:latin typeface="Helvetica Neue"/>
               </a:rPr>
               <a:t>•  </a:t>
             </a:r>
@@ -10652,7 +10870,7 @@
                 <a:solidFill>
                   <a:srgbClr val="555266"/>
                 </a:solidFill>
-                <a:latin typeface="Arial"/>
+                <a:latin typeface="Helvetica Neue"/>
               </a:rPr>
               <a:t>Add and test new dimensions, actions and creative to unlock fresh value</a:t>
             </a:r>
@@ -10671,7 +10889,7 @@
                 <a:solidFill>
                   <a:srgbClr val="FFA524"/>
                 </a:solidFill>
-                <a:latin typeface="Arial"/>
+                <a:latin typeface="Helvetica Neue"/>
               </a:rPr>
               <a:t>•  </a:t>
             </a:r>
@@ -10680,7 +10898,7 @@
                 <a:solidFill>
                   <a:srgbClr val="555266"/>
                 </a:solidFill>
-                <a:latin typeface="Arial"/>
+                <a:latin typeface="Helvetica Neue"/>
               </a:rPr>
               <a:t>Quarterly reviews and expansion: value keeps compounding years in, not just at go-live</a:t>
             </a:r>
@@ -10689,13 +10907,13 @@
       </p:sp>
       <p:sp>
         <p:nvSpPr>
-          <p:cNvPr id="15" name="TextBox 14"/>
+          <p:cNvPr id="16" name="TextBox 15"/>
           <p:cNvSpPr txBox="1"/>
           <p:nvPr/>
         </p:nvSpPr>
         <p:spPr>
           <a:xfrm>
-            <a:off x="411479" y="3751326"/>
+            <a:off x="411479" y="3614166"/>
             <a:ext cx="8320811" cy="342900"/>
           </a:xfrm>
           <a:prstGeom prst="rect">
@@ -10719,7 +10937,7 @@
                 <a:solidFill>
                   <a:srgbClr val="801ED7"/>
                 </a:solidFill>
-                <a:latin typeface="Arial"/>
+                <a:latin typeface="Helvetica Neue"/>
               </a:rPr>
               <a:t>One use case, one annual fee.  </a:t>
             </a:r>
@@ -10728,7 +10946,7 @@
                 <a:solidFill>
                   <a:srgbClr val="555266"/>
                 </a:solidFill>
-                <a:latin typeface="Arial"/>
+                <a:latin typeface="Helvetica Neue"/>
               </a:rPr>
               <a:t>AI Expert Services, the Use Case and Audience are three SKUs but a single, indivisible all-in price required at launch and ongoing.</a:t>
             </a:r>
@@ -10755,14 +10973,117 @@
       <p:grpSpPr/>
       <p:sp>
         <p:nvSpPr>
-          <p:cNvPr id="2" name="TextBox 1"/>
+          <p:cNvPr id="2" name="Rectangle 1"/>
+          <p:cNvSpPr/>
+          <p:nvPr/>
+        </p:nvSpPr>
+        <p:spPr>
+          <a:xfrm>
+            <a:off x="0" y="0"/>
+            <a:ext cx="9143771" cy="5143500"/>
+          </a:xfrm>
+          <a:prstGeom prst="rect">
+            <a:avLst/>
+          </a:prstGeom>
+          <a:solidFill>
+            <a:srgbClr val="FFFFFF"/>
+          </a:solidFill>
+          <a:ln>
+            <a:noFill/>
+          </a:ln>
+          <a:effectLst/>
+        </p:spPr>
+        <p:style>
+          <a:lnRef idx="1">
+            <a:schemeClr val="accent1"/>
+          </a:lnRef>
+          <a:fillRef idx="3">
+            <a:schemeClr val="accent1"/>
+          </a:fillRef>
+          <a:effectRef idx="2">
+            <a:schemeClr val="accent1"/>
+          </a:effectRef>
+          <a:fontRef idx="minor">
+            <a:schemeClr val="lt1"/>
+          </a:fontRef>
+        </p:style>
+        <p:txBody>
+          <a:bodyPr rtlCol="0" anchor="ctr"/>
+          <a:lstStyle/>
+          <a:p>
+            <a:pPr algn="ctr"/>
+          </a:p>
+        </p:txBody>
+      </p:sp>
+      <p:pic>
+        <p:nvPicPr>
+          <p:cNvPr id="3" name="Picture 2" descr="brazeai_logo.png"/>
+          <p:cNvPicPr>
+            <a:picLocks noChangeAspect="1"/>
+          </p:cNvPicPr>
+          <p:nvPr/>
+        </p:nvPicPr>
+        <p:blipFill>
+          <a:blip r:embed="rId2"/>
+          <a:stretch>
+            <a:fillRect/>
+          </a:stretch>
+        </p:blipFill>
+        <p:spPr>
+          <a:xfrm>
+            <a:off x="8090607" y="233172"/>
+            <a:ext cx="641684" cy="274320"/>
+          </a:xfrm>
+          <a:prstGeom prst="rect">
+            <a:avLst/>
+          </a:prstGeom>
+        </p:spPr>
+      </p:pic>
+      <p:sp>
+        <p:nvSpPr>
+          <p:cNvPr id="4" name="TextBox 3"/>
           <p:cNvSpPr txBox="1"/>
           <p:nvPr/>
         </p:nvSpPr>
         <p:spPr>
           <a:xfrm>
+            <a:off x="8183651" y="4855464"/>
+            <a:ext cx="548640" cy="205739"/>
+          </a:xfrm>
+          <a:prstGeom prst="rect">
+            <a:avLst/>
+          </a:prstGeom>
+          <a:noFill/>
+        </p:spPr>
+        <p:txBody>
+          <a:bodyPr wrap="square" lIns="0" rIns="0" tIns="0" bIns="0">
+            <a:spAutoFit/>
+          </a:bodyPr>
+          <a:lstStyle/>
+          <a:p>
+            <a:pPr algn="r"/>
+            <a:r>
+              <a:rPr sz="675" b="0" i="0">
+                <a:solidFill>
+                  <a:srgbClr val="8A8699"/>
+                </a:solidFill>
+                <a:latin typeface="Helvetica Neue"/>
+              </a:rPr>
+              <a:t>6</a:t>
+            </a:r>
+          </a:p>
+        </p:txBody>
+      </p:sp>
+      <p:sp>
+        <p:nvSpPr>
+          <p:cNvPr id="5" name="TextBox 4"/>
+          <p:cNvSpPr txBox="1"/>
+          <p:nvPr/>
+        </p:nvSpPr>
+        <p:spPr>
+          <a:xfrm>
             <a:off x="411479" y="342900"/>
-            <a:ext cx="8183651" cy="480059"/>
+            <a:ext cx="8183651" cy="548640"/>
           </a:xfrm>
           <a:prstGeom prst="rect">
             <a:avLst/>
@@ -10785,7 +11106,7 @@
                 <a:solidFill>
                   <a:srgbClr val="801ED7"/>
                 </a:solidFill>
-                <a:latin typeface="Arial"/>
+                <a:latin typeface="Helvetica Neue"/>
               </a:rPr>
               <a:t>How your audience is measured &amp; billed</a:t>
             </a:r>
@@ -10794,7 +11115,7 @@
       </p:sp>
       <p:sp>
         <p:nvSpPr>
-          <p:cNvPr id="3" name="TextBox 2"/>
+          <p:cNvPr id="6" name="TextBox 5"/>
           <p:cNvSpPr txBox="1"/>
           <p:nvPr/>
         </p:nvSpPr>
@@ -10824,7 +11145,7 @@
                 <a:solidFill>
                   <a:srgbClr val="FFA524"/>
                 </a:solidFill>
-                <a:latin typeface="Arial"/>
+                <a:latin typeface="Helvetica Neue"/>
               </a:rPr>
               <a:t>Annual entitlement, priced on a monthly average — designed to flex, not to penalise.</a:t>
             </a:r>
@@ -10833,7 +11154,7 @@
       </p:sp>
       <p:sp>
         <p:nvSpPr>
-          <p:cNvPr id="4" name="Rectangle 3"/>
+          <p:cNvPr id="7" name="Rectangle 6"/>
           <p:cNvSpPr/>
           <p:nvPr/>
         </p:nvSpPr>
@@ -10875,79 +11196,20 @@
           </a:p>
         </p:txBody>
       </p:sp>
-      <p:pic>
-        <p:nvPicPr>
-          <p:cNvPr id="5" name="Picture 4" descr="brazeai_logo.png"/>
-          <p:cNvPicPr>
-            <a:picLocks noChangeAspect="1"/>
-          </p:cNvPicPr>
-          <p:nvPr/>
-        </p:nvPicPr>
-        <p:blipFill>
-          <a:blip r:embed="rId2"/>
-          <a:stretch>
-            <a:fillRect/>
-          </a:stretch>
-        </p:blipFill>
-        <p:spPr>
-          <a:xfrm>
-            <a:off x="8090607" y="233172"/>
-            <a:ext cx="641684" cy="274320"/>
-          </a:xfrm>
-          <a:prstGeom prst="rect">
-            <a:avLst/>
-          </a:prstGeom>
-        </p:spPr>
-      </p:pic>
-      <p:sp>
-        <p:nvSpPr>
-          <p:cNvPr id="6" name="TextBox 5"/>
-          <p:cNvSpPr txBox="1"/>
-          <p:nvPr/>
-        </p:nvSpPr>
-        <p:spPr>
-          <a:xfrm>
-            <a:off x="8183651" y="4855464"/>
-            <a:ext cx="548640" cy="205739"/>
-          </a:xfrm>
-          <a:prstGeom prst="rect">
-            <a:avLst/>
-          </a:prstGeom>
-          <a:noFill/>
-        </p:spPr>
-        <p:txBody>
-          <a:bodyPr wrap="square" lIns="0" rIns="0" tIns="0" bIns="0">
-            <a:spAutoFit/>
-          </a:bodyPr>
-          <a:lstStyle/>
-          <a:p>
-            <a:pPr algn="r"/>
-            <a:r>
-              <a:rPr sz="675" b="0" i="0">
-                <a:solidFill>
-                  <a:srgbClr val="8A8699"/>
-                </a:solidFill>
-                <a:latin typeface="Arial"/>
-              </a:rPr>
-              <a:t>6</a:t>
-            </a:r>
-          </a:p>
-        </p:txBody>
-      </p:sp>
-      <p:sp>
-        <p:nvSpPr>
-          <p:cNvPr id="7" name="Rounded Rectangle 6"/>
+      <p:sp>
+        <p:nvSpPr>
+          <p:cNvPr id="8" name="Rounded Rectangle 7"/>
           <p:cNvSpPr/>
           <p:nvPr/>
         </p:nvSpPr>
         <p:spPr>
           <a:xfrm>
             <a:off x="411479" y="1316736"/>
-            <a:ext cx="4023245" cy="2297430"/>
+            <a:ext cx="4023245" cy="2160270"/>
           </a:xfrm>
           <a:prstGeom prst="roundRect">
             <a:avLst>
-              <a:gd name="adj" fmla="val 4000"/>
+              <a:gd name="adj" fmla="val 5000"/>
             </a:avLst>
           </a:prstGeom>
           <a:solidFill>
@@ -10984,14 +11246,14 @@
       </p:sp>
       <p:sp>
         <p:nvSpPr>
-          <p:cNvPr id="8" name="Rectangle 7"/>
+          <p:cNvPr id="9" name="Rectangle 8"/>
           <p:cNvSpPr/>
           <p:nvPr/>
         </p:nvSpPr>
         <p:spPr>
           <a:xfrm>
             <a:off x="411479" y="1316736"/>
-            <a:ext cx="68580" cy="2297430"/>
+            <a:ext cx="68580" cy="2160270"/>
           </a:xfrm>
           <a:prstGeom prst="rect">
             <a:avLst/>
@@ -11028,7 +11290,7 @@
       </p:sp>
       <p:sp>
         <p:nvSpPr>
-          <p:cNvPr id="9" name="TextBox 8"/>
+          <p:cNvPr id="10" name="TextBox 9"/>
           <p:cNvSpPr txBox="1"/>
           <p:nvPr/>
         </p:nvSpPr>
@@ -11054,7 +11316,7 @@
                 <a:solidFill>
                   <a:srgbClr val="801ED7"/>
                 </a:solidFill>
-                <a:latin typeface="Arial"/>
+                <a:latin typeface="Helvetica Neue"/>
               </a:rPr>
               <a:t>How it's measured</a:t>
             </a:r>
@@ -11063,14 +11325,14 @@
       </p:sp>
       <p:sp>
         <p:nvSpPr>
-          <p:cNvPr id="10" name="TextBox 9"/>
+          <p:cNvPr id="11" name="TextBox 10"/>
           <p:cNvSpPr txBox="1"/>
           <p:nvPr/>
         </p:nvSpPr>
         <p:spPr>
           <a:xfrm>
             <a:off x="630936" y="1851660"/>
-            <a:ext cx="3598049" cy="1611630"/>
+            <a:ext cx="3598049" cy="1474469"/>
           </a:xfrm>
           <a:prstGeom prst="rect">
             <a:avLst/>
@@ -11088,7 +11350,7 @@
                 <a:spcPct val="116000"/>
               </a:lnSpc>
               <a:spcAft>
-                <a:spcPts val="525"/>
+                <a:spcPts val="600"/>
               </a:spcAft>
             </a:pPr>
             <a:r>
@@ -11096,7 +11358,7 @@
                 <a:solidFill>
                   <a:srgbClr val="FFA524"/>
                 </a:solidFill>
-                <a:latin typeface="Arial"/>
+                <a:latin typeface="Helvetica Neue"/>
               </a:rPr>
               <a:t>•  </a:t>
             </a:r>
@@ -11105,7 +11367,7 @@
                 <a:solidFill>
                   <a:srgbClr val="555266"/>
                 </a:solidFill>
-                <a:latin typeface="Arial"/>
+                <a:latin typeface="Helvetica Neue"/>
               </a:rPr>
               <a:t>Measured daily — audience size tracked every day, per use case</a:t>
             </a:r>
@@ -11116,7 +11378,7 @@
                 <a:spcPct val="116000"/>
               </a:lnSpc>
               <a:spcAft>
-                <a:spcPts val="525"/>
+                <a:spcPts val="600"/>
               </a:spcAft>
             </a:pPr>
             <a:r>
@@ -11124,7 +11386,7 @@
                 <a:solidFill>
                   <a:srgbClr val="FFA524"/>
                 </a:solidFill>
-                <a:latin typeface="Arial"/>
+                <a:latin typeface="Helvetica Neue"/>
               </a:rPr>
               <a:t>•  </a:t>
             </a:r>
@@ -11133,7 +11395,7 @@
                 <a:solidFill>
                   <a:srgbClr val="555266"/>
                 </a:solidFill>
-                <a:latin typeface="Arial"/>
+                <a:latin typeface="Helvetica Neue"/>
               </a:rPr>
               <a:t>Calculated as a monthly average — averaged over the year to give the audience size</a:t>
             </a:r>
@@ -11144,7 +11406,7 @@
                 <a:spcPct val="116000"/>
               </a:lnSpc>
               <a:spcAft>
-                <a:spcPts val="525"/>
+                <a:spcPts val="600"/>
               </a:spcAft>
             </a:pPr>
             <a:r>
@@ -11152,7 +11414,7 @@
                 <a:solidFill>
                   <a:srgbClr val="FFA524"/>
                 </a:solidFill>
-                <a:latin typeface="Arial"/>
+                <a:latin typeface="Helvetica Neue"/>
               </a:rPr>
               <a:t>•  </a:t>
             </a:r>
@@ -11161,7 +11423,7 @@
                 <a:solidFill>
                   <a:srgbClr val="555266"/>
                 </a:solidFill>
-                <a:latin typeface="Arial"/>
+                <a:latin typeface="Helvetica Neue"/>
               </a:rPr>
               <a:t>Charged annually — that average monthly audience is charged once a year; runs over and under with seasonality</a:t>
             </a:r>
@@ -11170,18 +11432,18 @@
       </p:sp>
       <p:sp>
         <p:nvSpPr>
-          <p:cNvPr id="11" name="Rounded Rectangle 10"/>
+          <p:cNvPr id="12" name="Rounded Rectangle 11"/>
           <p:cNvSpPr/>
           <p:nvPr/>
         </p:nvSpPr>
         <p:spPr>
           <a:xfrm>
             <a:off x="4709045" y="1316736"/>
-            <a:ext cx="4023245" cy="2297430"/>
+            <a:ext cx="4023245" cy="2160270"/>
           </a:xfrm>
           <a:prstGeom prst="roundRect">
             <a:avLst>
-              <a:gd name="adj" fmla="val 4000"/>
+              <a:gd name="adj" fmla="val 5000"/>
             </a:avLst>
           </a:prstGeom>
           <a:solidFill>
@@ -11218,14 +11480,14 @@
       </p:sp>
       <p:sp>
         <p:nvSpPr>
-          <p:cNvPr id="12" name="Rectangle 11"/>
+          <p:cNvPr id="13" name="Rectangle 12"/>
           <p:cNvSpPr/>
           <p:nvPr/>
         </p:nvSpPr>
         <p:spPr>
           <a:xfrm>
             <a:off x="4709045" y="1316736"/>
-            <a:ext cx="68580" cy="2297430"/>
+            <a:ext cx="68580" cy="2160270"/>
           </a:xfrm>
           <a:prstGeom prst="rect">
             <a:avLst/>
@@ -11262,7 +11524,7 @@
       </p:sp>
       <p:sp>
         <p:nvSpPr>
-          <p:cNvPr id="13" name="TextBox 12"/>
+          <p:cNvPr id="14" name="TextBox 13"/>
           <p:cNvSpPr txBox="1"/>
           <p:nvPr/>
         </p:nvSpPr>
@@ -11288,7 +11550,7 @@
                 <a:solidFill>
                   <a:srgbClr val="801ED7"/>
                 </a:solidFill>
-                <a:latin typeface="Arial"/>
+                <a:latin typeface="Helvetica Neue"/>
               </a:rPr>
               <a:t>How it's billed</a:t>
             </a:r>
@@ -11297,14 +11559,14 @@
       </p:sp>
       <p:sp>
         <p:nvSpPr>
-          <p:cNvPr id="14" name="TextBox 13"/>
+          <p:cNvPr id="15" name="TextBox 14"/>
           <p:cNvSpPr txBox="1"/>
           <p:nvPr/>
         </p:nvSpPr>
         <p:spPr>
           <a:xfrm>
             <a:off x="4928501" y="1851660"/>
-            <a:ext cx="3598049" cy="1611630"/>
+            <a:ext cx="3598049" cy="1474469"/>
           </a:xfrm>
           <a:prstGeom prst="rect">
             <a:avLst/>
@@ -11322,7 +11584,7 @@
                 <a:spcPct val="116000"/>
               </a:lnSpc>
               <a:spcAft>
-                <a:spcPts val="525"/>
+                <a:spcPts val="600"/>
               </a:spcAft>
             </a:pPr>
             <a:r>
@@ -11330,7 +11592,7 @@
                 <a:solidFill>
                   <a:srgbClr val="FFA524"/>
                 </a:solidFill>
-                <a:latin typeface="Arial"/>
+                <a:latin typeface="Helvetica Neue"/>
               </a:rPr>
               <a:t>•  </a:t>
             </a:r>
@@ -11339,7 +11601,7 @@
                 <a:solidFill>
                   <a:srgbClr val="555266"/>
                 </a:solidFill>
-                <a:latin typeface="Arial"/>
+                <a:latin typeface="Helvetica Neue"/>
               </a:rPr>
               <a:t>Annual entitlement — invoiced annually, not a monthly charge</a:t>
             </a:r>
@@ -11350,7 +11612,7 @@
                 <a:spcPct val="116000"/>
               </a:lnSpc>
               <a:spcAft>
-                <a:spcPts val="525"/>
+                <a:spcPts val="600"/>
               </a:spcAft>
             </a:pPr>
             <a:r>
@@ -11358,7 +11620,7 @@
                 <a:solidFill>
                   <a:srgbClr val="FFA524"/>
                 </a:solidFill>
-                <a:latin typeface="Arial"/>
+                <a:latin typeface="Helvetica Neue"/>
               </a:rPr>
               <a:t>•  </a:t>
             </a:r>
@@ -11367,7 +11629,7 @@
                 <a:solidFill>
                   <a:srgbClr val="555266"/>
                 </a:solidFill>
-                <a:latin typeface="Arial"/>
+                <a:latin typeface="Helvetica Neue"/>
               </a:rPr>
               <a:t>Not like message credits — no immediate overage when a month runs high</a:t>
             </a:r>
@@ -11378,7 +11640,7 @@
                 <a:spcPct val="116000"/>
               </a:lnSpc>
               <a:spcAft>
-                <a:spcPts val="525"/>
+                <a:spcPts val="600"/>
               </a:spcAft>
             </a:pPr>
             <a:r>
@@ -11386,7 +11648,7 @@
                 <a:solidFill>
                   <a:srgbClr val="FFA524"/>
                 </a:solidFill>
-                <a:latin typeface="Arial"/>
+                <a:latin typeface="Helvetica Neue"/>
               </a:rPr>
               <a:t>•  </a:t>
             </a:r>
@@ -11395,7 +11657,7 @@
                 <a:solidFill>
                   <a:srgbClr val="555266"/>
                 </a:solidFill>
-                <a:latin typeface="Arial"/>
+                <a:latin typeface="Helvetica Neue"/>
               </a:rPr>
               <a:t>Right-sized at renewal — we review and reset the tier together</a:t>
             </a:r>
@@ -11406,7 +11668,7 @@
                 <a:spcPct val="116000"/>
               </a:lnSpc>
               <a:spcAft>
-                <a:spcPts val="525"/>
+                <a:spcPts val="600"/>
               </a:spcAft>
             </a:pPr>
             <a:r>
@@ -11414,7 +11676,7 @@
                 <a:solidFill>
                   <a:srgbClr val="FFA524"/>
                 </a:solidFill>
-                <a:latin typeface="Arial"/>
+                <a:latin typeface="Helvetica Neue"/>
               </a:rPr>
               <a:t>•  </a:t>
             </a:r>
@@ -11423,7 +11685,7 @@
                 <a:solidFill>
                   <a:srgbClr val="555266"/>
                 </a:solidFill>
-                <a:latin typeface="Arial"/>
+                <a:latin typeface="Helvetica Neue"/>
               </a:rPr>
               <a:t>Standard policy — overages (1.25× rate) only if you run materially above, over time</a:t>
             </a:r>
@@ -11432,13 +11694,13 @@
       </p:sp>
       <p:sp>
         <p:nvSpPr>
-          <p:cNvPr id="15" name="TextBox 14"/>
+          <p:cNvPr id="16" name="TextBox 15"/>
           <p:cNvSpPr txBox="1"/>
           <p:nvPr/>
         </p:nvSpPr>
         <p:spPr>
           <a:xfrm>
-            <a:off x="411479" y="3751326"/>
+            <a:off x="411479" y="3614166"/>
             <a:ext cx="8320811" cy="342900"/>
           </a:xfrm>
           <a:prstGeom prst="rect">
@@ -11462,7 +11724,7 @@
                 <a:solidFill>
                   <a:srgbClr val="801ED7"/>
                 </a:solidFill>
-                <a:latin typeface="Arial"/>
+                <a:latin typeface="Helvetica Neue"/>
               </a:rPr>
               <a:t>Built-in headroom:  </a:t>
             </a:r>
@@ -11471,7 +11733,7 @@
                 <a:solidFill>
                   <a:srgbClr val="555266"/>
                 </a:solidFill>
-                <a:latin typeface="Arial"/>
+                <a:latin typeface="Helvetica Neue"/>
               </a:rPr>
               <a:t>your 4M tier sits at the audience level of BLC's 4.2M MAU base — comfortable for normal seasonality.</a:t>
             </a:r>
@@ -11498,14 +11760,82 @@
       <p:grpSpPr/>
       <p:sp>
         <p:nvSpPr>
-          <p:cNvPr id="2" name="TextBox 1"/>
+          <p:cNvPr id="2" name="Rectangle 1"/>
+          <p:cNvSpPr/>
+          <p:nvPr/>
+        </p:nvSpPr>
+        <p:spPr>
+          <a:xfrm>
+            <a:off x="0" y="0"/>
+            <a:ext cx="9143771" cy="5143500"/>
+          </a:xfrm>
+          <a:prstGeom prst="rect">
+            <a:avLst/>
+          </a:prstGeom>
+          <a:solidFill>
+            <a:srgbClr val="FFFFFF"/>
+          </a:solidFill>
+          <a:ln>
+            <a:noFill/>
+          </a:ln>
+          <a:effectLst/>
+        </p:spPr>
+        <p:style>
+          <a:lnRef idx="1">
+            <a:schemeClr val="accent1"/>
+          </a:lnRef>
+          <a:fillRef idx="3">
+            <a:schemeClr val="accent1"/>
+          </a:fillRef>
+          <a:effectRef idx="2">
+            <a:schemeClr val="accent1"/>
+          </a:effectRef>
+          <a:fontRef idx="minor">
+            <a:schemeClr val="lt1"/>
+          </a:fontRef>
+        </p:style>
+        <p:txBody>
+          <a:bodyPr rtlCol="0" anchor="ctr"/>
+          <a:lstStyle/>
+          <a:p>
+            <a:pPr algn="ctr"/>
+          </a:p>
+        </p:txBody>
+      </p:sp>
+      <p:pic>
+        <p:nvPicPr>
+          <p:cNvPr id="3" name="Picture 2" descr="brazeai_logo.png"/>
+          <p:cNvPicPr>
+            <a:picLocks noChangeAspect="1"/>
+          </p:cNvPicPr>
+          <p:nvPr/>
+        </p:nvPicPr>
+        <p:blipFill>
+          <a:blip r:embed="rId2"/>
+          <a:stretch>
+            <a:fillRect/>
+          </a:stretch>
+        </p:blipFill>
+        <p:spPr>
+          <a:xfrm>
+            <a:off x="8090607" y="233172"/>
+            <a:ext cx="641684" cy="274320"/>
+          </a:xfrm>
+          <a:prstGeom prst="rect">
+            <a:avLst/>
+          </a:prstGeom>
+        </p:spPr>
+      </p:pic>
+      <p:sp>
+        <p:nvSpPr>
+          <p:cNvPr id="4" name="TextBox 3"/>
           <p:cNvSpPr txBox="1"/>
           <p:nvPr/>
         </p:nvSpPr>
         <p:spPr>
           <a:xfrm>
-            <a:off x="411479" y="342900"/>
-            <a:ext cx="6674891" cy="205739"/>
+            <a:off x="8183651" y="4855464"/>
+            <a:ext cx="548640" cy="205739"/>
           </a:xfrm>
           <a:prstGeom prst="rect">
             <a:avLst/>
@@ -11518,13 +11848,48 @@
           </a:bodyPr>
           <a:lstStyle/>
           <a:p>
+            <a:pPr algn="r"/>
+            <a:r>
+              <a:rPr sz="675" b="0" i="0">
+                <a:solidFill>
+                  <a:srgbClr val="8A8699"/>
+                </a:solidFill>
+                <a:latin typeface="Helvetica Neue"/>
+              </a:rPr>
+              <a:t>7</a:t>
+            </a:r>
+          </a:p>
+        </p:txBody>
+      </p:sp>
+      <p:sp>
+        <p:nvSpPr>
+          <p:cNvPr id="5" name="TextBox 4"/>
+          <p:cNvSpPr txBox="1"/>
+          <p:nvPr/>
+        </p:nvSpPr>
+        <p:spPr>
+          <a:xfrm>
+            <a:off x="411479" y="342900"/>
+            <a:ext cx="6674891" cy="205739"/>
+          </a:xfrm>
+          <a:prstGeom prst="rect">
+            <a:avLst/>
+          </a:prstGeom>
+          <a:noFill/>
+        </p:spPr>
+        <p:txBody>
+          <a:bodyPr wrap="square" lIns="0" rIns="0" tIns="0" bIns="0">
+            <a:spAutoFit/>
+          </a:bodyPr>
+          <a:lstStyle/>
+          <a:p>
             <a:pPr algn="l"/>
             <a:r>
               <a:rPr sz="825" b="1" i="0" spc="200">
                 <a:solidFill>
                   <a:srgbClr val="FFA524"/>
                 </a:solidFill>
-                <a:latin typeface="Arial"/>
+                <a:latin typeface="Helvetica Neue"/>
               </a:rPr>
               <a:t>ENGAGEMENT</a:t>
             </a:r>
@@ -11533,14 +11898,14 @@
       </p:sp>
       <p:sp>
         <p:nvSpPr>
-          <p:cNvPr id="3" name="TextBox 2"/>
+          <p:cNvPr id="6" name="TextBox 5"/>
           <p:cNvSpPr txBox="1"/>
           <p:nvPr/>
         </p:nvSpPr>
         <p:spPr>
           <a:xfrm>
             <a:off x="411479" y="576072"/>
-            <a:ext cx="8183651" cy="480059"/>
+            <a:ext cx="8183651" cy="548640"/>
           </a:xfrm>
           <a:prstGeom prst="rect">
             <a:avLst/>
@@ -11563,7 +11928,7 @@
                 <a:solidFill>
                   <a:srgbClr val="801ED7"/>
                 </a:solidFill>
-                <a:latin typeface="Arial"/>
+                <a:latin typeface="Helvetica Neue"/>
               </a:rPr>
               <a:t>Engagement — path to ROI, month by month</a:t>
             </a:r>
@@ -11572,7 +11937,7 @@
       </p:sp>
       <p:sp>
         <p:nvSpPr>
-          <p:cNvPr id="4" name="TextBox 3"/>
+          <p:cNvPr id="7" name="TextBox 6"/>
           <p:cNvSpPr txBox="1"/>
           <p:nvPr/>
         </p:nvSpPr>
@@ -11602,7 +11967,7 @@
                 <a:solidFill>
                   <a:srgbClr val="FFA524"/>
                 </a:solidFill>
-                <a:latin typeface="Arial"/>
+                <a:latin typeface="Helvetica Neue"/>
               </a:rPr>
               <a:t>Cumulative incremental value clears break-even by May 2027, inside Year 1</a:t>
             </a:r>
@@ -11611,7 +11976,7 @@
       </p:sp>
       <p:sp>
         <p:nvSpPr>
-          <p:cNvPr id="5" name="Rectangle 4"/>
+          <p:cNvPr id="8" name="Rectangle 7"/>
           <p:cNvSpPr/>
           <p:nvPr/>
         </p:nvSpPr>
@@ -11653,74 +12018,15 @@
           </a:p>
         </p:txBody>
       </p:sp>
-      <p:pic>
-        <p:nvPicPr>
-          <p:cNvPr id="6" name="Picture 5" descr="brazeai_logo.png"/>
-          <p:cNvPicPr>
-            <a:picLocks noChangeAspect="1"/>
-          </p:cNvPicPr>
-          <p:nvPr/>
-        </p:nvPicPr>
-        <p:blipFill>
-          <a:blip r:embed="rId2"/>
-          <a:stretch>
-            <a:fillRect/>
-          </a:stretch>
-        </p:blipFill>
-        <p:spPr>
-          <a:xfrm>
-            <a:off x="8090607" y="233172"/>
-            <a:ext cx="641684" cy="274320"/>
-          </a:xfrm>
-          <a:prstGeom prst="rect">
-            <a:avLst/>
-          </a:prstGeom>
-        </p:spPr>
-      </p:pic>
-      <p:sp>
-        <p:nvSpPr>
-          <p:cNvPr id="7" name="TextBox 6"/>
-          <p:cNvSpPr txBox="1"/>
-          <p:nvPr/>
-        </p:nvSpPr>
-        <p:spPr>
-          <a:xfrm>
-            <a:off x="8183651" y="4855464"/>
-            <a:ext cx="548640" cy="205739"/>
-          </a:xfrm>
-          <a:prstGeom prst="rect">
-            <a:avLst/>
-          </a:prstGeom>
-          <a:noFill/>
-        </p:spPr>
-        <p:txBody>
-          <a:bodyPr wrap="square" lIns="0" rIns="0" tIns="0" bIns="0">
-            <a:spAutoFit/>
-          </a:bodyPr>
-          <a:lstStyle/>
-          <a:p>
-            <a:pPr algn="r"/>
-            <a:r>
-              <a:rPr sz="675" b="0" i="0">
-                <a:solidFill>
-                  <a:srgbClr val="8A8699"/>
-                </a:solidFill>
-                <a:latin typeface="Arial"/>
-              </a:rPr>
-              <a:t>7</a:t>
-            </a:r>
-          </a:p>
-        </p:txBody>
-      </p:sp>
-      <p:sp>
-        <p:nvSpPr>
-          <p:cNvPr id="8" name="Rectangle 7"/>
+      <p:sp>
+        <p:nvSpPr>
+          <p:cNvPr id="9" name="Rectangle 8"/>
           <p:cNvSpPr/>
           <p:nvPr/>
         </p:nvSpPr>
         <p:spPr>
           <a:xfrm>
-            <a:off x="445770" y="2987654"/>
+            <a:off x="445770" y="2962213"/>
             <a:ext cx="8252231" cy="12344"/>
           </a:xfrm>
           <a:prstGeom prst="rect">
@@ -11758,13 +12064,13 @@
       </p:sp>
       <p:sp>
         <p:nvSpPr>
-          <p:cNvPr id="9" name="TextBox 8"/>
+          <p:cNvPr id="10" name="TextBox 9"/>
           <p:cNvSpPr txBox="1"/>
           <p:nvPr/>
         </p:nvSpPr>
         <p:spPr>
           <a:xfrm>
-            <a:off x="445770" y="2781914"/>
+            <a:off x="445770" y="2756473"/>
             <a:ext cx="2743200" cy="171450"/>
           </a:xfrm>
           <a:prstGeom prst="rect">
@@ -11784,7 +12090,7 @@
                 <a:solidFill>
                   <a:srgbClr val="FFA524"/>
                 </a:solidFill>
-                <a:latin typeface="Arial"/>
+                <a:latin typeface="Helvetica Neue"/>
               </a:rPr>
               <a:t>Break-even · $264k subscription</a:t>
             </a:r>
@@ -11793,13 +12099,13 @@
       </p:sp>
       <p:sp>
         <p:nvSpPr>
-          <p:cNvPr id="10" name="Rectangle 9"/>
+          <p:cNvPr id="11" name="Rectangle 10"/>
           <p:cNvSpPr/>
           <p:nvPr/>
         </p:nvSpPr>
         <p:spPr>
           <a:xfrm>
-            <a:off x="610814" y="3374136"/>
+            <a:off x="610814" y="3339846"/>
             <a:ext cx="357596" cy="20574"/>
           </a:xfrm>
           <a:prstGeom prst="rect">
@@ -11837,13 +12143,13 @@
       </p:sp>
       <p:sp>
         <p:nvSpPr>
-          <p:cNvPr id="11" name="TextBox 10"/>
+          <p:cNvPr id="12" name="TextBox 11"/>
           <p:cNvSpPr txBox="1"/>
           <p:nvPr/>
         </p:nvSpPr>
         <p:spPr>
           <a:xfrm>
-            <a:off x="473654" y="3429000"/>
+            <a:off x="473654" y="3394710"/>
             <a:ext cx="631916" cy="288036"/>
           </a:xfrm>
           <a:prstGeom prst="rect">
@@ -11863,7 +12169,7 @@
                 <a:solidFill>
                   <a:srgbClr val="1A1A24"/>
                 </a:solidFill>
-                <a:latin typeface="Arial"/>
+                <a:latin typeface="Helvetica Neue"/>
               </a:rPr>
               <a:t>Nov</a:t>
             </a:r>
@@ -11879,7 +12185,7 @@
                 <a:solidFill>
                   <a:srgbClr val="8A8699"/>
                 </a:solidFill>
-                <a:latin typeface="Arial"/>
+                <a:latin typeface="Helvetica Neue"/>
               </a:rPr>
               <a:t>M1</a:t>
             </a:r>
@@ -11888,13 +12194,13 @@
       </p:sp>
       <p:sp>
         <p:nvSpPr>
-          <p:cNvPr id="12" name="Rectangle 11"/>
+          <p:cNvPr id="13" name="Rectangle 12"/>
           <p:cNvSpPr/>
           <p:nvPr/>
         </p:nvSpPr>
         <p:spPr>
           <a:xfrm>
-            <a:off x="1298500" y="3374136"/>
+            <a:off x="1298500" y="3339846"/>
             <a:ext cx="357596" cy="20574"/>
           </a:xfrm>
           <a:prstGeom prst="rect">
@@ -11932,13 +12238,13 @@
       </p:sp>
       <p:sp>
         <p:nvSpPr>
-          <p:cNvPr id="13" name="TextBox 12"/>
+          <p:cNvPr id="14" name="TextBox 13"/>
           <p:cNvSpPr txBox="1"/>
           <p:nvPr/>
         </p:nvSpPr>
         <p:spPr>
           <a:xfrm>
-            <a:off x="1161340" y="3429000"/>
+            <a:off x="1161340" y="3394710"/>
             <a:ext cx="631916" cy="288036"/>
           </a:xfrm>
           <a:prstGeom prst="rect">
@@ -11958,7 +12264,7 @@
                 <a:solidFill>
                   <a:srgbClr val="1A1A24"/>
                 </a:solidFill>
-                <a:latin typeface="Arial"/>
+                <a:latin typeface="Helvetica Neue"/>
               </a:rPr>
               <a:t>Dec</a:t>
             </a:r>
@@ -11974,7 +12280,7 @@
                 <a:solidFill>
                   <a:srgbClr val="8A8699"/>
                 </a:solidFill>
-                <a:latin typeface="Arial"/>
+                <a:latin typeface="Helvetica Neue"/>
               </a:rPr>
               <a:t>M2</a:t>
             </a:r>
@@ -11983,13 +12289,13 @@
       </p:sp>
       <p:sp>
         <p:nvSpPr>
-          <p:cNvPr id="14" name="Rectangle 13"/>
+          <p:cNvPr id="15" name="Rectangle 14"/>
           <p:cNvSpPr/>
           <p:nvPr/>
         </p:nvSpPr>
         <p:spPr>
           <a:xfrm>
-            <a:off x="1986186" y="3374136"/>
+            <a:off x="1986186" y="3339846"/>
             <a:ext cx="357596" cy="20574"/>
           </a:xfrm>
           <a:prstGeom prst="rect">
@@ -12027,13 +12333,13 @@
       </p:sp>
       <p:sp>
         <p:nvSpPr>
-          <p:cNvPr id="15" name="TextBox 14"/>
+          <p:cNvPr id="16" name="TextBox 15"/>
           <p:cNvSpPr txBox="1"/>
           <p:nvPr/>
         </p:nvSpPr>
         <p:spPr>
           <a:xfrm>
-            <a:off x="1849026" y="3429000"/>
+            <a:off x="1849026" y="3394710"/>
             <a:ext cx="631916" cy="288036"/>
           </a:xfrm>
           <a:prstGeom prst="rect">
@@ -12053,7 +12359,7 @@
                 <a:solidFill>
                   <a:srgbClr val="1A1A24"/>
                 </a:solidFill>
-                <a:latin typeface="Arial"/>
+                <a:latin typeface="Helvetica Neue"/>
               </a:rPr>
               <a:t>Jan</a:t>
             </a:r>
@@ -12069,7 +12375,7 @@
                 <a:solidFill>
                   <a:srgbClr val="8A8699"/>
                 </a:solidFill>
-                <a:latin typeface="Arial"/>
+                <a:latin typeface="Helvetica Neue"/>
               </a:rPr>
               <a:t>M3</a:t>
             </a:r>
@@ -12078,14 +12384,14 @@
       </p:sp>
       <p:sp>
         <p:nvSpPr>
-          <p:cNvPr id="16" name="Rectangle 15"/>
+          <p:cNvPr id="17" name="Rectangle 16"/>
           <p:cNvSpPr/>
           <p:nvPr/>
         </p:nvSpPr>
         <p:spPr>
           <a:xfrm>
-            <a:off x="2673872" y="3342286"/>
-            <a:ext cx="357596" cy="52423"/>
+            <a:off x="2673872" y="3309135"/>
+            <a:ext cx="357596" cy="51284"/>
           </a:xfrm>
           <a:prstGeom prst="rect">
             <a:avLst/>
@@ -12122,13 +12428,13 @@
       </p:sp>
       <p:sp>
         <p:nvSpPr>
-          <p:cNvPr id="17" name="TextBox 16"/>
+          <p:cNvPr id="18" name="TextBox 17"/>
           <p:cNvSpPr txBox="1"/>
           <p:nvPr/>
         </p:nvSpPr>
         <p:spPr>
           <a:xfrm>
-            <a:off x="2571002" y="3163978"/>
+            <a:off x="2571002" y="3130827"/>
             <a:ext cx="563336" cy="164592"/>
           </a:xfrm>
           <a:prstGeom prst="rect">
@@ -12148,7 +12454,7 @@
                 <a:solidFill>
                   <a:srgbClr val="1A1A24"/>
                 </a:solidFill>
-                <a:latin typeface="Arial"/>
+                <a:latin typeface="Helvetica Neue"/>
               </a:rPr>
               <a:t>0.1×</a:t>
             </a:r>
@@ -12157,13 +12463,13 @@
       </p:sp>
       <p:sp>
         <p:nvSpPr>
-          <p:cNvPr id="18" name="TextBox 17"/>
+          <p:cNvPr id="19" name="TextBox 18"/>
           <p:cNvSpPr txBox="1"/>
           <p:nvPr/>
         </p:nvSpPr>
         <p:spPr>
           <a:xfrm>
-            <a:off x="2536712" y="3429000"/>
+            <a:off x="2536712" y="3394710"/>
             <a:ext cx="631916" cy="288036"/>
           </a:xfrm>
           <a:prstGeom prst="rect">
@@ -12183,7 +12489,7 @@
                 <a:solidFill>
                   <a:srgbClr val="1A1A24"/>
                 </a:solidFill>
-                <a:latin typeface="Arial"/>
+                <a:latin typeface="Helvetica Neue"/>
               </a:rPr>
               <a:t>Feb</a:t>
             </a:r>
@@ -12199,7 +12505,7 @@
                 <a:solidFill>
                   <a:srgbClr val="8A8699"/>
                 </a:solidFill>
-                <a:latin typeface="Arial"/>
+                <a:latin typeface="Helvetica Neue"/>
               </a:rPr>
               <a:t>M4</a:t>
             </a:r>
@@ -12208,14 +12514,14 @@
       </p:sp>
       <p:sp>
         <p:nvSpPr>
-          <p:cNvPr id="19" name="Rectangle 18"/>
+          <p:cNvPr id="20" name="Rectangle 19"/>
           <p:cNvSpPr/>
           <p:nvPr/>
         </p:nvSpPr>
         <p:spPr>
           <a:xfrm>
-            <a:off x="3361558" y="3237438"/>
-            <a:ext cx="357596" cy="157271"/>
+            <a:off x="3361558" y="3206567"/>
+            <a:ext cx="357596" cy="153852"/>
           </a:xfrm>
           <a:prstGeom prst="rect">
             <a:avLst/>
@@ -12252,13 +12558,13 @@
       </p:sp>
       <p:sp>
         <p:nvSpPr>
-          <p:cNvPr id="20" name="TextBox 19"/>
+          <p:cNvPr id="21" name="TextBox 20"/>
           <p:cNvSpPr txBox="1"/>
           <p:nvPr/>
         </p:nvSpPr>
         <p:spPr>
           <a:xfrm>
-            <a:off x="3258688" y="3059130"/>
+            <a:off x="3258688" y="3028259"/>
             <a:ext cx="563336" cy="164592"/>
           </a:xfrm>
           <a:prstGeom prst="rect">
@@ -12278,7 +12584,7 @@
                 <a:solidFill>
                   <a:srgbClr val="1A1A24"/>
                 </a:solidFill>
-                <a:latin typeface="Arial"/>
+                <a:latin typeface="Helvetica Neue"/>
               </a:rPr>
               <a:t>0.4×</a:t>
             </a:r>
@@ -12287,13 +12593,13 @@
       </p:sp>
       <p:sp>
         <p:nvSpPr>
-          <p:cNvPr id="21" name="TextBox 20"/>
+          <p:cNvPr id="22" name="TextBox 21"/>
           <p:cNvSpPr txBox="1"/>
           <p:nvPr/>
         </p:nvSpPr>
         <p:spPr>
           <a:xfrm>
-            <a:off x="3224398" y="3429000"/>
+            <a:off x="3224398" y="3394710"/>
             <a:ext cx="631916" cy="288036"/>
           </a:xfrm>
           <a:prstGeom prst="rect">
@@ -12313,7 +12619,7 @@
                 <a:solidFill>
                   <a:srgbClr val="1A1A24"/>
                 </a:solidFill>
-                <a:latin typeface="Arial"/>
+                <a:latin typeface="Helvetica Neue"/>
               </a:rPr>
               <a:t>Mar</a:t>
             </a:r>
@@ -12329,7 +12635,7 @@
                 <a:solidFill>
                   <a:srgbClr val="8A8699"/>
                 </a:solidFill>
-                <a:latin typeface="Arial"/>
+                <a:latin typeface="Helvetica Neue"/>
               </a:rPr>
               <a:t>M5</a:t>
             </a:r>
@@ -12338,14 +12644,14 @@
       </p:sp>
       <p:sp>
         <p:nvSpPr>
-          <p:cNvPr id="22" name="Rectangle 21"/>
+          <p:cNvPr id="23" name="Rectangle 22"/>
           <p:cNvSpPr/>
           <p:nvPr/>
         </p:nvSpPr>
         <p:spPr>
           <a:xfrm>
-            <a:off x="4049244" y="3078625"/>
-            <a:ext cx="357596" cy="316084"/>
+            <a:off x="4049244" y="3051206"/>
+            <a:ext cx="357596" cy="309213"/>
           </a:xfrm>
           <a:prstGeom prst="rect">
             <a:avLst/>
@@ -12382,13 +12688,13 @@
       </p:sp>
       <p:sp>
         <p:nvSpPr>
-          <p:cNvPr id="23" name="TextBox 22"/>
+          <p:cNvPr id="24" name="TextBox 23"/>
           <p:cNvSpPr txBox="1"/>
           <p:nvPr/>
         </p:nvSpPr>
         <p:spPr>
           <a:xfrm>
-            <a:off x="3946374" y="2900317"/>
+            <a:off x="3946374" y="2872898"/>
             <a:ext cx="563336" cy="164592"/>
           </a:xfrm>
           <a:prstGeom prst="rect">
@@ -12408,7 +12714,7 @@
                 <a:solidFill>
                   <a:srgbClr val="1A1A24"/>
                 </a:solidFill>
-                <a:latin typeface="Arial"/>
+                <a:latin typeface="Helvetica Neue"/>
               </a:rPr>
               <a:t>0.8×</a:t>
             </a:r>
@@ -12417,13 +12723,13 @@
       </p:sp>
       <p:sp>
         <p:nvSpPr>
-          <p:cNvPr id="24" name="TextBox 23"/>
+          <p:cNvPr id="25" name="TextBox 24"/>
           <p:cNvSpPr txBox="1"/>
           <p:nvPr/>
         </p:nvSpPr>
         <p:spPr>
           <a:xfrm>
-            <a:off x="3912084" y="3429000"/>
+            <a:off x="3912084" y="3394710"/>
             <a:ext cx="631916" cy="288036"/>
           </a:xfrm>
           <a:prstGeom prst="rect">
@@ -12443,7 +12749,7 @@
                 <a:solidFill>
                   <a:srgbClr val="1A1A24"/>
                 </a:solidFill>
-                <a:latin typeface="Arial"/>
+                <a:latin typeface="Helvetica Neue"/>
               </a:rPr>
               <a:t>Apr</a:t>
             </a:r>
@@ -12459,7 +12765,7 @@
                 <a:solidFill>
                   <a:srgbClr val="8A8699"/>
                 </a:solidFill>
-                <a:latin typeface="Arial"/>
+                <a:latin typeface="Helvetica Neue"/>
               </a:rPr>
               <a:t>M6</a:t>
             </a:r>
@@ -12468,14 +12774,14 @@
       </p:sp>
       <p:sp>
         <p:nvSpPr>
-          <p:cNvPr id="25" name="Rectangle 24"/>
+          <p:cNvPr id="26" name="Rectangle 25"/>
           <p:cNvSpPr/>
           <p:nvPr/>
         </p:nvSpPr>
         <p:spPr>
           <a:xfrm>
-            <a:off x="4736930" y="2868930"/>
-            <a:ext cx="357596" cy="525780"/>
+            <a:off x="4736930" y="2846070"/>
+            <a:ext cx="357596" cy="514350"/>
           </a:xfrm>
           <a:prstGeom prst="rect">
             <a:avLst/>
@@ -12512,13 +12818,13 @@
       </p:sp>
       <p:sp>
         <p:nvSpPr>
-          <p:cNvPr id="26" name="TextBox 25"/>
+          <p:cNvPr id="27" name="TextBox 26"/>
           <p:cNvSpPr txBox="1"/>
           <p:nvPr/>
         </p:nvSpPr>
         <p:spPr>
           <a:xfrm>
-            <a:off x="4634060" y="2690622"/>
+            <a:off x="4634060" y="2667762"/>
             <a:ext cx="563336" cy="164592"/>
           </a:xfrm>
           <a:prstGeom prst="rect">
@@ -12538,7 +12844,7 @@
                 <a:solidFill>
                   <a:srgbClr val="1A1A24"/>
                 </a:solidFill>
-                <a:latin typeface="Arial"/>
+                <a:latin typeface="Helvetica Neue"/>
               </a:rPr>
               <a:t>1.3×</a:t>
             </a:r>
@@ -12547,13 +12853,13 @@
       </p:sp>
       <p:sp>
         <p:nvSpPr>
-          <p:cNvPr id="27" name="TextBox 26"/>
+          <p:cNvPr id="28" name="TextBox 27"/>
           <p:cNvSpPr txBox="1"/>
           <p:nvPr/>
         </p:nvSpPr>
         <p:spPr>
           <a:xfrm>
-            <a:off x="4599770" y="3429000"/>
+            <a:off x="4599770" y="3394710"/>
             <a:ext cx="631916" cy="288036"/>
           </a:xfrm>
           <a:prstGeom prst="rect">
@@ -12573,7 +12879,7 @@
                 <a:solidFill>
                   <a:srgbClr val="1A1A24"/>
                 </a:solidFill>
-                <a:latin typeface="Arial"/>
+                <a:latin typeface="Helvetica Neue"/>
               </a:rPr>
               <a:t>May</a:t>
             </a:r>
@@ -12589,7 +12895,7 @@
                 <a:solidFill>
                   <a:srgbClr val="8A8699"/>
                 </a:solidFill>
-                <a:latin typeface="Arial"/>
+                <a:latin typeface="Helvetica Neue"/>
               </a:rPr>
               <a:t>M7</a:t>
             </a:r>
@@ -12598,14 +12904,14 @@
       </p:sp>
       <p:sp>
         <p:nvSpPr>
-          <p:cNvPr id="28" name="Rectangle 27"/>
+          <p:cNvPr id="29" name="Rectangle 28"/>
           <p:cNvSpPr/>
           <p:nvPr/>
         </p:nvSpPr>
         <p:spPr>
           <a:xfrm>
-            <a:off x="5424616" y="2659234"/>
-            <a:ext cx="357596" cy="735475"/>
+            <a:off x="5424616" y="2640933"/>
+            <a:ext cx="357596" cy="719486"/>
           </a:xfrm>
           <a:prstGeom prst="rect">
             <a:avLst/>
@@ -12642,13 +12948,13 @@
       </p:sp>
       <p:sp>
         <p:nvSpPr>
-          <p:cNvPr id="29" name="TextBox 28"/>
+          <p:cNvPr id="30" name="TextBox 29"/>
           <p:cNvSpPr txBox="1"/>
           <p:nvPr/>
         </p:nvSpPr>
         <p:spPr>
           <a:xfrm>
-            <a:off x="5321746" y="2480926"/>
+            <a:off x="5321746" y="2462625"/>
             <a:ext cx="563336" cy="164592"/>
           </a:xfrm>
           <a:prstGeom prst="rect">
@@ -12668,7 +12974,7 @@
                 <a:solidFill>
                   <a:srgbClr val="1A1A24"/>
                 </a:solidFill>
-                <a:latin typeface="Arial"/>
+                <a:latin typeface="Helvetica Neue"/>
               </a:rPr>
               <a:t>1.8×</a:t>
             </a:r>
@@ -12677,13 +12983,13 @@
       </p:sp>
       <p:sp>
         <p:nvSpPr>
-          <p:cNvPr id="30" name="TextBox 29"/>
+          <p:cNvPr id="31" name="TextBox 30"/>
           <p:cNvSpPr txBox="1"/>
           <p:nvPr/>
         </p:nvSpPr>
         <p:spPr>
           <a:xfrm>
-            <a:off x="5287456" y="3429000"/>
+            <a:off x="5287456" y="3394710"/>
             <a:ext cx="631916" cy="288036"/>
           </a:xfrm>
           <a:prstGeom prst="rect">
@@ -12703,7 +13009,7 @@
                 <a:solidFill>
                   <a:srgbClr val="1A1A24"/>
                 </a:solidFill>
-                <a:latin typeface="Arial"/>
+                <a:latin typeface="Helvetica Neue"/>
               </a:rPr>
               <a:t>Jun</a:t>
             </a:r>
@@ -12719,7 +13025,7 @@
                 <a:solidFill>
                   <a:srgbClr val="8A8699"/>
                 </a:solidFill>
-                <a:latin typeface="Arial"/>
+                <a:latin typeface="Helvetica Neue"/>
               </a:rPr>
               <a:t>M8</a:t>
             </a:r>
@@ -12728,14 +13034,14 @@
       </p:sp>
       <p:sp>
         <p:nvSpPr>
-          <p:cNvPr id="31" name="Rectangle 30"/>
+          <p:cNvPr id="32" name="Rectangle 31"/>
           <p:cNvSpPr/>
           <p:nvPr/>
         </p:nvSpPr>
         <p:spPr>
           <a:xfrm>
-            <a:off x="6112302" y="2447997"/>
-            <a:ext cx="357596" cy="946712"/>
+            <a:off x="6112302" y="2434288"/>
+            <a:ext cx="357596" cy="926131"/>
           </a:xfrm>
           <a:prstGeom prst="rect">
             <a:avLst/>
@@ -12772,13 +13078,13 @@
       </p:sp>
       <p:sp>
         <p:nvSpPr>
-          <p:cNvPr id="32" name="TextBox 31"/>
+          <p:cNvPr id="33" name="TextBox 32"/>
           <p:cNvSpPr txBox="1"/>
           <p:nvPr/>
         </p:nvSpPr>
         <p:spPr>
           <a:xfrm>
-            <a:off x="6009432" y="2269689"/>
+            <a:off x="6009432" y="2255980"/>
             <a:ext cx="563336" cy="164592"/>
           </a:xfrm>
           <a:prstGeom prst="rect">
@@ -12798,7 +13104,7 @@
                 <a:solidFill>
                   <a:srgbClr val="1A1A24"/>
                 </a:solidFill>
-                <a:latin typeface="Arial"/>
+                <a:latin typeface="Helvetica Neue"/>
               </a:rPr>
               <a:t>2.3×</a:t>
             </a:r>
@@ -12807,13 +13113,13 @@
       </p:sp>
       <p:sp>
         <p:nvSpPr>
-          <p:cNvPr id="33" name="TextBox 32"/>
+          <p:cNvPr id="34" name="TextBox 33"/>
           <p:cNvSpPr txBox="1"/>
           <p:nvPr/>
         </p:nvSpPr>
         <p:spPr>
           <a:xfrm>
-            <a:off x="5975142" y="3429000"/>
+            <a:off x="5975142" y="3394710"/>
             <a:ext cx="631916" cy="288036"/>
           </a:xfrm>
           <a:prstGeom prst="rect">
@@ -12833,7 +13139,7 @@
                 <a:solidFill>
                   <a:srgbClr val="1A1A24"/>
                 </a:solidFill>
-                <a:latin typeface="Arial"/>
+                <a:latin typeface="Helvetica Neue"/>
               </a:rPr>
               <a:t>Jul</a:t>
             </a:r>
@@ -12849,7 +13155,7 @@
                 <a:solidFill>
                   <a:srgbClr val="8A8699"/>
                 </a:solidFill>
-                <a:latin typeface="Arial"/>
+                <a:latin typeface="Helvetica Neue"/>
               </a:rPr>
               <a:t>M9</a:t>
             </a:r>
@@ -12858,14 +13164,14 @@
       </p:sp>
       <p:sp>
         <p:nvSpPr>
-          <p:cNvPr id="34" name="Rectangle 33"/>
+          <p:cNvPr id="35" name="Rectangle 34"/>
           <p:cNvSpPr/>
           <p:nvPr/>
         </p:nvSpPr>
         <p:spPr>
           <a:xfrm>
-            <a:off x="6799988" y="2238302"/>
-            <a:ext cx="357596" cy="1156407"/>
+            <a:off x="6799988" y="2229151"/>
+            <a:ext cx="357596" cy="1131268"/>
           </a:xfrm>
           <a:prstGeom prst="rect">
             <a:avLst/>
@@ -12902,13 +13208,13 @@
       </p:sp>
       <p:sp>
         <p:nvSpPr>
-          <p:cNvPr id="35" name="TextBox 34"/>
+          <p:cNvPr id="36" name="TextBox 35"/>
           <p:cNvSpPr txBox="1"/>
           <p:nvPr/>
         </p:nvSpPr>
         <p:spPr>
           <a:xfrm>
-            <a:off x="6697118" y="2059994"/>
+            <a:off x="6697118" y="2050843"/>
             <a:ext cx="563336" cy="164592"/>
           </a:xfrm>
           <a:prstGeom prst="rect">
@@ -12928,7 +13234,7 @@
                 <a:solidFill>
                   <a:srgbClr val="1A1A24"/>
                 </a:solidFill>
-                <a:latin typeface="Arial"/>
+                <a:latin typeface="Helvetica Neue"/>
               </a:rPr>
               <a:t>2.8×</a:t>
             </a:r>
@@ -12937,13 +13243,13 @@
       </p:sp>
       <p:sp>
         <p:nvSpPr>
-          <p:cNvPr id="36" name="TextBox 35"/>
+          <p:cNvPr id="37" name="TextBox 36"/>
           <p:cNvSpPr txBox="1"/>
           <p:nvPr/>
         </p:nvSpPr>
         <p:spPr>
           <a:xfrm>
-            <a:off x="6662828" y="3429000"/>
+            <a:off x="6662828" y="3394710"/>
             <a:ext cx="631916" cy="288036"/>
           </a:xfrm>
           <a:prstGeom prst="rect">
@@ -12963,7 +13269,7 @@
                 <a:solidFill>
                   <a:srgbClr val="1A1A24"/>
                 </a:solidFill>
-                <a:latin typeface="Arial"/>
+                <a:latin typeface="Helvetica Neue"/>
               </a:rPr>
               <a:t>Aug</a:t>
             </a:r>
@@ -12979,7 +13285,7 @@
                 <a:solidFill>
                   <a:srgbClr val="8A8699"/>
                 </a:solidFill>
-                <a:latin typeface="Arial"/>
+                <a:latin typeface="Helvetica Neue"/>
               </a:rPr>
               <a:t>M10</a:t>
             </a:r>
@@ -12988,14 +13294,14 @@
       </p:sp>
       <p:sp>
         <p:nvSpPr>
-          <p:cNvPr id="37" name="Rectangle 36"/>
+          <p:cNvPr id="38" name="Rectangle 37"/>
           <p:cNvSpPr/>
           <p:nvPr/>
         </p:nvSpPr>
         <p:spPr>
           <a:xfrm>
-            <a:off x="7487674" y="2027065"/>
-            <a:ext cx="357596" cy="1367644"/>
+            <a:off x="7487674" y="2022506"/>
+            <a:ext cx="357596" cy="1337913"/>
           </a:xfrm>
           <a:prstGeom prst="rect">
             <a:avLst/>
@@ -13032,13 +13338,13 @@
       </p:sp>
       <p:sp>
         <p:nvSpPr>
-          <p:cNvPr id="38" name="TextBox 37"/>
+          <p:cNvPr id="39" name="TextBox 38"/>
           <p:cNvSpPr txBox="1"/>
           <p:nvPr/>
         </p:nvSpPr>
         <p:spPr>
           <a:xfrm>
-            <a:off x="7384804" y="1848757"/>
+            <a:off x="7384804" y="1844198"/>
             <a:ext cx="563336" cy="164592"/>
           </a:xfrm>
           <a:prstGeom prst="rect">
@@ -13058,7 +13364,7 @@
                 <a:solidFill>
                   <a:srgbClr val="1A1A24"/>
                 </a:solidFill>
-                <a:latin typeface="Arial"/>
+                <a:latin typeface="Helvetica Neue"/>
               </a:rPr>
               <a:t>3.4×</a:t>
             </a:r>
@@ -13067,13 +13373,13 @@
       </p:sp>
       <p:sp>
         <p:nvSpPr>
-          <p:cNvPr id="39" name="TextBox 38"/>
+          <p:cNvPr id="40" name="TextBox 39"/>
           <p:cNvSpPr txBox="1"/>
           <p:nvPr/>
         </p:nvSpPr>
         <p:spPr>
           <a:xfrm>
-            <a:off x="7350514" y="3429000"/>
+            <a:off x="7350514" y="3394710"/>
             <a:ext cx="631916" cy="288036"/>
           </a:xfrm>
           <a:prstGeom prst="rect">
@@ -13093,7 +13399,7 @@
                 <a:solidFill>
                   <a:srgbClr val="1A1A24"/>
                 </a:solidFill>
-                <a:latin typeface="Arial"/>
+                <a:latin typeface="Helvetica Neue"/>
               </a:rPr>
               <a:t>Sep</a:t>
             </a:r>
@@ -13109,7 +13415,7 @@
                 <a:solidFill>
                   <a:srgbClr val="8A8699"/>
                 </a:solidFill>
-                <a:latin typeface="Arial"/>
+                <a:latin typeface="Helvetica Neue"/>
               </a:rPr>
               <a:t>M11</a:t>
             </a:r>
@@ -13118,14 +13424,14 @@
       </p:sp>
       <p:sp>
         <p:nvSpPr>
-          <p:cNvPr id="40" name="Rectangle 39"/>
+          <p:cNvPr id="41" name="Rectangle 40"/>
           <p:cNvSpPr/>
           <p:nvPr/>
         </p:nvSpPr>
         <p:spPr>
           <a:xfrm>
             <a:off x="8175360" y="1817370"/>
-            <a:ext cx="357596" cy="1577339"/>
+            <a:ext cx="357596" cy="1543050"/>
           </a:xfrm>
           <a:prstGeom prst="rect">
             <a:avLst/>
@@ -13162,7 +13468,7 @@
       </p:sp>
       <p:sp>
         <p:nvSpPr>
-          <p:cNvPr id="41" name="TextBox 40"/>
+          <p:cNvPr id="42" name="TextBox 41"/>
           <p:cNvSpPr txBox="1"/>
           <p:nvPr/>
         </p:nvSpPr>
@@ -13188,7 +13494,7 @@
                 <a:solidFill>
                   <a:srgbClr val="1A1A24"/>
                 </a:solidFill>
-                <a:latin typeface="Arial"/>
+                <a:latin typeface="Helvetica Neue"/>
               </a:rPr>
               <a:t>3.9×</a:t>
             </a:r>
@@ -13197,13 +13503,13 @@
       </p:sp>
       <p:sp>
         <p:nvSpPr>
-          <p:cNvPr id="42" name="TextBox 41"/>
+          <p:cNvPr id="43" name="TextBox 42"/>
           <p:cNvSpPr txBox="1"/>
           <p:nvPr/>
         </p:nvSpPr>
         <p:spPr>
           <a:xfrm>
-            <a:off x="8038200" y="3429000"/>
+            <a:off x="8038200" y="3394710"/>
             <a:ext cx="631916" cy="288036"/>
           </a:xfrm>
           <a:prstGeom prst="rect">
@@ -13223,7 +13529,7 @@
                 <a:solidFill>
                   <a:srgbClr val="1A1A24"/>
                 </a:solidFill>
-                <a:latin typeface="Arial"/>
+                <a:latin typeface="Helvetica Neue"/>
               </a:rPr>
               <a:t>Oct</a:t>
             </a:r>
@@ -13239,7 +13545,7 @@
                 <a:solidFill>
                   <a:srgbClr val="8A8699"/>
                 </a:solidFill>
-                <a:latin typeface="Arial"/>
+                <a:latin typeface="Helvetica Neue"/>
               </a:rPr>
               <a:t>M12</a:t>
             </a:r>
@@ -13248,13 +13554,13 @@
       </p:sp>
       <p:sp>
         <p:nvSpPr>
-          <p:cNvPr id="43" name="Rectangle 42"/>
+          <p:cNvPr id="44" name="Rectangle 43"/>
           <p:cNvSpPr/>
           <p:nvPr/>
         </p:nvSpPr>
         <p:spPr>
           <a:xfrm>
-            <a:off x="445770" y="3394710"/>
+            <a:off x="445770" y="3360420"/>
             <a:ext cx="8252231" cy="8229"/>
           </a:xfrm>
           <a:prstGeom prst="rect">
@@ -13292,14 +13598,14 @@
       </p:sp>
       <p:graphicFrame>
         <p:nvGraphicFramePr>
-          <p:cNvPr id="44" name="Table 43"/>
+          <p:cNvPr id="45" name="Table 44"/>
           <p:cNvGraphicFramePr>
             <a:graphicFrameLocks noGrp="1"/>
           </p:cNvGraphicFramePr>
           <p:nvPr/>
         </p:nvGraphicFramePr>
         <p:xfrm>
-          <a:off x="411479" y="3819906"/>
+          <a:off x="411479" y="3785616"/>
           <a:ext cx="8320806" cy="658368"/>
         </p:xfrm>
         <a:graphic>
@@ -13335,7 +13641,7 @@
                           <a:solidFill>
                             <a:srgbClr val="1A1A24"/>
                           </a:solidFill>
-                          <a:latin typeface="Arial"/>
+                          <a:latin typeface="Helvetica Neue"/>
                         </a:rPr>
                         <a:t/>
                       </a:r>
@@ -13358,7 +13664,7 @@
                           <a:solidFill>
                             <a:srgbClr val="FFFFFF"/>
                           </a:solidFill>
-                          <a:latin typeface="Arial"/>
+                          <a:latin typeface="Helvetica Neue"/>
                         </a:rPr>
                         <a:t>M1</a:t>
                       </a:r>
@@ -13381,7 +13687,7 @@
                           <a:solidFill>
                             <a:srgbClr val="FFFFFF"/>
                           </a:solidFill>
-                          <a:latin typeface="Arial"/>
+                          <a:latin typeface="Helvetica Neue"/>
                         </a:rPr>
                         <a:t>M2</a:t>
                       </a:r>
@@ -13404,7 +13710,7 @@
                           <a:solidFill>
                             <a:srgbClr val="FFFFFF"/>
                           </a:solidFill>
-                          <a:latin typeface="Arial"/>
+                          <a:latin typeface="Helvetica Neue"/>
                         </a:rPr>
                         <a:t>M3</a:t>
                       </a:r>
@@ -13427,7 +13733,7 @@
                           <a:solidFill>
                             <a:srgbClr val="FFFFFF"/>
                           </a:solidFill>
-                          <a:latin typeface="Arial"/>
+                          <a:latin typeface="Helvetica Neue"/>
                         </a:rPr>
                         <a:t>M4</a:t>
                       </a:r>
@@ -13450,7 +13756,7 @@
                           <a:solidFill>
                             <a:srgbClr val="FFFFFF"/>
                           </a:solidFill>
-                          <a:latin typeface="Arial"/>
+                          <a:latin typeface="Helvetica Neue"/>
                         </a:rPr>
                         <a:t>M5</a:t>
                       </a:r>
@@ -13473,7 +13779,7 @@
                           <a:solidFill>
                             <a:srgbClr val="FFFFFF"/>
                           </a:solidFill>
-                          <a:latin typeface="Arial"/>
+                          <a:latin typeface="Helvetica Neue"/>
                         </a:rPr>
                         <a:t>M6</a:t>
                       </a:r>
@@ -13496,7 +13802,7 @@
                           <a:solidFill>
                             <a:srgbClr val="FFFFFF"/>
                           </a:solidFill>
-                          <a:latin typeface="Arial"/>
+                          <a:latin typeface="Helvetica Neue"/>
                         </a:rPr>
                         <a:t>M7</a:t>
                       </a:r>
@@ -13519,7 +13825,7 @@
                           <a:solidFill>
                             <a:srgbClr val="FFFFFF"/>
                           </a:solidFill>
-                          <a:latin typeface="Arial"/>
+                          <a:latin typeface="Helvetica Neue"/>
                         </a:rPr>
                         <a:t>M8</a:t>
                       </a:r>
@@ -13542,7 +13848,7 @@
                           <a:solidFill>
                             <a:srgbClr val="FFFFFF"/>
                           </a:solidFill>
-                          <a:latin typeface="Arial"/>
+                          <a:latin typeface="Helvetica Neue"/>
                         </a:rPr>
                         <a:t>M9</a:t>
                       </a:r>
@@ -13565,7 +13871,7 @@
                           <a:solidFill>
                             <a:srgbClr val="FFFFFF"/>
                           </a:solidFill>
-                          <a:latin typeface="Arial"/>
+                          <a:latin typeface="Helvetica Neue"/>
                         </a:rPr>
                         <a:t>M10</a:t>
                       </a:r>
@@ -13588,7 +13894,7 @@
                           <a:solidFill>
                             <a:srgbClr val="FFFFFF"/>
                           </a:solidFill>
-                          <a:latin typeface="Arial"/>
+                          <a:latin typeface="Helvetica Neue"/>
                         </a:rPr>
                         <a:t>M11</a:t>
                       </a:r>
@@ -13611,7 +13917,7 @@
                           <a:solidFill>
                             <a:srgbClr val="FFFFFF"/>
                           </a:solidFill>
-                          <a:latin typeface="Arial"/>
+                          <a:latin typeface="Helvetica Neue"/>
                         </a:rPr>
                         <a:t>M12</a:t>
                       </a:r>
@@ -13636,13 +13942,13 @@
                           <a:solidFill>
                             <a:srgbClr val="801ED7"/>
                           </a:solidFill>
-                          <a:latin typeface="Arial"/>
+                          <a:latin typeface="Helvetica Neue"/>
                         </a:rPr>
                         <a:t>Value / mo</a:t>
                       </a:r>
                     </a:p>
                   </a:txBody>
-                  <a:tcPr anchor="ctr" marL="41148" marR="13716">
+                  <a:tcPr anchor="ctr" marL="20574" marR="20574" marT="0" marB="0">
                     <a:solidFill>
                       <a:srgbClr val="EFEDFF"/>
                     </a:solidFill>
@@ -13659,13 +13965,13 @@
                           <a:solidFill>
                             <a:srgbClr val="1A1A24"/>
                           </a:solidFill>
-                          <a:latin typeface="Arial"/>
+                          <a:latin typeface="Helvetica Neue"/>
                         </a:rPr>
                         <a:t>$0</a:t>
                       </a:r>
                     </a:p>
                   </a:txBody>
-                  <a:tcPr anchor="ctr" marL="13716" marR="13716" marT="0" marB="0">
+                  <a:tcPr anchor="ctr" marL="20574" marR="20574" marT="0" marB="0">
                     <a:solidFill>
                       <a:srgbClr val="FFFFFF"/>
                     </a:solidFill>
@@ -13682,13 +13988,13 @@
                           <a:solidFill>
                             <a:srgbClr val="1A1A24"/>
                           </a:solidFill>
-                          <a:latin typeface="Arial"/>
+                          <a:latin typeface="Helvetica Neue"/>
                         </a:rPr>
                         <a:t>$0</a:t>
                       </a:r>
                     </a:p>
                   </a:txBody>
-                  <a:tcPr anchor="ctr" marL="13716" marR="13716" marT="0" marB="0">
+                  <a:tcPr anchor="ctr" marL="20574" marR="20574" marT="0" marB="0">
                     <a:solidFill>
                       <a:srgbClr val="FFFFFF"/>
                     </a:solidFill>
@@ -13705,13 +14011,13 @@
                           <a:solidFill>
                             <a:srgbClr val="1A1A24"/>
                           </a:solidFill>
-                          <a:latin typeface="Arial"/>
+                          <a:latin typeface="Helvetica Neue"/>
                         </a:rPr>
                         <a:t>$0</a:t>
                       </a:r>
                     </a:p>
                   </a:txBody>
-                  <a:tcPr anchor="ctr" marL="13716" marR="13716" marT="0" marB="0">
+                  <a:tcPr anchor="ctr" marL="20574" marR="20574" marT="0" marB="0">
                     <a:solidFill>
                       <a:srgbClr val="FFFFFF"/>
                     </a:solidFill>
@@ -13728,13 +14034,13 @@
                           <a:solidFill>
                             <a:srgbClr val="1A1A24"/>
                           </a:solidFill>
-                          <a:latin typeface="Arial"/>
+                          <a:latin typeface="Helvetica Neue"/>
                         </a:rPr>
                         <a:t>$34k</a:t>
                       </a:r>
                     </a:p>
                   </a:txBody>
-                  <a:tcPr anchor="ctr" marL="13716" marR="13716" marT="0" marB="0">
+                  <a:tcPr anchor="ctr" marL="20574" marR="20574" marT="0" marB="0">
                     <a:solidFill>
                       <a:srgbClr val="FFFFFF"/>
                     </a:solidFill>
@@ -13751,13 +14057,13 @@
                           <a:solidFill>
                             <a:srgbClr val="1A1A24"/>
                           </a:solidFill>
-                          <a:latin typeface="Arial"/>
+                          <a:latin typeface="Helvetica Neue"/>
                         </a:rPr>
                         <a:t>$68k</a:t>
                       </a:r>
                     </a:p>
                   </a:txBody>
-                  <a:tcPr anchor="ctr" marL="13716" marR="13716" marT="0" marB="0">
+                  <a:tcPr anchor="ctr" marL="20574" marR="20574" marT="0" marB="0">
                     <a:solidFill>
                       <a:srgbClr val="FFFFFF"/>
                     </a:solidFill>
@@ -13774,13 +14080,13 @@
                           <a:solidFill>
                             <a:srgbClr val="1A1A24"/>
                           </a:solidFill>
-                          <a:latin typeface="Arial"/>
+                          <a:latin typeface="Helvetica Neue"/>
                         </a:rPr>
                         <a:t>$102k</a:t>
                       </a:r>
                     </a:p>
                   </a:txBody>
-                  <a:tcPr anchor="ctr" marL="13716" marR="13716" marT="0" marB="0">
+                  <a:tcPr anchor="ctr" marL="20574" marR="20574" marT="0" marB="0">
                     <a:solidFill>
                       <a:srgbClr val="FFFFFF"/>
                     </a:solidFill>
@@ -13797,13 +14103,13 @@
                           <a:solidFill>
                             <a:srgbClr val="1A1A24"/>
                           </a:solidFill>
-                          <a:latin typeface="Arial"/>
+                          <a:latin typeface="Helvetica Neue"/>
                         </a:rPr>
                         <a:t>$136k</a:t>
                       </a:r>
                     </a:p>
                   </a:txBody>
-                  <a:tcPr anchor="ctr" marL="13716" marR="13716" marT="0" marB="0">
+                  <a:tcPr anchor="ctr" marL="20574" marR="20574" marT="0" marB="0">
                     <a:solidFill>
                       <a:srgbClr val="FFFFFF"/>
                     </a:solidFill>
@@ -13820,13 +14126,13 @@
                           <a:solidFill>
                             <a:srgbClr val="1A1A24"/>
                           </a:solidFill>
-                          <a:latin typeface="Arial"/>
+                          <a:latin typeface="Helvetica Neue"/>
                         </a:rPr>
                         <a:t>$136k</a:t>
                       </a:r>
                     </a:p>
                   </a:txBody>
-                  <a:tcPr anchor="ctr" marL="13716" marR="13716" marT="0" marB="0">
+                  <a:tcPr anchor="ctr" marL="20574" marR="20574" marT="0" marB="0">
                     <a:solidFill>
                       <a:srgbClr val="FFFFFF"/>
                     </a:solidFill>
@@ -13843,13 +14149,13 @@
                           <a:solidFill>
                             <a:srgbClr val="1A1A24"/>
                           </a:solidFill>
-                          <a:latin typeface="Arial"/>
+                          <a:latin typeface="Helvetica Neue"/>
                         </a:rPr>
                         <a:t>$136k</a:t>
                       </a:r>
                     </a:p>
                   </a:txBody>
-                  <a:tcPr anchor="ctr" marL="13716" marR="13716" marT="0" marB="0">
+                  <a:tcPr anchor="ctr" marL="20574" marR="20574" marT="0" marB="0">
                     <a:solidFill>
                       <a:srgbClr val="FFFFFF"/>
                     </a:solidFill>
@@ -13866,13 +14172,13 @@
                           <a:solidFill>
                             <a:srgbClr val="1A1A24"/>
                           </a:solidFill>
-                          <a:latin typeface="Arial"/>
+                          <a:latin typeface="Helvetica Neue"/>
                         </a:rPr>
                         <a:t>$136k</a:t>
                       </a:r>
                     </a:p>
                   </a:txBody>
-                  <a:tcPr anchor="ctr" marL="13716" marR="13716" marT="0" marB="0">
+                  <a:tcPr anchor="ctr" marL="20574" marR="20574" marT="0" marB="0">
                     <a:solidFill>
                       <a:srgbClr val="FFFFFF"/>
                     </a:solidFill>
@@ -13889,13 +14195,13 @@
                           <a:solidFill>
                             <a:srgbClr val="1A1A24"/>
                           </a:solidFill>
-                          <a:latin typeface="Arial"/>
+                          <a:latin typeface="Helvetica Neue"/>
                         </a:rPr>
                         <a:t>$136k</a:t>
                       </a:r>
                     </a:p>
                   </a:txBody>
-                  <a:tcPr anchor="ctr" marL="13716" marR="13716" marT="0" marB="0">
+                  <a:tcPr anchor="ctr" marL="20574" marR="20574" marT="0" marB="0">
                     <a:solidFill>
                       <a:srgbClr val="FFFFFF"/>
                     </a:solidFill>
@@ -13912,13 +14218,13 @@
                           <a:solidFill>
                             <a:srgbClr val="1A1A24"/>
                           </a:solidFill>
-                          <a:latin typeface="Arial"/>
+                          <a:latin typeface="Helvetica Neue"/>
                         </a:rPr>
                         <a:t>$136k</a:t>
                       </a:r>
                     </a:p>
                   </a:txBody>
-                  <a:tcPr anchor="ctr" marL="13716" marR="13716" marT="0" marB="0">
+                  <a:tcPr anchor="ctr" marL="20574" marR="20574" marT="0" marB="0">
                     <a:solidFill>
                       <a:srgbClr val="FFFFFF"/>
                     </a:solidFill>
@@ -13937,13 +14243,13 @@
                           <a:solidFill>
                             <a:srgbClr val="801ED7"/>
                           </a:solidFill>
-                          <a:latin typeface="Arial"/>
+                          <a:latin typeface="Helvetica Neue"/>
                         </a:rPr>
                         <a:t>ROI</a:t>
                       </a:r>
                     </a:p>
                   </a:txBody>
-                  <a:tcPr anchor="ctr" marL="41148" marR="13716">
+                  <a:tcPr anchor="ctr" marL="20574" marR="20574" marT="0" marB="0">
                     <a:solidFill>
                       <a:srgbClr val="EFEDFF"/>
                     </a:solidFill>
@@ -13960,13 +14266,13 @@
                           <a:solidFill>
                             <a:srgbClr val="801ED7"/>
                           </a:solidFill>
-                          <a:latin typeface="Arial"/>
+                          <a:latin typeface="Helvetica Neue"/>
                         </a:rPr>
                         <a:t>–</a:t>
                       </a:r>
                     </a:p>
                   </a:txBody>
-                  <a:tcPr anchor="ctr" marL="13716" marR="13716" marT="0" marB="0">
+                  <a:tcPr anchor="ctr" marL="20574" marR="20574" marT="0" marB="0">
                     <a:solidFill>
                       <a:srgbClr val="FAF9FE"/>
                     </a:solidFill>
@@ -13983,13 +14289,13 @@
                           <a:solidFill>
                             <a:srgbClr val="801ED7"/>
                           </a:solidFill>
-                          <a:latin typeface="Arial"/>
+                          <a:latin typeface="Helvetica Neue"/>
                         </a:rPr>
                         <a:t>–</a:t>
                       </a:r>
                     </a:p>
                   </a:txBody>
-                  <a:tcPr anchor="ctr" marL="13716" marR="13716" marT="0" marB="0">
+                  <a:tcPr anchor="ctr" marL="20574" marR="20574" marT="0" marB="0">
                     <a:solidFill>
                       <a:srgbClr val="FAF9FE"/>
                     </a:solidFill>
@@ -14006,13 +14312,13 @@
                           <a:solidFill>
                             <a:srgbClr val="801ED7"/>
                           </a:solidFill>
-                          <a:latin typeface="Arial"/>
+                          <a:latin typeface="Helvetica Neue"/>
                         </a:rPr>
                         <a:t>–</a:t>
                       </a:r>
                     </a:p>
                   </a:txBody>
-                  <a:tcPr anchor="ctr" marL="13716" marR="13716" marT="0" marB="0">
+                  <a:tcPr anchor="ctr" marL="20574" marR="20574" marT="0" marB="0">
                     <a:solidFill>
                       <a:srgbClr val="FAF9FE"/>
                     </a:solidFill>
@@ -14029,13 +14335,13 @@
                           <a:solidFill>
                             <a:srgbClr val="801ED7"/>
                           </a:solidFill>
-                          <a:latin typeface="Arial"/>
+                          <a:latin typeface="Helvetica Neue"/>
                         </a:rPr>
                         <a:t>0.1×</a:t>
                       </a:r>
                     </a:p>
                   </a:txBody>
-                  <a:tcPr anchor="ctr" marL="13716" marR="13716" marT="0" marB="0">
+                  <a:tcPr anchor="ctr" marL="20574" marR="20574" marT="0" marB="0">
                     <a:solidFill>
                       <a:srgbClr val="FAF9FE"/>
                     </a:solidFill>
@@ -14052,13 +14358,13 @@
                           <a:solidFill>
                             <a:srgbClr val="801ED7"/>
                           </a:solidFill>
-                          <a:latin typeface="Arial"/>
+                          <a:latin typeface="Helvetica Neue"/>
                         </a:rPr>
                         <a:t>0.4×</a:t>
                       </a:r>
                     </a:p>
                   </a:txBody>
-                  <a:tcPr anchor="ctr" marL="13716" marR="13716" marT="0" marB="0">
+                  <a:tcPr anchor="ctr" marL="20574" marR="20574" marT="0" marB="0">
                     <a:solidFill>
                       <a:srgbClr val="FAF9FE"/>
                     </a:solidFill>
@@ -14075,13 +14381,13 @@
                           <a:solidFill>
                             <a:srgbClr val="801ED7"/>
                           </a:solidFill>
-                          <a:latin typeface="Arial"/>
+                          <a:latin typeface="Helvetica Neue"/>
                         </a:rPr>
                         <a:t>0.8×</a:t>
                       </a:r>
                     </a:p>
                   </a:txBody>
-                  <a:tcPr anchor="ctr" marL="13716" marR="13716" marT="0" marB="0">
+                  <a:tcPr anchor="ctr" marL="20574" marR="20574" marT="0" marB="0">
                     <a:solidFill>
                       <a:srgbClr val="FAF9FE"/>
                     </a:solidFill>
@@ -14098,13 +14404,13 @@
                           <a:solidFill>
                             <a:srgbClr val="801ED7"/>
                           </a:solidFill>
-                          <a:latin typeface="Arial"/>
+                          <a:latin typeface="Helvetica Neue"/>
                         </a:rPr>
                         <a:t>1.3×</a:t>
                       </a:r>
                     </a:p>
                   </a:txBody>
-                  <a:tcPr anchor="ctr" marL="13716" marR="13716" marT="0" marB="0">
+                  <a:tcPr anchor="ctr" marL="20574" marR="20574" marT="0" marB="0">
                     <a:solidFill>
                       <a:srgbClr val="FAF9FE"/>
                     </a:solidFill>
@@ -14121,13 +14427,13 @@
                           <a:solidFill>
                             <a:srgbClr val="801ED7"/>
                           </a:solidFill>
-                          <a:latin typeface="Arial"/>
+                          <a:latin typeface="Helvetica Neue"/>
                         </a:rPr>
                         <a:t>1.8×</a:t>
                       </a:r>
                     </a:p>
                   </a:txBody>
-                  <a:tcPr anchor="ctr" marL="13716" marR="13716" marT="0" marB="0">
+                  <a:tcPr anchor="ctr" marL="20574" marR="20574" marT="0" marB="0">
                     <a:solidFill>
                       <a:srgbClr val="FAF9FE"/>
                     </a:solidFill>
@@ -14144,13 +14450,13 @@
                           <a:solidFill>
                             <a:srgbClr val="801ED7"/>
                           </a:solidFill>
-                          <a:latin typeface="Arial"/>
+                          <a:latin typeface="Helvetica Neue"/>
                         </a:rPr>
                         <a:t>2.3×</a:t>
                       </a:r>
                     </a:p>
                   </a:txBody>
-                  <a:tcPr anchor="ctr" marL="13716" marR="13716" marT="0" marB="0">
+                  <a:tcPr anchor="ctr" marL="20574" marR="20574" marT="0" marB="0">
                     <a:solidFill>
                       <a:srgbClr val="FAF9FE"/>
                     </a:solidFill>
@@ -14167,13 +14473,13 @@
                           <a:solidFill>
                             <a:srgbClr val="801ED7"/>
                           </a:solidFill>
-                          <a:latin typeface="Arial"/>
+                          <a:latin typeface="Helvetica Neue"/>
                         </a:rPr>
                         <a:t>2.8×</a:t>
                       </a:r>
                     </a:p>
                   </a:txBody>
-                  <a:tcPr anchor="ctr" marL="13716" marR="13716" marT="0" marB="0">
+                  <a:tcPr anchor="ctr" marL="20574" marR="20574" marT="0" marB="0">
                     <a:solidFill>
                       <a:srgbClr val="FAF9FE"/>
                     </a:solidFill>
@@ -14190,13 +14496,13 @@
                           <a:solidFill>
                             <a:srgbClr val="801ED7"/>
                           </a:solidFill>
-                          <a:latin typeface="Arial"/>
+                          <a:latin typeface="Helvetica Neue"/>
                         </a:rPr>
                         <a:t>3.4×</a:t>
                       </a:r>
                     </a:p>
                   </a:txBody>
-                  <a:tcPr anchor="ctr" marL="13716" marR="13716" marT="0" marB="0">
+                  <a:tcPr anchor="ctr" marL="20574" marR="20574" marT="0" marB="0">
                     <a:solidFill>
                       <a:srgbClr val="FAF9FE"/>
                     </a:solidFill>
@@ -14213,13 +14519,13 @@
                           <a:solidFill>
                             <a:srgbClr val="801ED7"/>
                           </a:solidFill>
-                          <a:latin typeface="Arial"/>
+                          <a:latin typeface="Helvetica Neue"/>
                         </a:rPr>
                         <a:t>3.9×</a:t>
                       </a:r>
                     </a:p>
                   </a:txBody>
-                  <a:tcPr anchor="ctr" marL="13716" marR="13716" marT="0" marB="0">
+                  <a:tcPr anchor="ctr" marL="20574" marR="20574" marT="0" marB="0">
                     <a:solidFill>
                       <a:srgbClr val="FAF9FE"/>
                     </a:solidFill>
@@ -14238,13 +14544,13 @@
                           <a:solidFill>
                             <a:srgbClr val="801ED7"/>
                           </a:solidFill>
-                          <a:latin typeface="Arial"/>
+                          <a:latin typeface="Helvetica Neue"/>
                         </a:rPr>
                         <a:t>Cost / mo</a:t>
                       </a:r>
                     </a:p>
                   </a:txBody>
-                  <a:tcPr anchor="ctr" marL="41148" marR="13716">
+                  <a:tcPr anchor="ctr" marL="20574" marR="20574" marT="0" marB="0">
                     <a:solidFill>
                       <a:srgbClr val="EFEDFF"/>
                     </a:solidFill>
@@ -14261,13 +14567,13 @@
                           <a:solidFill>
                             <a:srgbClr val="555266"/>
                           </a:solidFill>
-                          <a:latin typeface="Arial"/>
+                          <a:latin typeface="Helvetica Neue"/>
                         </a:rPr>
                         <a:t>$22k</a:t>
                       </a:r>
                     </a:p>
                   </a:txBody>
-                  <a:tcPr anchor="ctr" marL="13716" marR="13716" marT="0" marB="0">
+                  <a:tcPr anchor="ctr" marL="20574" marR="20574" marT="0" marB="0">
                     <a:solidFill>
                       <a:srgbClr val="FFFFFF"/>
                     </a:solidFill>
@@ -14284,13 +14590,13 @@
                           <a:solidFill>
                             <a:srgbClr val="555266"/>
                           </a:solidFill>
-                          <a:latin typeface="Arial"/>
+                          <a:latin typeface="Helvetica Neue"/>
                         </a:rPr>
                         <a:t>$22k</a:t>
                       </a:r>
                     </a:p>
                   </a:txBody>
-                  <a:tcPr anchor="ctr" marL="13716" marR="13716" marT="0" marB="0">
+                  <a:tcPr anchor="ctr" marL="20574" marR="20574" marT="0" marB="0">
                     <a:solidFill>
                       <a:srgbClr val="FFFFFF"/>
                     </a:solidFill>
@@ -14307,13 +14613,13 @@
                           <a:solidFill>
                             <a:srgbClr val="555266"/>
                           </a:solidFill>
-                          <a:latin typeface="Arial"/>
+                          <a:latin typeface="Helvetica Neue"/>
                         </a:rPr>
                         <a:t>$22k</a:t>
                       </a:r>
                     </a:p>
                   </a:txBody>
-                  <a:tcPr anchor="ctr" marL="13716" marR="13716" marT="0" marB="0">
+                  <a:tcPr anchor="ctr" marL="20574" marR="20574" marT="0" marB="0">
                     <a:solidFill>
                       <a:srgbClr val="FFFFFF"/>
                     </a:solidFill>
@@ -14330,13 +14636,13 @@
                           <a:solidFill>
                             <a:srgbClr val="555266"/>
                           </a:solidFill>
-                          <a:latin typeface="Arial"/>
+                          <a:latin typeface="Helvetica Neue"/>
                         </a:rPr>
                         <a:t>$22k</a:t>
                       </a:r>
                     </a:p>
                   </a:txBody>
-                  <a:tcPr anchor="ctr" marL="13716" marR="13716" marT="0" marB="0">
+                  <a:tcPr anchor="ctr" marL="20574" marR="20574" marT="0" marB="0">
                     <a:solidFill>
                       <a:srgbClr val="FFFFFF"/>
                     </a:solidFill>
@@ -14353,13 +14659,13 @@
                           <a:solidFill>
                             <a:srgbClr val="555266"/>
                           </a:solidFill>
-                          <a:latin typeface="Arial"/>
+                          <a:latin typeface="Helvetica Neue"/>
                         </a:rPr>
                         <a:t>$22k</a:t>
                       </a:r>
                     </a:p>
                   </a:txBody>
-                  <a:tcPr anchor="ctr" marL="13716" marR="13716" marT="0" marB="0">
+                  <a:tcPr anchor="ctr" marL="20574" marR="20574" marT="0" marB="0">
                     <a:solidFill>
                       <a:srgbClr val="FFFFFF"/>
                     </a:solidFill>
@@ -14376,13 +14682,13 @@
                           <a:solidFill>
                             <a:srgbClr val="555266"/>
                           </a:solidFill>
-                          <a:latin typeface="Arial"/>
+                          <a:latin typeface="Helvetica Neue"/>
                         </a:rPr>
                         <a:t>$22k</a:t>
                       </a:r>
                     </a:p>
                   </a:txBody>
-                  <a:tcPr anchor="ctr" marL="13716" marR="13716" marT="0" marB="0">
+                  <a:tcPr anchor="ctr" marL="20574" marR="20574" marT="0" marB="0">
                     <a:solidFill>
                       <a:srgbClr val="FFFFFF"/>
                     </a:solidFill>
@@ -14399,13 +14705,13 @@
                           <a:solidFill>
                             <a:srgbClr val="555266"/>
                           </a:solidFill>
-                          <a:latin typeface="Arial"/>
+                          <a:latin typeface="Helvetica Neue"/>
                         </a:rPr>
                         <a:t>$22k</a:t>
                       </a:r>
                     </a:p>
                   </a:txBody>
-                  <a:tcPr anchor="ctr" marL="13716" marR="13716" marT="0" marB="0">
+                  <a:tcPr anchor="ctr" marL="20574" marR="20574" marT="0" marB="0">
                     <a:solidFill>
                       <a:srgbClr val="FFFFFF"/>
                     </a:solidFill>
@@ -14422,13 +14728,13 @@
                           <a:solidFill>
                             <a:srgbClr val="555266"/>
                           </a:solidFill>
-                          <a:latin typeface="Arial"/>
+                          <a:latin typeface="Helvetica Neue"/>
                         </a:rPr>
                         <a:t>$22k</a:t>
                       </a:r>
                     </a:p>
                   </a:txBody>
-                  <a:tcPr anchor="ctr" marL="13716" marR="13716" marT="0" marB="0">
+                  <a:tcPr anchor="ctr" marL="20574" marR="20574" marT="0" marB="0">
                     <a:solidFill>
                       <a:srgbClr val="FFFFFF"/>
                     </a:solidFill>
@@ -14445,13 +14751,13 @@
                           <a:solidFill>
                             <a:srgbClr val="555266"/>
                           </a:solidFill>
-                          <a:latin typeface="Arial"/>
+                          <a:latin typeface="Helvetica Neue"/>
                         </a:rPr>
                         <a:t>$22k</a:t>
                       </a:r>
                     </a:p>
                   </a:txBody>
-                  <a:tcPr anchor="ctr" marL="13716" marR="13716" marT="0" marB="0">
+                  <a:tcPr anchor="ctr" marL="20574" marR="20574" marT="0" marB="0">
                     <a:solidFill>
                       <a:srgbClr val="FFFFFF"/>
                     </a:solidFill>
@@ -14468,13 +14774,13 @@
                           <a:solidFill>
                             <a:srgbClr val="555266"/>
                           </a:solidFill>
-                          <a:latin typeface="Arial"/>
+                          <a:latin typeface="Helvetica Neue"/>
                         </a:rPr>
                         <a:t>$22k</a:t>
                       </a:r>
                     </a:p>
                   </a:txBody>
-                  <a:tcPr anchor="ctr" marL="13716" marR="13716" marT="0" marB="0">
+                  <a:tcPr anchor="ctr" marL="20574" marR="20574" marT="0" marB="0">
                     <a:solidFill>
                       <a:srgbClr val="FFFFFF"/>
                     </a:solidFill>
@@ -14491,13 +14797,13 @@
                           <a:solidFill>
                             <a:srgbClr val="555266"/>
                           </a:solidFill>
-                          <a:latin typeface="Arial"/>
+                          <a:latin typeface="Helvetica Neue"/>
                         </a:rPr>
                         <a:t>$22k</a:t>
                       </a:r>
                     </a:p>
                   </a:txBody>
-                  <a:tcPr anchor="ctr" marL="13716" marR="13716" marT="0" marB="0">
+                  <a:tcPr anchor="ctr" marL="20574" marR="20574" marT="0" marB="0">
                     <a:solidFill>
                       <a:srgbClr val="FFFFFF"/>
                     </a:solidFill>
@@ -14514,13 +14820,13 @@
                           <a:solidFill>
                             <a:srgbClr val="555266"/>
                           </a:solidFill>
-                          <a:latin typeface="Arial"/>
+                          <a:latin typeface="Helvetica Neue"/>
                         </a:rPr>
                         <a:t>$22k</a:t>
                       </a:r>
                     </a:p>
                   </a:txBody>
-                  <a:tcPr anchor="ctr" marL="13716" marR="13716" marT="0" marB="0">
+                  <a:tcPr anchor="ctr" marL="20574" marR="20574" marT="0" marB="0">
                     <a:solidFill>
                       <a:srgbClr val="FFFFFF"/>
                     </a:solidFill>
@@ -14533,13 +14839,13 @@
       </p:graphicFrame>
       <p:sp>
         <p:nvSpPr>
-          <p:cNvPr id="45" name="TextBox 44"/>
+          <p:cNvPr id="46" name="TextBox 45"/>
           <p:cNvSpPr txBox="1"/>
           <p:nvPr/>
         </p:nvSpPr>
         <p:spPr>
           <a:xfrm>
-            <a:off x="411479" y="4766310"/>
+            <a:off x="411479" y="4732020"/>
             <a:ext cx="8320811" cy="288036"/>
           </a:xfrm>
           <a:prstGeom prst="rect">
@@ -14563,7 +14869,7 @@
                 <a:solidFill>
                   <a:srgbClr val="8A8699"/>
                 </a:solidFill>
-                <a:latin typeface="Arial"/>
+                <a:latin typeface="Helvetica Neue"/>
               </a:rPr>
               <a:t>Cumulative value in USD at the target lift ($1.64M annual run-rate ÷ 12 ≈ $136k/month). Audience ramps 25%→50%→75%→100% across Feb–May 2027. ROI vs $264k early-sign subscription; at $317k standard rate, year-end ROI is 3.2×. FX £1 = $1.32 (30 Jun 2026).</a:t>
             </a:r>
@@ -14590,14 +14896,117 @@
       <p:grpSpPr/>
       <p:sp>
         <p:nvSpPr>
-          <p:cNvPr id="2" name="TextBox 1"/>
+          <p:cNvPr id="2" name="Rectangle 1"/>
+          <p:cNvSpPr/>
+          <p:nvPr/>
+        </p:nvSpPr>
+        <p:spPr>
+          <a:xfrm>
+            <a:off x="0" y="0"/>
+            <a:ext cx="9143771" cy="5143500"/>
+          </a:xfrm>
+          <a:prstGeom prst="rect">
+            <a:avLst/>
+          </a:prstGeom>
+          <a:solidFill>
+            <a:srgbClr val="FFFFFF"/>
+          </a:solidFill>
+          <a:ln>
+            <a:noFill/>
+          </a:ln>
+          <a:effectLst/>
+        </p:spPr>
+        <p:style>
+          <a:lnRef idx="1">
+            <a:schemeClr val="accent1"/>
+          </a:lnRef>
+          <a:fillRef idx="3">
+            <a:schemeClr val="accent1"/>
+          </a:fillRef>
+          <a:effectRef idx="2">
+            <a:schemeClr val="accent1"/>
+          </a:effectRef>
+          <a:fontRef idx="minor">
+            <a:schemeClr val="lt1"/>
+          </a:fontRef>
+        </p:style>
+        <p:txBody>
+          <a:bodyPr rtlCol="0" anchor="ctr"/>
+          <a:lstStyle/>
+          <a:p>
+            <a:pPr algn="ctr"/>
+          </a:p>
+        </p:txBody>
+      </p:sp>
+      <p:pic>
+        <p:nvPicPr>
+          <p:cNvPr id="3" name="Picture 2" descr="brazeai_logo.png"/>
+          <p:cNvPicPr>
+            <a:picLocks noChangeAspect="1"/>
+          </p:cNvPicPr>
+          <p:nvPr/>
+        </p:nvPicPr>
+        <p:blipFill>
+          <a:blip r:embed="rId2"/>
+          <a:stretch>
+            <a:fillRect/>
+          </a:stretch>
+        </p:blipFill>
+        <p:spPr>
+          <a:xfrm>
+            <a:off x="8090607" y="233172"/>
+            <a:ext cx="641684" cy="274320"/>
+          </a:xfrm>
+          <a:prstGeom prst="rect">
+            <a:avLst/>
+          </a:prstGeom>
+        </p:spPr>
+      </p:pic>
+      <p:sp>
+        <p:nvSpPr>
+          <p:cNvPr id="4" name="TextBox 3"/>
           <p:cNvSpPr txBox="1"/>
           <p:nvPr/>
         </p:nvSpPr>
         <p:spPr>
           <a:xfrm>
+            <a:off x="8183651" y="4855464"/>
+            <a:ext cx="548640" cy="205739"/>
+          </a:xfrm>
+          <a:prstGeom prst="rect">
+            <a:avLst/>
+          </a:prstGeom>
+          <a:noFill/>
+        </p:spPr>
+        <p:txBody>
+          <a:bodyPr wrap="square" lIns="0" rIns="0" tIns="0" bIns="0">
+            <a:spAutoFit/>
+          </a:bodyPr>
+          <a:lstStyle/>
+          <a:p>
+            <a:pPr algn="r"/>
+            <a:r>
+              <a:rPr sz="675" b="0" i="0">
+                <a:solidFill>
+                  <a:srgbClr val="8A8699"/>
+                </a:solidFill>
+                <a:latin typeface="Helvetica Neue"/>
+              </a:rPr>
+              <a:t>8</a:t>
+            </a:r>
+          </a:p>
+        </p:txBody>
+      </p:sp>
+      <p:sp>
+        <p:nvSpPr>
+          <p:cNvPr id="5" name="TextBox 4"/>
+          <p:cNvSpPr txBox="1"/>
+          <p:nvPr/>
+        </p:nvSpPr>
+        <p:spPr>
+          <a:xfrm>
             <a:off x="411479" y="342900"/>
-            <a:ext cx="8183651" cy="480059"/>
+            <a:ext cx="8183651" cy="548640"/>
           </a:xfrm>
           <a:prstGeom prst="rect">
             <a:avLst/>
@@ -14620,7 +15029,7 @@
                 <a:solidFill>
                   <a:srgbClr val="801ED7"/>
                 </a:solidFill>
-                <a:latin typeface="Arial"/>
+                <a:latin typeface="Helvetica Neue"/>
               </a:rPr>
               <a:t>ROI compounds as the model trains</a:t>
             </a:r>
@@ -14629,7 +15038,7 @@
       </p:sp>
       <p:sp>
         <p:nvSpPr>
-          <p:cNvPr id="3" name="TextBox 2"/>
+          <p:cNvPr id="6" name="TextBox 5"/>
           <p:cNvSpPr txBox="1"/>
           <p:nvPr/>
         </p:nvSpPr>
@@ -14659,7 +15068,7 @@
                 <a:solidFill>
                   <a:srgbClr val="FFA524"/>
                 </a:solidFill>
-                <a:latin typeface="Arial"/>
+                <a:latin typeface="Helvetica Neue"/>
               </a:rPr>
               <a:t>Year-1 ramps to full run-rate; the subscription stays flat (Engagement · Target)</a:t>
             </a:r>
@@ -14668,7 +15077,7 @@
       </p:sp>
       <p:sp>
         <p:nvSpPr>
-          <p:cNvPr id="4" name="Rectangle 3"/>
+          <p:cNvPr id="7" name="Rectangle 6"/>
           <p:cNvSpPr/>
           <p:nvPr/>
         </p:nvSpPr>
@@ -14710,68 +15119,9 @@
           </a:p>
         </p:txBody>
       </p:sp>
-      <p:pic>
-        <p:nvPicPr>
-          <p:cNvPr id="5" name="Picture 4" descr="brazeai_logo.png"/>
-          <p:cNvPicPr>
-            <a:picLocks noChangeAspect="1"/>
-          </p:cNvPicPr>
-          <p:nvPr/>
-        </p:nvPicPr>
-        <p:blipFill>
-          <a:blip r:embed="rId2"/>
-          <a:stretch>
-            <a:fillRect/>
-          </a:stretch>
-        </p:blipFill>
-        <p:spPr>
-          <a:xfrm>
-            <a:off x="8090607" y="233172"/>
-            <a:ext cx="641684" cy="274320"/>
-          </a:xfrm>
-          <a:prstGeom prst="rect">
-            <a:avLst/>
-          </a:prstGeom>
-        </p:spPr>
-      </p:pic>
-      <p:sp>
-        <p:nvSpPr>
-          <p:cNvPr id="6" name="TextBox 5"/>
-          <p:cNvSpPr txBox="1"/>
-          <p:nvPr/>
-        </p:nvSpPr>
-        <p:spPr>
-          <a:xfrm>
-            <a:off x="8183651" y="4855464"/>
-            <a:ext cx="548640" cy="205739"/>
-          </a:xfrm>
-          <a:prstGeom prst="rect">
-            <a:avLst/>
-          </a:prstGeom>
-          <a:noFill/>
-        </p:spPr>
-        <p:txBody>
-          <a:bodyPr wrap="square" lIns="0" rIns="0" tIns="0" bIns="0">
-            <a:spAutoFit/>
-          </a:bodyPr>
-          <a:lstStyle/>
-          <a:p>
-            <a:pPr algn="r"/>
-            <a:r>
-              <a:rPr sz="675" b="0" i="0">
-                <a:solidFill>
-                  <a:srgbClr val="8A8699"/>
-                </a:solidFill>
-                <a:latin typeface="Arial"/>
-              </a:rPr>
-              <a:t>8</a:t>
-            </a:r>
-          </a:p>
-        </p:txBody>
-      </p:sp>
-      <p:sp>
-        <p:nvSpPr>
-          <p:cNvPr id="7" name="Rounded Rectangle 6"/>
+      <p:sp>
+        <p:nvSpPr>
+          <p:cNvPr id="8" name="Rounded Rectangle 7"/>
           <p:cNvSpPr/>
           <p:nvPr/>
         </p:nvSpPr>
@@ -14819,7 +15169,7 @@
       </p:sp>
       <p:sp>
         <p:nvSpPr>
-          <p:cNvPr id="8" name="Rectangle 7"/>
+          <p:cNvPr id="9" name="Rectangle 8"/>
           <p:cNvSpPr/>
           <p:nvPr/>
         </p:nvSpPr>
@@ -14863,7 +15213,7 @@
       </p:sp>
       <p:sp>
         <p:nvSpPr>
-          <p:cNvPr id="9" name="TextBox 8"/>
+          <p:cNvPr id="10" name="TextBox 9"/>
           <p:cNvSpPr txBox="1"/>
           <p:nvPr/>
         </p:nvSpPr>
@@ -14889,7 +15239,7 @@
                 <a:solidFill>
                   <a:srgbClr val="801ED7"/>
                 </a:solidFill>
-                <a:latin typeface="Arial"/>
+                <a:latin typeface="Helvetica Neue"/>
               </a:rPr>
               <a:t>Year 1  (ramp)</a:t>
             </a:r>
@@ -14898,7 +15248,7 @@
       </p:sp>
       <p:sp>
         <p:nvSpPr>
-          <p:cNvPr id="10" name="TextBox 9"/>
+          <p:cNvPr id="11" name="TextBox 10"/>
           <p:cNvSpPr txBox="1"/>
           <p:nvPr/>
         </p:nvSpPr>
@@ -14924,7 +15274,7 @@
                 <a:solidFill>
                   <a:srgbClr val="1A1A24"/>
                 </a:solidFill>
-                <a:latin typeface="Arial"/>
+                <a:latin typeface="Helvetica Neue"/>
               </a:rPr>
               <a:t>$1.09M</a:t>
             </a:r>
@@ -14933,7 +15283,7 @@
       </p:sp>
       <p:sp>
         <p:nvSpPr>
-          <p:cNvPr id="11" name="TextBox 10"/>
+          <p:cNvPr id="12" name="TextBox 11"/>
           <p:cNvSpPr txBox="1"/>
           <p:nvPr/>
         </p:nvSpPr>
@@ -14959,7 +15309,7 @@
                 <a:solidFill>
                   <a:srgbClr val="FFA524"/>
                 </a:solidFill>
-                <a:latin typeface="Arial"/>
+                <a:latin typeface="Helvetica Neue"/>
               </a:rPr>
               <a:t>≈ £825,000</a:t>
             </a:r>
@@ -14968,7 +15318,7 @@
       </p:sp>
       <p:sp>
         <p:nvSpPr>
-          <p:cNvPr id="12" name="TextBox 11"/>
+          <p:cNvPr id="13" name="TextBox 12"/>
           <p:cNvSpPr txBox="1"/>
           <p:nvPr/>
         </p:nvSpPr>
@@ -14998,7 +15348,7 @@
                 <a:solidFill>
                   <a:srgbClr val="555266"/>
                 </a:solidFill>
-                <a:latin typeface="Arial"/>
+                <a:latin typeface="Helvetica Neue"/>
               </a:rPr>
               <a:t>In-year 2027 value</a:t>
             </a:r>
@@ -15017,7 +15367,7 @@
                 <a:solidFill>
                   <a:srgbClr val="555266"/>
                 </a:solidFill>
-                <a:latin typeface="Arial"/>
+                <a:latin typeface="Helvetica Neue"/>
               </a:rPr>
               <a:t>Feb go-live, partial year</a:t>
             </a:r>
@@ -15026,7 +15376,7 @@
       </p:sp>
       <p:sp>
         <p:nvSpPr>
-          <p:cNvPr id="13" name="Rounded Rectangle 12"/>
+          <p:cNvPr id="14" name="Rounded Rectangle 13"/>
           <p:cNvSpPr/>
           <p:nvPr/>
         </p:nvSpPr>
@@ -15072,7 +15422,7 @@
       </p:sp>
       <p:sp>
         <p:nvSpPr>
-          <p:cNvPr id="14" name="TextBox 13"/>
+          <p:cNvPr id="15" name="TextBox 14"/>
           <p:cNvSpPr txBox="1"/>
           <p:nvPr/>
         </p:nvSpPr>
@@ -15098,7 +15448,7 @@
                 <a:solidFill>
                   <a:srgbClr val="FFA524"/>
                 </a:solidFill>
-                <a:latin typeface="Arial"/>
+                <a:latin typeface="Helvetica Neue"/>
               </a:rPr>
               <a:t>Year 2</a:t>
             </a:r>
@@ -15107,7 +15457,7 @@
       </p:sp>
       <p:sp>
         <p:nvSpPr>
-          <p:cNvPr id="15" name="TextBox 14"/>
+          <p:cNvPr id="16" name="TextBox 15"/>
           <p:cNvSpPr txBox="1"/>
           <p:nvPr/>
         </p:nvSpPr>
@@ -15133,7 +15483,7 @@
                 <a:solidFill>
                   <a:srgbClr val="FFFFFF"/>
                 </a:solidFill>
-                <a:latin typeface="Arial"/>
+                <a:latin typeface="Helvetica Neue"/>
               </a:rPr>
               <a:t>$1.64M</a:t>
             </a:r>
@@ -15142,7 +15492,7 @@
       </p:sp>
       <p:sp>
         <p:nvSpPr>
-          <p:cNvPr id="16" name="TextBox 15"/>
+          <p:cNvPr id="17" name="TextBox 16"/>
           <p:cNvSpPr txBox="1"/>
           <p:nvPr/>
         </p:nvSpPr>
@@ -15168,7 +15518,7 @@
                 <a:solidFill>
                   <a:srgbClr val="FFA524"/>
                 </a:solidFill>
-                <a:latin typeface="Arial"/>
+                <a:latin typeface="Helvetica Neue"/>
               </a:rPr>
               <a:t>≈ £1.24M</a:t>
             </a:r>
@@ -15177,7 +15527,7 @@
       </p:sp>
       <p:sp>
         <p:nvSpPr>
-          <p:cNvPr id="17" name="TextBox 16"/>
+          <p:cNvPr id="18" name="TextBox 17"/>
           <p:cNvSpPr txBox="1"/>
           <p:nvPr/>
         </p:nvSpPr>
@@ -15207,7 +15557,7 @@
                 <a:solidFill>
                   <a:srgbClr val="D9D3FB"/>
                 </a:solidFill>
-                <a:latin typeface="Arial"/>
+                <a:latin typeface="Helvetica Neue"/>
               </a:rPr>
               <a:t>Full run-rate incremental</a:t>
             </a:r>
@@ -15226,7 +15576,7 @@
                 <a:solidFill>
                   <a:srgbClr val="D9D3FB"/>
                 </a:solidFill>
-                <a:latin typeface="Arial"/>
+                <a:latin typeface="Helvetica Neue"/>
               </a:rPr>
               <a:t>value over BAU</a:t>
             </a:r>
@@ -15235,7 +15585,7 @@
       </p:sp>
       <p:sp>
         <p:nvSpPr>
-          <p:cNvPr id="18" name="Rounded Rectangle 17"/>
+          <p:cNvPr id="19" name="Rounded Rectangle 18"/>
           <p:cNvSpPr/>
           <p:nvPr/>
         </p:nvSpPr>
@@ -15283,7 +15633,7 @@
       </p:sp>
       <p:sp>
         <p:nvSpPr>
-          <p:cNvPr id="19" name="Rectangle 18"/>
+          <p:cNvPr id="20" name="Rectangle 19"/>
           <p:cNvSpPr/>
           <p:nvPr/>
         </p:nvSpPr>
@@ -15327,7 +15677,7 @@
       </p:sp>
       <p:sp>
         <p:nvSpPr>
-          <p:cNvPr id="20" name="TextBox 19"/>
+          <p:cNvPr id="21" name="TextBox 20"/>
           <p:cNvSpPr txBox="1"/>
           <p:nvPr/>
         </p:nvSpPr>
@@ -15353,7 +15703,7 @@
                 <a:solidFill>
                   <a:srgbClr val="801ED7"/>
                 </a:solidFill>
-                <a:latin typeface="Arial"/>
+                <a:latin typeface="Helvetica Neue"/>
               </a:rPr>
               <a:t>Year 3</a:t>
             </a:r>
@@ -15362,7 +15712,7 @@
       </p:sp>
       <p:sp>
         <p:nvSpPr>
-          <p:cNvPr id="21" name="TextBox 20"/>
+          <p:cNvPr id="22" name="TextBox 21"/>
           <p:cNvSpPr txBox="1"/>
           <p:nvPr/>
         </p:nvSpPr>
@@ -15388,7 +15738,7 @@
                 <a:solidFill>
                   <a:srgbClr val="1A1A24"/>
                 </a:solidFill>
-                <a:latin typeface="Arial"/>
+                <a:latin typeface="Helvetica Neue"/>
               </a:rPr>
               <a:t>$1.64M</a:t>
             </a:r>
@@ -15397,7 +15747,7 @@
       </p:sp>
       <p:sp>
         <p:nvSpPr>
-          <p:cNvPr id="22" name="TextBox 21"/>
+          <p:cNvPr id="23" name="TextBox 22"/>
           <p:cNvSpPr txBox="1"/>
           <p:nvPr/>
         </p:nvSpPr>
@@ -15423,7 +15773,7 @@
                 <a:solidFill>
                   <a:srgbClr val="FFA524"/>
                 </a:solidFill>
-                <a:latin typeface="Arial"/>
+                <a:latin typeface="Helvetica Neue"/>
               </a:rPr>
               <a:t>≈ £1.24M</a:t>
             </a:r>
@@ -15432,7 +15782,7 @@
       </p:sp>
       <p:sp>
         <p:nvSpPr>
-          <p:cNvPr id="23" name="TextBox 22"/>
+          <p:cNvPr id="24" name="TextBox 23"/>
           <p:cNvSpPr txBox="1"/>
           <p:nvPr/>
         </p:nvSpPr>
@@ -15462,7 +15812,7 @@
                 <a:solidFill>
                   <a:srgbClr val="555266"/>
                 </a:solidFill>
-                <a:latin typeface="Arial"/>
+                <a:latin typeface="Helvetica Neue"/>
               </a:rPr>
               <a:t>Full run-rate continues;</a:t>
             </a:r>
@@ -15481,7 +15831,7 @@
                 <a:solidFill>
                   <a:srgbClr val="555266"/>
                 </a:solidFill>
-                <a:latin typeface="Arial"/>
+                <a:latin typeface="Helvetica Neue"/>
               </a:rPr>
               <a:t>subscription unchanged</a:t>
             </a:r>
@@ -15490,7 +15840,7 @@
       </p:sp>
       <p:sp>
         <p:nvSpPr>
-          <p:cNvPr id="24" name="Rounded Rectangle 23"/>
+          <p:cNvPr id="25" name="Rounded Rectangle 24"/>
           <p:cNvSpPr/>
           <p:nvPr/>
         </p:nvSpPr>
@@ -15501,7 +15851,7 @@
           </a:xfrm>
           <a:prstGeom prst="roundRect">
             <a:avLst>
-              <a:gd name="adj" fmla="val 6000"/>
+              <a:gd name="adj" fmla="val 5000"/>
             </a:avLst>
           </a:prstGeom>
           <a:solidFill>
@@ -15538,7 +15888,7 @@
       </p:sp>
       <p:sp>
         <p:nvSpPr>
-          <p:cNvPr id="25" name="TextBox 24"/>
+          <p:cNvPr id="26" name="TextBox 25"/>
           <p:cNvSpPr txBox="1"/>
           <p:nvPr/>
         </p:nvSpPr>
@@ -15568,7 +15918,7 @@
                 <a:solidFill>
                   <a:srgbClr val="801ED7"/>
                 </a:solidFill>
-                <a:latin typeface="Arial"/>
+                <a:latin typeface="Helvetica Neue"/>
               </a:rPr>
               <a:t>$264,000   </a:t>
             </a:r>
@@ -15577,7 +15927,7 @@
                 <a:solidFill>
                   <a:srgbClr val="555266"/>
                 </a:solidFill>
-                <a:latin typeface="Arial"/>
+                <a:latin typeface="Helvetica Neue"/>
               </a:rPr>
               <a:t>Subscription · year 1</a:t>
             </a:r>
@@ -15586,7 +15936,7 @@
       </p:sp>
       <p:sp>
         <p:nvSpPr>
-          <p:cNvPr id="26" name="Rounded Rectangle 25"/>
+          <p:cNvPr id="27" name="Rounded Rectangle 26"/>
           <p:cNvSpPr/>
           <p:nvPr/>
         </p:nvSpPr>
@@ -15597,7 +15947,7 @@
           </a:xfrm>
           <a:prstGeom prst="roundRect">
             <a:avLst>
-              <a:gd name="adj" fmla="val 6000"/>
+              <a:gd name="adj" fmla="val 5000"/>
             </a:avLst>
           </a:prstGeom>
           <a:solidFill>
@@ -15634,7 +15984,7 @@
       </p:sp>
       <p:sp>
         <p:nvSpPr>
-          <p:cNvPr id="27" name="TextBox 26"/>
+          <p:cNvPr id="28" name="TextBox 27"/>
           <p:cNvSpPr txBox="1"/>
           <p:nvPr/>
         </p:nvSpPr>
@@ -15664,7 +16014,7 @@
                 <a:solidFill>
                   <a:srgbClr val="801ED7"/>
                 </a:solidFill>
-                <a:latin typeface="Arial"/>
+                <a:latin typeface="Helvetica Neue"/>
               </a:rPr>
               <a:t>4.1×   </a:t>
             </a:r>
@@ -15673,7 +16023,7 @@
                 <a:solidFill>
                   <a:srgbClr val="555266"/>
                 </a:solidFill>
-                <a:latin typeface="Arial"/>
+                <a:latin typeface="Helvetica Neue"/>
               </a:rPr>
               <a:t>Year 1 ROI</a:t>
             </a:r>
@@ -15682,7 +16032,7 @@
       </p:sp>
       <p:sp>
         <p:nvSpPr>
-          <p:cNvPr id="28" name="Rounded Rectangle 27"/>
+          <p:cNvPr id="29" name="Rounded Rectangle 28"/>
           <p:cNvSpPr/>
           <p:nvPr/>
         </p:nvSpPr>
@@ -15693,7 +16043,7 @@
           </a:xfrm>
           <a:prstGeom prst="roundRect">
             <a:avLst>
-              <a:gd name="adj" fmla="val 6000"/>
+              <a:gd name="adj" fmla="val 5000"/>
             </a:avLst>
           </a:prstGeom>
           <a:solidFill>
@@ -15730,7 +16080,7 @@
       </p:sp>
       <p:sp>
         <p:nvSpPr>
-          <p:cNvPr id="29" name="TextBox 28"/>
+          <p:cNvPr id="30" name="TextBox 29"/>
           <p:cNvSpPr txBox="1"/>
           <p:nvPr/>
         </p:nvSpPr>
@@ -15760,7 +16110,7 @@
                 <a:solidFill>
                   <a:srgbClr val="801ED7"/>
                 </a:solidFill>
-                <a:latin typeface="Arial"/>
+                <a:latin typeface="Helvetica Neue"/>
               </a:rPr>
               <a:t>6.2×   </a:t>
             </a:r>
@@ -15769,7 +16119,7 @@
                 <a:solidFill>
                   <a:srgbClr val="555266"/>
                 </a:solidFill>
-                <a:latin typeface="Arial"/>
+                <a:latin typeface="Helvetica Neue"/>
               </a:rPr>
               <a:t>Year 2 / 3 ROI</a:t>
             </a:r>
@@ -15778,7 +16128,7 @@
       </p:sp>
       <p:sp>
         <p:nvSpPr>
-          <p:cNvPr id="30" name="TextBox 29"/>
+          <p:cNvPr id="31" name="TextBox 30"/>
           <p:cNvSpPr txBox="1"/>
           <p:nvPr/>
         </p:nvSpPr>
@@ -15808,7 +16158,7 @@
                 <a:solidFill>
                   <a:srgbClr val="8A8699"/>
                 </a:solidFill>
-                <a:latin typeface="Arial"/>
+                <a:latin typeface="Helvetica Neue"/>
               </a:rPr>
               <a:t>ROI = annual incremental value ÷ year-1 subscription. Shown at $264k early-sign rate. At $317k standard rate (after 17 July): Year 1 = 3.4×, Year 2/3 = 5.2×. Low case ($493k run-rate): Year 2 ROI 1.9× / 1.6×. RL models improve at maximising the reward over time.</a:t>
             </a:r>
@@ -15835,14 +16185,117 @@
       <p:grpSpPr/>
       <p:sp>
         <p:nvSpPr>
-          <p:cNvPr id="2" name="TextBox 1"/>
+          <p:cNvPr id="2" name="Rectangle 1"/>
+          <p:cNvSpPr/>
+          <p:nvPr/>
+        </p:nvSpPr>
+        <p:spPr>
+          <a:xfrm>
+            <a:off x="0" y="0"/>
+            <a:ext cx="9143771" cy="5143500"/>
+          </a:xfrm>
+          <a:prstGeom prst="rect">
+            <a:avLst/>
+          </a:prstGeom>
+          <a:solidFill>
+            <a:srgbClr val="FFFFFF"/>
+          </a:solidFill>
+          <a:ln>
+            <a:noFill/>
+          </a:ln>
+          <a:effectLst/>
+        </p:spPr>
+        <p:style>
+          <a:lnRef idx="1">
+            <a:schemeClr val="accent1"/>
+          </a:lnRef>
+          <a:fillRef idx="3">
+            <a:schemeClr val="accent1"/>
+          </a:fillRef>
+          <a:effectRef idx="2">
+            <a:schemeClr val="accent1"/>
+          </a:effectRef>
+          <a:fontRef idx="minor">
+            <a:schemeClr val="lt1"/>
+          </a:fontRef>
+        </p:style>
+        <p:txBody>
+          <a:bodyPr rtlCol="0" anchor="ctr"/>
+          <a:lstStyle/>
+          <a:p>
+            <a:pPr algn="ctr"/>
+          </a:p>
+        </p:txBody>
+      </p:sp>
+      <p:pic>
+        <p:nvPicPr>
+          <p:cNvPr id="3" name="Picture 2" descr="brazeai_logo.png"/>
+          <p:cNvPicPr>
+            <a:picLocks noChangeAspect="1"/>
+          </p:cNvPicPr>
+          <p:nvPr/>
+        </p:nvPicPr>
+        <p:blipFill>
+          <a:blip r:embed="rId2"/>
+          <a:stretch>
+            <a:fillRect/>
+          </a:stretch>
+        </p:blipFill>
+        <p:spPr>
+          <a:xfrm>
+            <a:off x="8090607" y="233172"/>
+            <a:ext cx="641684" cy="274320"/>
+          </a:xfrm>
+          <a:prstGeom prst="rect">
+            <a:avLst/>
+          </a:prstGeom>
+        </p:spPr>
+      </p:pic>
+      <p:sp>
+        <p:nvSpPr>
+          <p:cNvPr id="4" name="TextBox 3"/>
           <p:cNvSpPr txBox="1"/>
           <p:nvPr/>
         </p:nvSpPr>
         <p:spPr>
           <a:xfrm>
+            <a:off x="8183651" y="4855464"/>
+            <a:ext cx="548640" cy="205739"/>
+          </a:xfrm>
+          <a:prstGeom prst="rect">
+            <a:avLst/>
+          </a:prstGeom>
+          <a:noFill/>
+        </p:spPr>
+        <p:txBody>
+          <a:bodyPr wrap="square" lIns="0" rIns="0" tIns="0" bIns="0">
+            <a:spAutoFit/>
+          </a:bodyPr>
+          <a:lstStyle/>
+          <a:p>
+            <a:pPr algn="r"/>
+            <a:r>
+              <a:rPr sz="675" b="0" i="0">
+                <a:solidFill>
+                  <a:srgbClr val="8A8699"/>
+                </a:solidFill>
+                <a:latin typeface="Helvetica Neue"/>
+              </a:rPr>
+              <a:t>9</a:t>
+            </a:r>
+          </a:p>
+        </p:txBody>
+      </p:sp>
+      <p:sp>
+        <p:nvSpPr>
+          <p:cNvPr id="5" name="TextBox 4"/>
+          <p:cNvSpPr txBox="1"/>
+          <p:nvPr/>
+        </p:nvSpPr>
+        <p:spPr>
+          <a:xfrm>
             <a:off x="411479" y="342900"/>
-            <a:ext cx="8183651" cy="480059"/>
+            <a:ext cx="8183651" cy="548640"/>
           </a:xfrm>
           <a:prstGeom prst="rect">
             <a:avLst/>
@@ -15865,7 +16318,7 @@
                 <a:solidFill>
                   <a:srgbClr val="801ED7"/>
                 </a:solidFill>
-                <a:latin typeface="Arial"/>
+                <a:latin typeface="Helvetica Neue"/>
               </a:rPr>
               <a:t>How we get to 2.3× ROI by July 2027</a:t>
             </a:r>
@@ -15874,7 +16327,7 @@
       </p:sp>
       <p:sp>
         <p:nvSpPr>
-          <p:cNvPr id="3" name="TextBox 2"/>
+          <p:cNvPr id="6" name="TextBox 5"/>
           <p:cNvSpPr txBox="1"/>
           <p:nvPr/>
         </p:nvSpPr>
@@ -15904,7 +16357,7 @@
                 <a:solidFill>
                   <a:srgbClr val="FFA524"/>
                 </a:solidFill>
-                <a:latin typeface="Arial"/>
+                <a:latin typeface="Helvetica Neue"/>
               </a:rPr>
               <a:t>ROI multiple = cumulative incremental value to date ÷ annual subscription. Build, month by month.</a:t>
             </a:r>
@@ -15913,7 +16366,7 @@
       </p:sp>
       <p:sp>
         <p:nvSpPr>
-          <p:cNvPr id="4" name="Rectangle 3"/>
+          <p:cNvPr id="7" name="Rectangle 6"/>
           <p:cNvSpPr/>
           <p:nvPr/>
         </p:nvSpPr>
@@ -15955,68 +16408,9 @@
           </a:p>
         </p:txBody>
       </p:sp>
-      <p:pic>
-        <p:nvPicPr>
-          <p:cNvPr id="5" name="Picture 4" descr="brazeai_logo.png"/>
-          <p:cNvPicPr>
-            <a:picLocks noChangeAspect="1"/>
-          </p:cNvPicPr>
-          <p:nvPr/>
-        </p:nvPicPr>
-        <p:blipFill>
-          <a:blip r:embed="rId2"/>
-          <a:stretch>
-            <a:fillRect/>
-          </a:stretch>
-        </p:blipFill>
-        <p:spPr>
-          <a:xfrm>
-            <a:off x="8090607" y="233172"/>
-            <a:ext cx="641684" cy="274320"/>
-          </a:xfrm>
-          <a:prstGeom prst="rect">
-            <a:avLst/>
-          </a:prstGeom>
-        </p:spPr>
-      </p:pic>
-      <p:sp>
-        <p:nvSpPr>
-          <p:cNvPr id="6" name="TextBox 5"/>
-          <p:cNvSpPr txBox="1"/>
-          <p:nvPr/>
-        </p:nvSpPr>
-        <p:spPr>
-          <a:xfrm>
-            <a:off x="8183651" y="4855464"/>
-            <a:ext cx="548640" cy="205739"/>
-          </a:xfrm>
-          <a:prstGeom prst="rect">
-            <a:avLst/>
-          </a:prstGeom>
-          <a:noFill/>
-        </p:spPr>
-        <p:txBody>
-          <a:bodyPr wrap="square" lIns="0" rIns="0" tIns="0" bIns="0">
-            <a:spAutoFit/>
-          </a:bodyPr>
-          <a:lstStyle/>
-          <a:p>
-            <a:pPr algn="r"/>
-            <a:r>
-              <a:rPr sz="675" b="0" i="0">
-                <a:solidFill>
-                  <a:srgbClr val="8A8699"/>
-                </a:solidFill>
-                <a:latin typeface="Arial"/>
-              </a:rPr>
-              <a:t>9</a:t>
-            </a:r>
-          </a:p>
-        </p:txBody>
-      </p:sp>
-      <p:sp>
-        <p:nvSpPr>
-          <p:cNvPr id="7" name="Rounded Rectangle 6"/>
+      <p:sp>
+        <p:nvSpPr>
+          <p:cNvPr id="8" name="Rounded Rectangle 7"/>
           <p:cNvSpPr/>
           <p:nvPr/>
         </p:nvSpPr>
@@ -16027,7 +16421,7 @@
           </a:xfrm>
           <a:prstGeom prst="roundRect">
             <a:avLst>
-              <a:gd name="adj" fmla="val 6000"/>
+              <a:gd name="adj" fmla="val 5000"/>
             </a:avLst>
           </a:prstGeom>
           <a:solidFill>
@@ -16064,7 +16458,7 @@
       </p:sp>
       <p:sp>
         <p:nvSpPr>
-          <p:cNvPr id="8" name="TextBox 7"/>
+          <p:cNvPr id="9" name="TextBox 8"/>
           <p:cNvSpPr txBox="1"/>
           <p:nvPr/>
         </p:nvSpPr>
@@ -16090,7 +16484,7 @@
                 <a:solidFill>
                   <a:srgbClr val="801ED7"/>
                 </a:solidFill>
-                <a:latin typeface="Arial"/>
+                <a:latin typeface="Helvetica Neue"/>
               </a:rPr>
               <a:t>ROI multiple   =   </a:t>
             </a:r>
@@ -16099,7 +16493,7 @@
                 <a:solidFill>
                   <a:srgbClr val="1A1A24"/>
                 </a:solidFill>
-                <a:latin typeface="Arial"/>
+                <a:latin typeface="Helvetica Neue"/>
               </a:rPr>
               <a:t>cumulative incremental value to date   ÷   annual subscription ($264,000)</a:t>
             </a:r>
@@ -16108,7 +16502,7 @@
       </p:sp>
       <p:graphicFrame>
         <p:nvGraphicFramePr>
-          <p:cNvPr id="9" name="Table 8"/>
+          <p:cNvPr id="10" name="Table 9"/>
           <p:cNvGraphicFramePr>
             <a:graphicFrameLocks noGrp="1"/>
           </p:cNvGraphicFramePr>
@@ -16148,13 +16542,13 @@
                           <a:solidFill>
                             <a:srgbClr val="FFFFFF"/>
                           </a:solidFill>
-                          <a:latin typeface="Arial"/>
+                          <a:latin typeface="Helvetica Neue"/>
                         </a:rPr>
                         <a:t>Month</a:t>
                       </a:r>
                     </a:p>
                   </a:txBody>
-                  <a:tcPr anchor="ctr" marL="54864">
+                  <a:tcPr anchor="ctr" marL="20574" marR="20574" marT="0" marB="0">
                     <a:solidFill>
                       <a:srgbClr val="801ED7"/>
                     </a:solidFill>
@@ -16171,13 +16565,13 @@
                           <a:solidFill>
                             <a:srgbClr val="FFFFFF"/>
                           </a:solidFill>
-                          <a:latin typeface="Arial"/>
+                          <a:latin typeface="Helvetica Neue"/>
                         </a:rPr>
                         <a:t>Nov M1</a:t>
                       </a:r>
                     </a:p>
                   </a:txBody>
-                  <a:tcPr anchor="ctr" marL="13716" marR="13716">
+                  <a:tcPr anchor="ctr" marL="20574" marR="20574" marT="0" marB="0">
                     <a:solidFill>
                       <a:srgbClr val="801ED7"/>
                     </a:solidFill>
@@ -16194,13 +16588,13 @@
                           <a:solidFill>
                             <a:srgbClr val="FFFFFF"/>
                           </a:solidFill>
-                          <a:latin typeface="Arial"/>
+                          <a:latin typeface="Helvetica Neue"/>
                         </a:rPr>
                         <a:t>Dec M2</a:t>
                       </a:r>
                     </a:p>
                   </a:txBody>
-                  <a:tcPr anchor="ctr" marL="13716" marR="13716">
+                  <a:tcPr anchor="ctr" marL="20574" marR="20574" marT="0" marB="0">
                     <a:solidFill>
                       <a:srgbClr val="801ED7"/>
                     </a:solidFill>
@@ -16217,13 +16611,13 @@
                           <a:solidFill>
                             <a:srgbClr val="FFFFFF"/>
                           </a:solidFill>
-                          <a:latin typeface="Arial"/>
+                          <a:latin typeface="Helvetica Neue"/>
                         </a:rPr>
                         <a:t>Jan M3</a:t>
                       </a:r>
                     </a:p>
                   </a:txBody>
-                  <a:tcPr anchor="ctr" marL="13716" marR="13716">
+                  <a:tcPr anchor="ctr" marL="20574" marR="20574" marT="0" marB="0">
                     <a:solidFill>
                       <a:srgbClr val="801ED7"/>
                     </a:solidFill>
@@ -16240,13 +16634,13 @@
                           <a:solidFill>
                             <a:srgbClr val="FFFFFF"/>
                           </a:solidFill>
-                          <a:latin typeface="Arial"/>
+                          <a:latin typeface="Helvetica Neue"/>
                         </a:rPr>
                         <a:t>Feb M4</a:t>
                       </a:r>
                     </a:p>
                   </a:txBody>
-                  <a:tcPr anchor="ctr" marL="13716" marR="13716">
+                  <a:tcPr anchor="ctr" marL="20574" marR="20574" marT="0" marB="0">
                     <a:solidFill>
                       <a:srgbClr val="801ED7"/>
                     </a:solidFill>
@@ -16263,13 +16657,13 @@
                           <a:solidFill>
                             <a:srgbClr val="FFFFFF"/>
                           </a:solidFill>
-                          <a:latin typeface="Arial"/>
+                          <a:latin typeface="Helvetica Neue"/>
                         </a:rPr>
                         <a:t>Mar M5</a:t>
                       </a:r>
                     </a:p>
                   </a:txBody>
-                  <a:tcPr anchor="ctr" marL="13716" marR="13716">
+                  <a:tcPr anchor="ctr" marL="20574" marR="20574" marT="0" marB="0">
                     <a:solidFill>
                       <a:srgbClr val="801ED7"/>
                     </a:solidFill>
@@ -16286,13 +16680,13 @@
                           <a:solidFill>
                             <a:srgbClr val="FFFFFF"/>
                           </a:solidFill>
-                          <a:latin typeface="Arial"/>
+                          <a:latin typeface="Helvetica Neue"/>
                         </a:rPr>
                         <a:t>Apr M6</a:t>
                       </a:r>
                     </a:p>
                   </a:txBody>
-                  <a:tcPr anchor="ctr" marL="13716" marR="13716">
+                  <a:tcPr anchor="ctr" marL="20574" marR="20574" marT="0" marB="0">
                     <a:solidFill>
                       <a:srgbClr val="801ED7"/>
                     </a:solidFill>
@@ -16309,13 +16703,13 @@
                           <a:solidFill>
                             <a:srgbClr val="FFFFFF"/>
                           </a:solidFill>
-                          <a:latin typeface="Arial"/>
+                          <a:latin typeface="Helvetica Neue"/>
                         </a:rPr>
                         <a:t>May M7</a:t>
                       </a:r>
                     </a:p>
                   </a:txBody>
-                  <a:tcPr anchor="ctr" marL="13716" marR="13716">
+                  <a:tcPr anchor="ctr" marL="20574" marR="20574" marT="0" marB="0">
                     <a:solidFill>
                       <a:srgbClr val="801ED7"/>
                     </a:solidFill>
@@ -16332,13 +16726,13 @@
                           <a:solidFill>
                             <a:srgbClr val="FFFFFF"/>
                           </a:solidFill>
-                          <a:latin typeface="Arial"/>
+                          <a:latin typeface="Helvetica Neue"/>
                         </a:rPr>
                         <a:t>Jun M8</a:t>
                       </a:r>
                     </a:p>
                   </a:txBody>
-                  <a:tcPr anchor="ctr" marL="13716" marR="13716">
+                  <a:tcPr anchor="ctr" marL="20574" marR="20574" marT="0" marB="0">
                     <a:solidFill>
                       <a:srgbClr val="801ED7"/>
                     </a:solidFill>
@@ -16355,13 +16749,13 @@
                           <a:solidFill>
                             <a:srgbClr val="FFFFFF"/>
                           </a:solidFill>
-                          <a:latin typeface="Arial"/>
+                          <a:latin typeface="Helvetica Neue"/>
                         </a:rPr>
                         <a:t>Jul M9</a:t>
                       </a:r>
                     </a:p>
                   </a:txBody>
-                  <a:tcPr anchor="ctr" marL="13716" marR="13716">
+                  <a:tcPr anchor="ctr" marL="20574" marR="20574" marT="0" marB="0">
                     <a:solidFill>
                       <a:srgbClr val="801ED7"/>
                     </a:solidFill>
@@ -16380,13 +16774,13 @@
                           <a:solidFill>
                             <a:srgbClr val="801ED7"/>
                           </a:solidFill>
-                          <a:latin typeface="Arial"/>
+                          <a:latin typeface="Helvetica Neue"/>
                         </a:rPr>
                         <a:t>Value that month</a:t>
                       </a:r>
                     </a:p>
                   </a:txBody>
-                  <a:tcPr anchor="ctr" marL="54864">
+                  <a:tcPr anchor="ctr" marL="20574" marR="20574" marT="0" marB="0">
                     <a:solidFill>
                       <a:srgbClr val="EFEDFF"/>
                     </a:solidFill>
@@ -16403,13 +16797,13 @@
                           <a:solidFill>
                             <a:srgbClr val="1A1A24"/>
                           </a:solidFill>
-                          <a:latin typeface="Arial"/>
+                          <a:latin typeface="Helvetica Neue"/>
                         </a:rPr>
                         <a:t>$0</a:t>
                       </a:r>
                     </a:p>
                   </a:txBody>
-                  <a:tcPr anchor="ctr" marL="13716" marR="13716">
+                  <a:tcPr anchor="ctr" marL="20574" marR="20574" marT="0" marB="0">
                     <a:solidFill>
                       <a:srgbClr val="FFFFFF"/>
                     </a:solidFill>
@@ -16426,13 +16820,13 @@
                           <a:solidFill>
                             <a:srgbClr val="1A1A24"/>
                           </a:solidFill>
-                          <a:latin typeface="Arial"/>
+                          <a:latin typeface="Helvetica Neue"/>
                         </a:rPr>
                         <a:t>$0</a:t>
                       </a:r>
                     </a:p>
                   </a:txBody>
-                  <a:tcPr anchor="ctr" marL="13716" marR="13716">
+                  <a:tcPr anchor="ctr" marL="20574" marR="20574" marT="0" marB="0">
                     <a:solidFill>
                       <a:srgbClr val="FFFFFF"/>
                     </a:solidFill>
@@ -16449,13 +16843,13 @@
                           <a:solidFill>
                             <a:srgbClr val="1A1A24"/>
                           </a:solidFill>
-                          <a:latin typeface="Arial"/>
+                          <a:latin typeface="Helvetica Neue"/>
                         </a:rPr>
                         <a:t>$0</a:t>
                       </a:r>
                     </a:p>
                   </a:txBody>
-                  <a:tcPr anchor="ctr" marL="13716" marR="13716">
+                  <a:tcPr anchor="ctr" marL="20574" marR="20574" marT="0" marB="0">
                     <a:solidFill>
                       <a:srgbClr val="FFFFFF"/>
                     </a:solidFill>
@@ -16472,13 +16866,13 @@
                           <a:solidFill>
                             <a:srgbClr val="1A1A24"/>
                           </a:solidFill>
-                          <a:latin typeface="Arial"/>
+                          <a:latin typeface="Helvetica Neue"/>
                         </a:rPr>
                         <a:t>$32k</a:t>
                       </a:r>
                     </a:p>
                   </a:txBody>
-                  <a:tcPr anchor="ctr" marL="13716" marR="13716">
+                  <a:tcPr anchor="ctr" marL="20574" marR="20574" marT="0" marB="0">
                     <a:solidFill>
                       <a:srgbClr val="FFFFFF"/>
                     </a:solidFill>
@@ -16495,13 +16889,13 @@
                           <a:solidFill>
                             <a:srgbClr val="1A1A24"/>
                           </a:solidFill>
-                          <a:latin typeface="Arial"/>
+                          <a:latin typeface="Helvetica Neue"/>
                         </a:rPr>
                         <a:t>$65k</a:t>
                       </a:r>
                     </a:p>
                   </a:txBody>
-                  <a:tcPr anchor="ctr" marL="13716" marR="13716">
+                  <a:tcPr anchor="ctr" marL="20574" marR="20574" marT="0" marB="0">
                     <a:solidFill>
                       <a:srgbClr val="FFFFFF"/>
                     </a:solidFill>
@@ -16518,13 +16912,13 @@
                           <a:solidFill>
                             <a:srgbClr val="1A1A24"/>
                           </a:solidFill>
-                          <a:latin typeface="Arial"/>
+                          <a:latin typeface="Helvetica Neue"/>
                         </a:rPr>
                         <a:t>$97k</a:t>
                       </a:r>
                     </a:p>
                   </a:txBody>
-                  <a:tcPr anchor="ctr" marL="13716" marR="13716">
+                  <a:tcPr anchor="ctr" marL="20574" marR="20574" marT="0" marB="0">
                     <a:solidFill>
                       <a:srgbClr val="FFFFFF"/>
                     </a:solidFill>
@@ -16541,13 +16935,13 @@
                           <a:solidFill>
                             <a:srgbClr val="1A1A24"/>
                           </a:solidFill>
-                          <a:latin typeface="Arial"/>
+                          <a:latin typeface="Helvetica Neue"/>
                         </a:rPr>
                         <a:t>$129k</a:t>
                       </a:r>
                     </a:p>
                   </a:txBody>
-                  <a:tcPr anchor="ctr" marL="13716" marR="13716">
+                  <a:tcPr anchor="ctr" marL="20574" marR="20574" marT="0" marB="0">
                     <a:solidFill>
                       <a:srgbClr val="FFFFFF"/>
                     </a:solidFill>
@@ -16564,13 +16958,13 @@
                           <a:solidFill>
                             <a:srgbClr val="1A1A24"/>
                           </a:solidFill>
-                          <a:latin typeface="Arial"/>
+                          <a:latin typeface="Helvetica Neue"/>
                         </a:rPr>
                         <a:t>$129k</a:t>
                       </a:r>
                     </a:p>
                   </a:txBody>
-                  <a:tcPr anchor="ctr" marL="13716" marR="13716">
+                  <a:tcPr anchor="ctr" marL="20574" marR="20574" marT="0" marB="0">
                     <a:solidFill>
                       <a:srgbClr val="FFFFFF"/>
                     </a:solidFill>
@@ -16587,13 +16981,13 @@
                           <a:solidFill>
                             <a:srgbClr val="1A1A24"/>
                           </a:solidFill>
-                          <a:latin typeface="Arial"/>
+                          <a:latin typeface="Helvetica Neue"/>
                         </a:rPr>
                         <a:t>$129k</a:t>
                       </a:r>
                     </a:p>
                   </a:txBody>
-                  <a:tcPr anchor="ctr" marL="13716" marR="13716">
+                  <a:tcPr anchor="ctr" marL="20574" marR="20574" marT="0" marB="0">
                     <a:solidFill>
                       <a:srgbClr val="FFFFFF"/>
                     </a:solidFill>
@@ -16612,13 +17006,13 @@
                           <a:solidFill>
                             <a:srgbClr val="801ED7"/>
                           </a:solidFill>
-                          <a:latin typeface="Arial"/>
+                          <a:latin typeface="Helvetica Neue"/>
                         </a:rPr>
                         <a:t>Cumulative value</a:t>
                       </a:r>
                     </a:p>
                   </a:txBody>
-                  <a:tcPr anchor="ctr" marL="54864">
+                  <a:tcPr anchor="ctr" marL="20574" marR="20574" marT="0" marB="0">
                     <a:solidFill>
                       <a:srgbClr val="EFEDFF"/>
                     </a:solidFill>
@@ -16635,13 +17029,13 @@
                           <a:solidFill>
                             <a:srgbClr val="801ED7"/>
                           </a:solidFill>
-                          <a:latin typeface="Arial"/>
+                          <a:latin typeface="Helvetica Neue"/>
                         </a:rPr>
                         <a:t>$0</a:t>
                       </a:r>
                     </a:p>
                   </a:txBody>
-                  <a:tcPr anchor="ctr" marL="13716" marR="13716">
+                  <a:tcPr anchor="ctr" marL="20574" marR="20574" marT="0" marB="0">
                     <a:solidFill>
                       <a:srgbClr val="FAF9FE"/>
                     </a:solidFill>
@@ -16658,13 +17052,13 @@
                           <a:solidFill>
                             <a:srgbClr val="801ED7"/>
                           </a:solidFill>
-                          <a:latin typeface="Arial"/>
+                          <a:latin typeface="Helvetica Neue"/>
                         </a:rPr>
                         <a:t>$0</a:t>
                       </a:r>
                     </a:p>
                   </a:txBody>
-                  <a:tcPr anchor="ctr" marL="13716" marR="13716">
+                  <a:tcPr anchor="ctr" marL="20574" marR="20574" marT="0" marB="0">
                     <a:solidFill>
                       <a:srgbClr val="FAF9FE"/>
                     </a:solidFill>
@@ -16681,13 +17075,13 @@
                           <a:solidFill>
                             <a:srgbClr val="801ED7"/>
                           </a:solidFill>
-                          <a:latin typeface="Arial"/>
+                          <a:latin typeface="Helvetica Neue"/>
                         </a:rPr>
                         <a:t>$0</a:t>
                       </a:r>
                     </a:p>
                   </a:txBody>
-                  <a:tcPr anchor="ctr" marL="13716" marR="13716">
+                  <a:tcPr anchor="ctr" marL="20574" marR="20574" marT="0" marB="0">
                     <a:solidFill>
                       <a:srgbClr val="FAF9FE"/>
                     </a:solidFill>
@@ -16704,13 +17098,13 @@
                           <a:solidFill>
                             <a:srgbClr val="801ED7"/>
                           </a:solidFill>
-                          <a:latin typeface="Arial"/>
+                          <a:latin typeface="Helvetica Neue"/>
                         </a:rPr>
                         <a:t>$32k</a:t>
                       </a:r>
                     </a:p>
                   </a:txBody>
-                  <a:tcPr anchor="ctr" marL="13716" marR="13716">
+                  <a:tcPr anchor="ctr" marL="20574" marR="20574" marT="0" marB="0">
                     <a:solidFill>
                       <a:srgbClr val="FAF9FE"/>
                     </a:solidFill>
@@ -16727,13 +17121,13 @@
                           <a:solidFill>
                             <a:srgbClr val="801ED7"/>
                           </a:solidFill>
-                          <a:latin typeface="Arial"/>
+                          <a:latin typeface="Helvetica Neue"/>
                         </a:rPr>
                         <a:t>$97k</a:t>
                       </a:r>
                     </a:p>
                   </a:txBody>
-                  <a:tcPr anchor="ctr" marL="13716" marR="13716">
+                  <a:tcPr anchor="ctr" marL="20574" marR="20574" marT="0" marB="0">
                     <a:solidFill>
                       <a:srgbClr val="FAF9FE"/>
                     </a:solidFill>
@@ -16750,13 +17144,13 @@
                           <a:solidFill>
                             <a:srgbClr val="801ED7"/>
                           </a:solidFill>
-                          <a:latin typeface="Arial"/>
+                          <a:latin typeface="Helvetica Neue"/>
                         </a:rPr>
                         <a:t>$193k</a:t>
                       </a:r>
                     </a:p>
                   </a:txBody>
-                  <a:tcPr anchor="ctr" marL="13716" marR="13716">
+                  <a:tcPr anchor="ctr" marL="20574" marR="20574" marT="0" marB="0">
                     <a:solidFill>
                       <a:srgbClr val="FAF9FE"/>
                     </a:solidFill>
@@ -16773,13 +17167,13 @@
                           <a:solidFill>
                             <a:srgbClr val="801ED7"/>
                           </a:solidFill>
-                          <a:latin typeface="Arial"/>
+                          <a:latin typeface="Helvetica Neue"/>
                         </a:rPr>
                         <a:t>$323k</a:t>
                       </a:r>
                     </a:p>
                   </a:txBody>
-                  <a:tcPr anchor="ctr" marL="13716" marR="13716">
+                  <a:tcPr anchor="ctr" marL="20574" marR="20574" marT="0" marB="0">
                     <a:solidFill>
                       <a:srgbClr val="FAF9FE"/>
                     </a:solidFill>
@@ -16796,13 +17190,13 @@
                           <a:solidFill>
                             <a:srgbClr val="801ED7"/>
                           </a:solidFill>
-                          <a:latin typeface="Arial"/>
+                          <a:latin typeface="Helvetica Neue"/>
                         </a:rPr>
                         <a:t>$451k</a:t>
                       </a:r>
                     </a:p>
                   </a:txBody>
-                  <a:tcPr anchor="ctr" marL="13716" marR="13716">
+                  <a:tcPr anchor="ctr" marL="20574" marR="20574" marT="0" marB="0">
                     <a:solidFill>
                       <a:srgbClr val="FAF9FE"/>
                     </a:solidFill>
@@ -16819,13 +17213,13 @@
                           <a:solidFill>
                             <a:srgbClr val="801ED7"/>
                           </a:solidFill>
-                          <a:latin typeface="Arial"/>
+                          <a:latin typeface="Helvetica Neue"/>
                         </a:rPr>
                         <a:t>$580k</a:t>
                       </a:r>
                     </a:p>
                   </a:txBody>
-                  <a:tcPr anchor="ctr" marL="13716" marR="13716">
+                  <a:tcPr anchor="ctr" marL="20574" marR="20574" marT="0" marB="0">
                     <a:solidFill>
                       <a:srgbClr val="FAF9FE"/>
                     </a:solidFill>
@@ -16838,7 +17232,7 @@
       </p:graphicFrame>
       <p:sp>
         <p:nvSpPr>
-          <p:cNvPr id="10" name="Rounded Rectangle 9"/>
+          <p:cNvPr id="11" name="Rounded Rectangle 10"/>
           <p:cNvSpPr/>
           <p:nvPr/>
         </p:nvSpPr>
@@ -16855,10 +17249,8 @@
           <a:solidFill>
             <a:srgbClr val="801ED7"/>
           </a:solidFill>
-          <a:ln w="9525">
-            <a:solidFill>
-              <a:srgbClr val="E3DFF5"/>
-            </a:solidFill>
+          <a:ln>
+            <a:noFill/>
           </a:ln>
           <a:effectLst/>
         </p:spPr>
@@ -16886,7 +17278,7 @@
       </p:sp>
       <p:sp>
         <p:nvSpPr>
-          <p:cNvPr id="11" name="TextBox 10"/>
+          <p:cNvPr id="12" name="TextBox 11"/>
           <p:cNvSpPr txBox="1"/>
           <p:nvPr/>
         </p:nvSpPr>
@@ -16912,7 +17304,7 @@
                 <a:solidFill>
                   <a:srgbClr val="FFFFFF"/>
                 </a:solidFill>
-                <a:latin typeface="Arial"/>
+                <a:latin typeface="Helvetica Neue"/>
               </a:rPr>
               <a:t>$614,000</a:t>
             </a:r>
@@ -16921,7 +17313,7 @@
                 <a:solidFill>
                   <a:srgbClr val="D9D3FB"/>
                 </a:solidFill>
-                <a:latin typeface="Arial"/>
+                <a:latin typeface="Helvetica Neue"/>
               </a:rPr>
               <a:t>   ÷   </a:t>
             </a:r>
@@ -16930,7 +17322,7 @@
                 <a:solidFill>
                   <a:srgbClr val="FFFFFF"/>
                 </a:solidFill>
-                <a:latin typeface="Arial"/>
+                <a:latin typeface="Helvetica Neue"/>
               </a:rPr>
               <a:t>$264,000</a:t>
             </a:r>
@@ -16939,7 +17331,7 @@
                 <a:solidFill>
                   <a:srgbClr val="D9D3FB"/>
                 </a:solidFill>
-                <a:latin typeface="Arial"/>
+                <a:latin typeface="Helvetica Neue"/>
               </a:rPr>
               <a:t>   =   </a:t>
             </a:r>
@@ -16948,7 +17340,7 @@
                 <a:solidFill>
                   <a:srgbClr val="FFA524"/>
                 </a:solidFill>
-                <a:latin typeface="Arial"/>
+                <a:latin typeface="Helvetica Neue"/>
               </a:rPr>
               <a:t>2.3×</a:t>
             </a:r>
@@ -16957,7 +17349,7 @@
       </p:sp>
       <p:sp>
         <p:nvSpPr>
-          <p:cNvPr id="12" name="TextBox 11"/>
+          <p:cNvPr id="13" name="TextBox 12"/>
           <p:cNvSpPr txBox="1"/>
           <p:nvPr/>
         </p:nvSpPr>
@@ -16983,7 +17375,7 @@
                 <a:solidFill>
                   <a:srgbClr val="D9D3FB"/>
                 </a:solidFill>
-                <a:latin typeface="Arial"/>
+                <a:latin typeface="Helvetica Neue"/>
               </a:rPr>
               <a:t>cumulative value to July 2027 (month 9)   ÷   annual subscription</a:t>
             </a:r>
@@ -16992,7 +17384,7 @@
       </p:sp>
       <p:sp>
         <p:nvSpPr>
-          <p:cNvPr id="13" name="TextBox 12"/>
+          <p:cNvPr id="14" name="TextBox 13"/>
           <p:cNvSpPr txBox="1"/>
           <p:nvPr/>
         </p:nvSpPr>
@@ -17022,7 +17414,7 @@
                 <a:solidFill>
                   <a:srgbClr val="8A8699"/>
                 </a:solidFill>
-                <a:latin typeface="Arial"/>
+                <a:latin typeface="Helvetica Neue"/>
               </a:rPr>
               <a:t>Run-rate value is $136,000/month (≈£103,000) ($1.64M target ÷ 12 — engagement use case, 27 May model). ROI shown at $264k early-sign price; at $317k standard rate, July 2027 ROI is 1.9×. Audience ramps 25%/50%/75% over Feb–Apr 2027.</a:t>
             </a:r>
